--- a/week6/Week6_draftPresentation.pptx
+++ b/week6/Week6_draftPresentation.pptx
@@ -16,6 +16,8 @@
     <p:sldId id="264" r:id="rId11"/>
     <p:sldId id="265" r:id="rId12"/>
     <p:sldId id="266" r:id="rId13"/>
+    <p:sldId id="267" r:id="rId14"/>
+    <p:sldId id="268" r:id="rId15"/>
   </p:sldIdLst>
   <p:sldSz cx="12192000" cy="6858000"/>
   <p:notesSz cx="7772400" cy="10058400"/>
@@ -264,7 +266,7 @@
                 <a:tab algn="l" pos="0"/>
               </a:tabLst>
             </a:pPr>
-            <a:fld id="{91069BCA-AF24-478E-9A51-747E48943514}" type="slidenum">
+            <a:fld id="{25FB1F38-29D5-4CBF-93C3-4895CB01FF99}" type="slidenum">
               <a:rPr b="0" lang="en-US" sz="1200" strike="noStrike" u="none">
                 <a:solidFill>
                   <a:schemeClr val="dk1">
@@ -275,7 +277,7 @@
                 <a:uFillTx/>
                 <a:latin typeface="Calibri"/>
               </a:rPr>
-              <a:t>11</a:t>
+              <a:t>13</a:t>
             </a:fld>
             <a:endParaRPr b="0" lang="en-US" sz="1200" strike="noStrike" u="none">
               <a:solidFill>
@@ -1116,7 +1118,7 @@
                 <a:tab algn="l" pos="0"/>
               </a:tabLst>
             </a:pPr>
-            <a:fld id="{150DBB2B-5960-4684-AA08-85E76DCA875B}" type="slidenum">
+            <a:fld id="{28065BC5-6859-4F95-BEE5-47068A5A2EF4}" type="slidenum">
               <a:rPr b="0" lang="en-US" sz="1200" strike="noStrike" u="none">
                 <a:solidFill>
                   <a:schemeClr val="dk1">
@@ -1446,7 +1448,7 @@
                 <a:tab algn="l" pos="0"/>
               </a:tabLst>
             </a:pPr>
-            <a:fld id="{44D8DE41-8C90-4BFA-8E53-1255497995D0}" type="slidenum">
+            <a:fld id="{A137ED08-1591-4657-B7F9-B44C1F41460F}" type="slidenum">
               <a:rPr b="0" lang="en-US" sz="1200" strike="noStrike" u="none">
                 <a:solidFill>
                   <a:schemeClr val="dk1">
@@ -2037,7 +2039,7 @@
                 <a:tab algn="l" pos="0"/>
               </a:tabLst>
             </a:pPr>
-            <a:fld id="{1558D5AC-6D64-4899-9C44-B801117D21A1}" type="slidenum">
+            <a:fld id="{A765D1F4-7897-45D6-A296-88D13AD702DD}" type="slidenum">
               <a:rPr b="0" lang="en-US" sz="1200" strike="noStrike" u="none">
                 <a:solidFill>
                   <a:schemeClr val="dk1">
@@ -2048,7 +2050,7 @@
                 <a:uFillTx/>
                 <a:latin typeface="Calibri"/>
               </a:rPr>
-              <a:t>11</a:t>
+              <a:t>13</a:t>
             </a:fld>
             <a:endParaRPr b="0" lang="en-US" sz="1200" strike="noStrike" u="none">
               <a:solidFill>
@@ -2488,7 +2490,7 @@
                 <a:tab algn="l" pos="0"/>
               </a:tabLst>
             </a:pPr>
-            <a:fld id="{F4B3346A-F516-4D71-823D-DA99FB4BC004}" type="slidenum">
+            <a:fld id="{A844FE3C-4F5D-4733-ABDE-5A702C34BEBB}" type="slidenum">
               <a:rPr b="0" lang="en-US" sz="1200" strike="noStrike" u="none">
                 <a:solidFill>
                   <a:schemeClr val="dk1">
@@ -2499,7 +2501,7 @@
                 <a:uFillTx/>
                 <a:latin typeface="Calibri"/>
               </a:rPr>
-              <a:t>11</a:t>
+              <a:t>13</a:t>
             </a:fld>
             <a:endParaRPr b="0" lang="en-US" sz="1200" strike="noStrike" u="none">
               <a:solidFill>
@@ -2818,7 +2820,7 @@
                 <a:tab algn="l" pos="0"/>
               </a:tabLst>
             </a:pPr>
-            <a:fld id="{810F3FAB-5D42-4785-9B80-D24840F44FA5}" type="slidenum">
+            <a:fld id="{2EFCDB78-F17D-4254-822C-5F5CE05FF797}" type="slidenum">
               <a:rPr b="0" lang="en-US" sz="1200" strike="noStrike" u="none">
                 <a:solidFill>
                   <a:schemeClr val="dk1">
@@ -2829,7 +2831,7 @@
                 <a:uFillTx/>
                 <a:latin typeface="Calibri"/>
               </a:rPr>
-              <a:t>11</a:t>
+              <a:t>13</a:t>
             </a:fld>
             <a:endParaRPr b="0" lang="en-US" sz="1200" strike="noStrike" u="none">
               <a:solidFill>
@@ -3621,7 +3623,7 @@
                 <a:tab algn="l" pos="0"/>
               </a:tabLst>
             </a:pPr>
-            <a:fld id="{40DE22D7-6761-450D-B7B1-D60207912FD5}" type="slidenum">
+            <a:fld id="{8E1014AB-3FF9-4F87-A669-D41B85C2EC07}" type="slidenum">
               <a:rPr b="0" lang="en-US" sz="1200" strike="noStrike" u="none">
                 <a:solidFill>
                   <a:schemeClr val="dk1">
@@ -4150,7 +4152,7 @@
                 <a:tab algn="l" pos="0"/>
               </a:tabLst>
             </a:pPr>
-            <a:fld id="{D05FD830-5BEC-4F36-98B2-EB7D1E97BBF1}" type="slidenum">
+            <a:fld id="{C2D0FF09-645A-452A-986D-2470CD185441}" type="slidenum">
               <a:rPr b="0" lang="en-US" sz="1200" strike="noStrike" u="none">
                 <a:solidFill>
                   <a:schemeClr val="dk1">
@@ -4679,7 +4681,7 @@
                 <a:tab algn="l" pos="0"/>
               </a:tabLst>
             </a:pPr>
-            <a:fld id="{B43A2946-3A2B-4915-9D88-109BF31FE4D6}" type="slidenum">
+            <a:fld id="{97EE1AA2-65F3-45E6-80C1-22AC51C7FFCE}" type="slidenum">
               <a:rPr b="0" lang="en-US" sz="1200" strike="noStrike" u="none">
                 <a:solidFill>
                   <a:schemeClr val="dk1">
@@ -5073,7 +5075,7 @@
                 <a:tab algn="l" pos="0"/>
               </a:tabLst>
             </a:pPr>
-            <a:fld id="{DE47EDA5-67ED-4E29-9BB9-62F53708757E}" type="slidenum">
+            <a:fld id="{CB4A5EC9-3235-4A22-9D0F-488DDF453DB8}" type="slidenum">
               <a:rPr b="0" lang="en-US" sz="1200" strike="noStrike" u="none">
                 <a:solidFill>
                   <a:schemeClr val="dk1">
@@ -5801,7 +5803,7 @@
                 <a:tab algn="l" pos="0"/>
               </a:tabLst>
             </a:pPr>
-            <a:fld id="{2BEBE0FD-5287-4C38-BC8F-3A3489F9E758}" type="slidenum">
+            <a:fld id="{4A7C8D9E-7083-4029-AC5B-238B45CDC876}" type="slidenum">
               <a:rPr b="0" lang="en-US" sz="1200" strike="noStrike" u="none">
                 <a:solidFill>
                   <a:schemeClr val="dk1">
@@ -5930,7 +5932,7 @@
                 <a:latin typeface="Calibri Light"/>
                 <a:ea typeface="Calibri Light"/>
               </a:rPr>
-              <a:t>Post-Treatment Brain Tumor Segmentation using PyTorch U-Net Model </a:t>
+              <a:t>Post-Treatment Brain Tumor Segmentation using MONAI SegResNet Model </a:t>
             </a:r>
             <a:endParaRPr b="0" lang="en-US" sz="4800" strike="noStrike" u="none">
               <a:solidFill>
@@ -7956,7 +7958,7 @@
         <p:spPr>
           <a:xfrm>
             <a:off x="457920" y="1970640"/>
-            <a:ext cx="5257080" cy="4343400"/>
+            <a:ext cx="5485680" cy="4343400"/>
           </a:xfrm>
           <a:prstGeom prst="rect">
             <a:avLst/>
@@ -7974,7 +7976,7 @@
         </p:style>
         <p:txBody>
           <a:bodyPr lIns="90000" rIns="90000" tIns="45000" bIns="45000" anchor="t">
-            <a:normAutofit fontScale="85000" lnSpcReduction="19999"/>
+            <a:normAutofit fontScale="85000" lnSpcReduction="9999"/>
           </a:bodyPr>
           <a:p>
             <a:pPr>
@@ -7994,29 +7996,7 @@
                 <a:uFillTx/>
                 <a:latin typeface="Arial"/>
               </a:rPr>
-              <a:t>The </a:t>
-            </a:r>
-            <a:r>
-              <a:rPr b="1" lang="en-US" sz="2400" strike="noStrike" u="none">
-                <a:solidFill>
-                  <a:srgbClr val="000000"/>
-                </a:solidFill>
-                <a:effectLst/>
-                <a:uFillTx/>
-                <a:latin typeface="Arial"/>
-              </a:rPr>
-              <a:t>U-Net</a:t>
-            </a:r>
-            <a:r>
-              <a:rPr b="0" lang="en-US" sz="2400" strike="noStrike" u="none">
-                <a:solidFill>
-                  <a:srgbClr val="000000"/>
-                </a:solidFill>
-                <a:effectLst/>
-                <a:uFillTx/>
-                <a:latin typeface="Arial"/>
-              </a:rPr>
-              <a:t> model was chosen for this study for the following reasons</a:t>
+              <a:t>The Medical Open Network for Artificial Intelligence (MONAI)’s SegResNet model was chosen for the following reasons:</a:t>
             </a:r>
             <a:endParaRPr b="0" lang="en-US" sz="2400" strike="noStrike" u="none">
               <a:solidFill>
@@ -8051,7 +8031,7 @@
                 <a:uFillTx/>
                 <a:latin typeface="Arial"/>
               </a:rPr>
-              <a:t>Provides excellent segmentation and accuracy for Brain Tumor MRI data </a:t>
+              <a:t>It is a residual encoder/decoder CNN designed specifically for 2D/3D medical segmenation</a:t>
             </a:r>
             <a:endParaRPr b="0" lang="en-US" sz="2400" strike="noStrike" u="none">
               <a:solidFill>
@@ -8086,7 +8066,7 @@
                 <a:uFillTx/>
                 <a:latin typeface="Arial"/>
               </a:rPr>
-              <a:t>Works well with limited medical datasets; therefor, it should really excel when trained on the BraTS dataset</a:t>
+              <a:t>Uses less GPU resources than a transformer-style model making it a good fit for training with consumer grade GPUs</a:t>
             </a:r>
             <a:endParaRPr b="0" lang="en-US" sz="2400" strike="noStrike" u="none">
               <a:solidFill>
@@ -8121,7 +8101,7 @@
                 <a:uFillTx/>
                 <a:latin typeface="Arial"/>
               </a:rPr>
-              <a:t>Efficient training on modern GPUs like the one in my home system</a:t>
+              <a:t>Is a top performer in challenges like BraTS</a:t>
             </a:r>
             <a:endParaRPr b="0" lang="en-US" sz="2400" strike="noStrike" u="none">
               <a:solidFill>
@@ -8156,112 +8136,7 @@
                 <a:uFillTx/>
                 <a:latin typeface="Arial"/>
               </a:rPr>
-              <a:t>Huge ecosystem and tooling</a:t>
-            </a:r>
-            <a:endParaRPr b="0" lang="en-US" sz="2400" strike="noStrike" u="none">
-              <a:solidFill>
-                <a:srgbClr val="000000"/>
-              </a:solidFill>
-              <a:effectLst/>
-              <a:uFillTx/>
-              <a:latin typeface="Arial"/>
-            </a:endParaRPr>
-          </a:p>
-          <a:p>
-            <a:pPr lvl="1" marL="432000" indent="-216000">
-              <a:lnSpc>
-                <a:spcPct val="100000"/>
-              </a:lnSpc>
-              <a:spcBef>
-                <a:spcPts val="1417"/>
-              </a:spcBef>
-              <a:buClr>
-                <a:srgbClr val="000000"/>
-              </a:buClr>
-              <a:buSzPct val="45000"/>
-              <a:buFont typeface="Wingdings" charset="2"/>
-              <a:buChar char=""/>
-            </a:pPr>
-            <a:r>
-              <a:rPr b="0" lang="en-US" sz="2400" strike="noStrike" u="none">
-                <a:solidFill>
-                  <a:srgbClr val="000000"/>
-                </a:solidFill>
-                <a:effectLst/>
-                <a:uFillTx/>
-                <a:latin typeface="Arial"/>
-              </a:rPr>
-              <a:t>NnU-Net automation</a:t>
-            </a:r>
-            <a:endParaRPr b="0" lang="en-US" sz="2400" strike="noStrike" u="none">
-              <a:solidFill>
-                <a:srgbClr val="000000"/>
-              </a:solidFill>
-              <a:effectLst/>
-              <a:uFillTx/>
-              <a:latin typeface="Arial"/>
-            </a:endParaRPr>
-          </a:p>
-          <a:p>
-            <a:pPr lvl="1" marL="432000" indent="-216000">
-              <a:lnSpc>
-                <a:spcPct val="100000"/>
-              </a:lnSpc>
-              <a:spcBef>
-                <a:spcPts val="1417"/>
-              </a:spcBef>
-              <a:buClr>
-                <a:srgbClr val="000000"/>
-              </a:buClr>
-              <a:buSzPct val="45000"/>
-              <a:buFont typeface="Wingdings" charset="2"/>
-              <a:buChar char=""/>
-            </a:pPr>
-            <a:r>
-              <a:rPr b="0" lang="en-US" sz="2400" strike="noStrike" u="none">
-                <a:solidFill>
-                  <a:srgbClr val="000000"/>
-                </a:solidFill>
-                <a:effectLst/>
-                <a:uFillTx/>
-                <a:latin typeface="Arial"/>
-              </a:rPr>
-              <a:t>MONAI support</a:t>
-            </a:r>
-            <a:endParaRPr b="0" lang="en-US" sz="2400" strike="noStrike" u="none">
-              <a:solidFill>
-                <a:srgbClr val="000000"/>
-              </a:solidFill>
-              <a:effectLst/>
-              <a:uFillTx/>
-              <a:latin typeface="Arial"/>
-            </a:endParaRPr>
-          </a:p>
-          <a:p>
-            <a:pPr lvl="1" marL="432000" indent="-216000">
-              <a:lnSpc>
-                <a:spcPct val="100000"/>
-              </a:lnSpc>
-              <a:spcBef>
-                <a:spcPts val="1417"/>
-              </a:spcBef>
-              <a:buClr>
-                <a:srgbClr val="000000"/>
-              </a:buClr>
-              <a:buSzPct val="45000"/>
-              <a:buFont typeface="Wingdings" charset="2"/>
-              <a:buChar char=""/>
-            </a:pPr>
-            <a:r>
-              <a:rPr b="0" lang="en-US" sz="2400" strike="noStrike" u="none">
-                <a:solidFill>
-                  <a:srgbClr val="000000"/>
-                </a:solidFill>
-                <a:effectLst/>
-                <a:uFillTx/>
-                <a:latin typeface="Arial"/>
-              </a:rPr>
-              <a:t>Numerous examples</a:t>
+              <a:t>Is part of the vast MONAI ecosystem</a:t>
             </a:r>
             <a:endParaRPr b="0" lang="en-US" sz="2400" strike="noStrike" u="none">
               <a:solidFill>
@@ -8286,8 +8161,8 @@
         </p:blipFill>
         <p:spPr>
           <a:xfrm>
-            <a:off x="6048000" y="2286000"/>
-            <a:ext cx="5382000" cy="2732760"/>
+            <a:off x="6400800" y="2971800"/>
+            <a:ext cx="5257800" cy="1949400"/>
           </a:xfrm>
           <a:prstGeom prst="rect">
             <a:avLst/>
@@ -8298,6 +8173,2200 @@
           </a:ln>
         </p:spPr>
       </p:pic>
+    </p:spTree>
+  </p:cSld>
+  <mc:AlternateContent>
+    <mc:Choice Requires="p14">
+      <p:transition spd="slow" p14:dur="2000"/>
+    </mc:Choice>
+    <mc:Fallback>
+      <p:transition spd="slow"/>
+    </mc:Fallback>
+  </mc:AlternateContent>
+</p:sld>
+</file>
+
+<file path=ppt/slides/slide12.xml><?xml version="1.0" encoding="utf-8"?>
+<p:sld xmlns:a="http://schemas.openxmlformats.org/drawingml/2006/main" xmlns:p="http://schemas.openxmlformats.org/presentationml/2006/main" xmlns:r="http://schemas.openxmlformats.org/officeDocument/2006/relationships" xmlns:p14="http://schemas.microsoft.com/office/powerpoint/2010/main" xmlns:p15="http://schemas.microsoft.com/office/powerpoint/2012/main" xmlns:mc="http://schemas.openxmlformats.org/markup-compatibility/2006">
+  <p:cSld>
+    <p:bg>
+      <p:bgPr>
+        <a:solidFill>
+          <a:schemeClr val="lt1"/>
+        </a:solidFill>
+      </p:bgPr>
+    </p:bg>
+    <p:spTree>
+      <p:nvGrpSpPr>
+        <p:cNvPr id="1" name=""/>
+        <p:cNvGrpSpPr/>
+        <p:nvPr/>
+      </p:nvGrpSpPr>
+      <p:grpSpPr>
+        <a:xfrm>
+          <a:off x="0" y="0"/>
+          <a:ext cx="0" cy="0"/>
+          <a:chOff x="0" y="0"/>
+          <a:chExt cx="0" cy="0"/>
+        </a:xfrm>
+      </p:grpSpPr>
+      <p:sp useBgFill="1">
+        <p:nvSpPr>
+          <p:cNvPr id="118" name="Rectangle 8">
+            <a:extLst>
+              <a:ext uri="{C183D7F6-B498-43B3-948B-1728B52AA6E4}">
+                <adec:decorative xmlns:adec="http://schemas.microsoft.com/office/drawing/2017/decorative" val="1"/>
+              </a:ext>
+            </a:extLst>
+          </p:cNvPr>
+          <p:cNvSpPr/>
+          <p:nvPr/>
+        </p:nvSpPr>
+        <p:spPr>
+          <a:xfrm>
+            <a:off x="0" y="4680"/>
+            <a:ext cx="12184200" cy="6853320"/>
+          </a:xfrm>
+          <a:prstGeom prst="rect">
+            <a:avLst/>
+          </a:prstGeom>
+          <a:ln>
+            <a:noFill/>
+          </a:ln>
+        </p:spPr>
+        <p:style>
+          <a:lnRef idx="2">
+            <a:schemeClr val="accent1">
+              <a:shade val="50000"/>
+            </a:schemeClr>
+          </a:lnRef>
+          <a:fillRef idx="1">
+            <a:schemeClr val="accent1"/>
+          </a:fillRef>
+          <a:effectRef idx="0">
+            <a:schemeClr val="accent1"/>
+          </a:effectRef>
+          <a:fontRef idx="minor"/>
+        </p:style>
+        <p:txBody>
+          <a:bodyPr lIns="90000" rIns="90000" tIns="45000" bIns="45000" anchor="ctr">
+            <a:noAutofit/>
+          </a:bodyPr>
+          <a:p>
+            <a:endParaRPr b="0" lang="en-US" sz="1800" strike="noStrike" u="none">
+              <a:solidFill>
+                <a:schemeClr val="lt1"/>
+              </a:solidFill>
+              <a:effectLst/>
+              <a:uFillTx/>
+              <a:latin typeface="Calibri"/>
+            </a:endParaRPr>
+          </a:p>
+        </p:txBody>
+      </p:sp>
+      <p:sp>
+        <p:nvSpPr>
+          <p:cNvPr id="119" name="PlaceHolder 1"/>
+          <p:cNvSpPr>
+            <a:spLocks noGrp="1"/>
+          </p:cNvSpPr>
+          <p:nvPr>
+            <p:ph type="title"/>
+          </p:nvPr>
+        </p:nvSpPr>
+        <p:spPr>
+          <a:xfrm>
+            <a:off x="572400" y="238680"/>
+            <a:ext cx="11013840" cy="1128600"/>
+          </a:xfrm>
+          <a:prstGeom prst="rect">
+            <a:avLst/>
+          </a:prstGeom>
+          <a:noFill/>
+          <a:ln w="0">
+            <a:noFill/>
+          </a:ln>
+        </p:spPr>
+        <p:txBody>
+          <a:bodyPr lIns="91440" rIns="91440" tIns="45720" bIns="45720" anchor="b">
+            <a:normAutofit/>
+          </a:bodyPr>
+          <a:p>
+            <a:pPr indent="0" algn="ctr">
+              <a:lnSpc>
+                <a:spcPct val="100000"/>
+              </a:lnSpc>
+              <a:buNone/>
+              <a:tabLst>
+                <a:tab algn="l" pos="0"/>
+              </a:tabLst>
+            </a:pPr>
+            <a:r>
+              <a:rPr b="0" lang="en-US" sz="4400" strike="noStrike" u="none">
+                <a:solidFill>
+                  <a:srgbClr val="000000"/>
+                </a:solidFill>
+                <a:effectLst/>
+                <a:uFillTx/>
+                <a:latin typeface="Arial"/>
+              </a:rPr>
+              <a:t>Challenges Encountered</a:t>
+            </a:r>
+            <a:endParaRPr b="0" lang="en-US" sz="4400" strike="noStrike" u="none">
+              <a:solidFill>
+                <a:srgbClr val="000000"/>
+              </a:solidFill>
+              <a:effectLst/>
+              <a:uFillTx/>
+              <a:latin typeface="Arial"/>
+            </a:endParaRPr>
+          </a:p>
+        </p:txBody>
+      </p:sp>
+      <p:sp>
+        <p:nvSpPr>
+          <p:cNvPr id="120" name="sketchy line 9">
+            <a:extLst>
+              <a:ext uri="{C183D7F6-B498-43B3-948B-1728B52AA6E4}">
+                <adec:decorative xmlns:adec="http://schemas.microsoft.com/office/drawing/2017/decorative" val="1"/>
+              </a:ext>
+            </a:extLst>
+          </p:cNvPr>
+          <p:cNvSpPr/>
+          <p:nvPr/>
+        </p:nvSpPr>
+        <p:spPr>
+          <a:xfrm>
+            <a:off x="572400" y="1681560"/>
+            <a:ext cx="10968120" cy="13680"/>
+          </a:xfrm>
+          <a:custGeom>
+            <a:avLst/>
+            <a:gdLst>
+              <a:gd name="textAreaLeft" fmla="*/ 0 w 10968120"/>
+              <a:gd name="textAreaRight" fmla="*/ 10972800 w 10968120"/>
+              <a:gd name="textAreaTop" fmla="*/ 0 h 13680"/>
+              <a:gd name="textAreaBottom" fmla="*/ 18360 h 13680"/>
+              <a:gd name="GluePoint1X" fmla="*/ 0 w 10972800"/>
+              <a:gd name="GluePoint1Y" fmla="*/ 0 h 18288"/>
+              <a:gd name="GluePoint2X" fmla="*/ 356616 w 10972800"/>
+              <a:gd name="GluePoint2Y" fmla="*/ 0 h 18288"/>
+              <a:gd name="GluePoint3X" fmla="*/ 1042416 w 10972800"/>
+              <a:gd name="GluePoint3Y" fmla="*/ 0 h 18288"/>
+              <a:gd name="GluePoint4X" fmla="*/ 1947672 w 10972800"/>
+              <a:gd name="GluePoint4Y" fmla="*/ 0 h 18288"/>
+              <a:gd name="GluePoint5X" fmla="*/ 2633472 w 10972800"/>
+              <a:gd name="GluePoint5Y" fmla="*/ 0 h 18288"/>
+              <a:gd name="GluePoint6X" fmla="*/ 2990088 w 10972800"/>
+              <a:gd name="GluePoint6Y" fmla="*/ 0 h 18288"/>
+              <a:gd name="GluePoint7X" fmla="*/ 3456432 w 10972800"/>
+              <a:gd name="GluePoint7Y" fmla="*/ 0 h 18288"/>
+              <a:gd name="GluePoint8X" fmla="*/ 4361688 w 10972800"/>
+              <a:gd name="GluePoint8Y" fmla="*/ 0 h 18288"/>
+              <a:gd name="GluePoint9X" fmla="*/ 5266944 w 10972800"/>
+              <a:gd name="GluePoint9Y" fmla="*/ 0 h 18288"/>
+              <a:gd name="GluePoint10X" fmla="*/ 6172200 w 10972800"/>
+              <a:gd name="GluePoint10Y" fmla="*/ 0 h 18288"/>
+              <a:gd name="GluePoint11X" fmla="*/ 6528816 w 10972800"/>
+              <a:gd name="GluePoint11Y" fmla="*/ 0 h 18288"/>
+              <a:gd name="GluePoint12X" fmla="*/ 7214616 w 10972800"/>
+              <a:gd name="GluePoint12Y" fmla="*/ 0 h 18288"/>
+              <a:gd name="GluePoint13X" fmla="*/ 7790688 w 10972800"/>
+              <a:gd name="GluePoint13Y" fmla="*/ 0 h 18288"/>
+              <a:gd name="GluePoint14X" fmla="*/ 8147304 w 10972800"/>
+              <a:gd name="GluePoint14Y" fmla="*/ 0 h 18288"/>
+              <a:gd name="GluePoint15X" fmla="*/ 9052560 w 10972800"/>
+              <a:gd name="GluePoint15Y" fmla="*/ 0 h 18288"/>
+              <a:gd name="GluePoint16X" fmla="*/ 9409176 w 10972800"/>
+              <a:gd name="GluePoint16Y" fmla="*/ 0 h 18288"/>
+              <a:gd name="GluePoint17X" fmla="*/ 9765792 w 10972800"/>
+              <a:gd name="GluePoint17Y" fmla="*/ 0 h 18288"/>
+              <a:gd name="GluePoint18X" fmla="*/ 10341864 w 10972800"/>
+              <a:gd name="GluePoint18Y" fmla="*/ 0 h 18288"/>
+              <a:gd name="GluePoint19X" fmla="*/ 10972800 w 10972800"/>
+              <a:gd name="GluePoint19Y" fmla="*/ 0 h 18288"/>
+              <a:gd name="GluePoint20X" fmla="*/ 10972800 w 10972800"/>
+              <a:gd name="GluePoint20Y" fmla="*/ 18288 h 18288"/>
+              <a:gd name="GluePoint21X" fmla="*/ 10177272 w 10972800"/>
+              <a:gd name="GluePoint21Y" fmla="*/ 18288 h 18288"/>
+              <a:gd name="GluePoint22X" fmla="*/ 9820656 w 10972800"/>
+              <a:gd name="GluePoint22Y" fmla="*/ 18288 h 18288"/>
+              <a:gd name="GluePoint23X" fmla="*/ 9464040 w 10972800"/>
+              <a:gd name="GluePoint23Y" fmla="*/ 18288 h 18288"/>
+              <a:gd name="GluePoint24X" fmla="*/ 8778240 w 10972800"/>
+              <a:gd name="GluePoint24Y" fmla="*/ 18288 h 18288"/>
+              <a:gd name="GluePoint25X" fmla="*/ 8421624 w 10972800"/>
+              <a:gd name="GluePoint25Y" fmla="*/ 18288 h 18288"/>
+              <a:gd name="GluePoint26X" fmla="*/ 7735824 w 10972800"/>
+              <a:gd name="GluePoint26Y" fmla="*/ 18288 h 18288"/>
+              <a:gd name="GluePoint27X" fmla="*/ 6940296 w 10972800"/>
+              <a:gd name="GluePoint27Y" fmla="*/ 18288 h 18288"/>
+              <a:gd name="GluePoint28X" fmla="*/ 6254496 w 10972800"/>
+              <a:gd name="GluePoint28Y" fmla="*/ 18288 h 18288"/>
+              <a:gd name="GluePoint29X" fmla="*/ 5458968 w 10972800"/>
+              <a:gd name="GluePoint29Y" fmla="*/ 18288 h 18288"/>
+              <a:gd name="GluePoint30X" fmla="*/ 4663440 w 10972800"/>
+              <a:gd name="GluePoint30Y" fmla="*/ 18288 h 18288"/>
+              <a:gd name="GluePoint31X" fmla="*/ 4306824 w 10972800"/>
+              <a:gd name="GluePoint31Y" fmla="*/ 18288 h 18288"/>
+              <a:gd name="GluePoint32X" fmla="*/ 3840480 w 10972800"/>
+              <a:gd name="GluePoint32Y" fmla="*/ 18288 h 18288"/>
+              <a:gd name="GluePoint33X" fmla="*/ 3264408 w 10972800"/>
+              <a:gd name="GluePoint33Y" fmla="*/ 18288 h 18288"/>
+              <a:gd name="GluePoint34X" fmla="*/ 2578608 w 10972800"/>
+              <a:gd name="GluePoint34Y" fmla="*/ 18288 h 18288"/>
+              <a:gd name="GluePoint35X" fmla="*/ 1673352 w 10972800"/>
+              <a:gd name="GluePoint35Y" fmla="*/ 18288 h 18288"/>
+              <a:gd name="GluePoint36X" fmla="*/ 877824 w 10972800"/>
+              <a:gd name="GluePoint36Y" fmla="*/ 18288 h 18288"/>
+              <a:gd name="GluePoint37X" fmla="*/ 0 w 10972800"/>
+              <a:gd name="GluePoint37Y" fmla="*/ 18288 h 18288"/>
+              <a:gd name="GluePoint38X" fmla="*/ 0 w 10972800"/>
+              <a:gd name="GluePoint38Y" fmla="*/ 0 h 18288"/>
+            </a:gdLst>
+            <a:ahLst/>
+            <a:cxnLst>
+              <a:cxn ang="0">
+                <a:pos x="GluePoint1X" y="GluePoint1Y"/>
+              </a:cxn>
+              <a:cxn ang="0">
+                <a:pos x="GluePoint2X" y="GluePoint2Y"/>
+              </a:cxn>
+              <a:cxn ang="0">
+                <a:pos x="GluePoint3X" y="GluePoint3Y"/>
+              </a:cxn>
+              <a:cxn ang="0">
+                <a:pos x="GluePoint4X" y="GluePoint4Y"/>
+              </a:cxn>
+              <a:cxn ang="0">
+                <a:pos x="GluePoint5X" y="GluePoint5Y"/>
+              </a:cxn>
+              <a:cxn ang="0">
+                <a:pos x="GluePoint6X" y="GluePoint6Y"/>
+              </a:cxn>
+              <a:cxn ang="0">
+                <a:pos x="GluePoint7X" y="GluePoint7Y"/>
+              </a:cxn>
+              <a:cxn ang="0">
+                <a:pos x="GluePoint8X" y="GluePoint8Y"/>
+              </a:cxn>
+              <a:cxn ang="0">
+                <a:pos x="GluePoint9X" y="GluePoint9Y"/>
+              </a:cxn>
+              <a:cxn ang="0">
+                <a:pos x="GluePoint10X" y="GluePoint10Y"/>
+              </a:cxn>
+              <a:cxn ang="0">
+                <a:pos x="GluePoint11X" y="GluePoint11Y"/>
+              </a:cxn>
+              <a:cxn ang="0">
+                <a:pos x="GluePoint12X" y="GluePoint12Y"/>
+              </a:cxn>
+              <a:cxn ang="0">
+                <a:pos x="GluePoint13X" y="GluePoint13Y"/>
+              </a:cxn>
+              <a:cxn ang="0">
+                <a:pos x="GluePoint14X" y="GluePoint14Y"/>
+              </a:cxn>
+              <a:cxn ang="0">
+                <a:pos x="GluePoint15X" y="GluePoint15Y"/>
+              </a:cxn>
+              <a:cxn ang="0">
+                <a:pos x="GluePoint16X" y="GluePoint16Y"/>
+              </a:cxn>
+              <a:cxn ang="0">
+                <a:pos x="GluePoint17X" y="GluePoint17Y"/>
+              </a:cxn>
+              <a:cxn ang="0">
+                <a:pos x="GluePoint18X" y="GluePoint18Y"/>
+              </a:cxn>
+              <a:cxn ang="0">
+                <a:pos x="GluePoint19X" y="GluePoint19Y"/>
+              </a:cxn>
+              <a:cxn ang="0">
+                <a:pos x="GluePoint20X" y="GluePoint20Y"/>
+              </a:cxn>
+              <a:cxn ang="0">
+                <a:pos x="GluePoint21X" y="GluePoint21Y"/>
+              </a:cxn>
+              <a:cxn ang="0">
+                <a:pos x="GluePoint22X" y="GluePoint22Y"/>
+              </a:cxn>
+              <a:cxn ang="0">
+                <a:pos x="GluePoint23X" y="GluePoint23Y"/>
+              </a:cxn>
+              <a:cxn ang="0">
+                <a:pos x="GluePoint24X" y="GluePoint24Y"/>
+              </a:cxn>
+              <a:cxn ang="0">
+                <a:pos x="GluePoint25X" y="GluePoint25Y"/>
+              </a:cxn>
+              <a:cxn ang="0">
+                <a:pos x="GluePoint26X" y="GluePoint26Y"/>
+              </a:cxn>
+              <a:cxn ang="0">
+                <a:pos x="GluePoint27X" y="GluePoint27Y"/>
+              </a:cxn>
+              <a:cxn ang="0">
+                <a:pos x="GluePoint28X" y="GluePoint28Y"/>
+              </a:cxn>
+              <a:cxn ang="0">
+                <a:pos x="GluePoint29X" y="GluePoint29Y"/>
+              </a:cxn>
+              <a:cxn ang="0">
+                <a:pos x="GluePoint30X" y="GluePoint30Y"/>
+              </a:cxn>
+              <a:cxn ang="0">
+                <a:pos x="GluePoint31X" y="GluePoint31Y"/>
+              </a:cxn>
+              <a:cxn ang="0">
+                <a:pos x="GluePoint32X" y="GluePoint32Y"/>
+              </a:cxn>
+              <a:cxn ang="0">
+                <a:pos x="GluePoint33X" y="GluePoint33Y"/>
+              </a:cxn>
+              <a:cxn ang="0">
+                <a:pos x="GluePoint34X" y="GluePoint34Y"/>
+              </a:cxn>
+              <a:cxn ang="0">
+                <a:pos x="GluePoint35X" y="GluePoint35Y"/>
+              </a:cxn>
+              <a:cxn ang="0">
+                <a:pos x="GluePoint36X" y="GluePoint36Y"/>
+              </a:cxn>
+              <a:cxn ang="0">
+                <a:pos x="GluePoint37X" y="GluePoint37Y"/>
+              </a:cxn>
+              <a:cxn ang="0">
+                <a:pos x="GluePoint38X" y="GluePoint38Y"/>
+              </a:cxn>
+            </a:cxnLst>
+            <a:rect l="textAreaLeft" t="textAreaTop" r="textAreaRight" b="textAreaBottom"/>
+            <a:pathLst>
+              <a:path fill="none" w="10972800" h="18288">
+                <a:moveTo>
+                  <a:pt x="0" y="0"/>
+                </a:moveTo>
+                <a:cubicBezTo>
+                  <a:pt x="165916" y="-1866"/>
+                  <a:pt x="188720" y="13756"/>
+                  <a:pt x="356616" y="0"/>
+                </a:cubicBezTo>
+                <a:cubicBezTo>
+                  <a:pt x="524512" y="-13756"/>
+                  <a:pt x="734781" y="8922"/>
+                  <a:pt x="1042416" y="0"/>
+                </a:cubicBezTo>
+                <a:cubicBezTo>
+                  <a:pt x="1350051" y="-8922"/>
+                  <a:pt x="1595982" y="-26315"/>
+                  <a:pt x="1947672" y="0"/>
+                </a:cubicBezTo>
+                <a:cubicBezTo>
+                  <a:pt x="2299362" y="26315"/>
+                  <a:pt x="2292691" y="-19526"/>
+                  <a:pt x="2633472" y="0"/>
+                </a:cubicBezTo>
+                <a:cubicBezTo>
+                  <a:pt x="2974253" y="19526"/>
+                  <a:pt x="2857309" y="10773"/>
+                  <a:pt x="2990088" y="0"/>
+                </a:cubicBezTo>
+                <a:cubicBezTo>
+                  <a:pt x="3122867" y="-10773"/>
+                  <a:pt x="3359343" y="7194"/>
+                  <a:pt x="3456432" y="0"/>
+                </a:cubicBezTo>
+                <a:cubicBezTo>
+                  <a:pt x="3553521" y="-7194"/>
+                  <a:pt x="4136258" y="5108"/>
+                  <a:pt x="4361688" y="0"/>
+                </a:cubicBezTo>
+                <a:cubicBezTo>
+                  <a:pt x="4587118" y="-5108"/>
+                  <a:pt x="4992424" y="-42958"/>
+                  <a:pt x="5266944" y="0"/>
+                </a:cubicBezTo>
+                <a:cubicBezTo>
+                  <a:pt x="5541464" y="42958"/>
+                  <a:pt x="5882966" y="-3430"/>
+                  <a:pt x="6172200" y="0"/>
+                </a:cubicBezTo>
+                <a:cubicBezTo>
+                  <a:pt x="6461434" y="3430"/>
+                  <a:pt x="6432127" y="6688"/>
+                  <a:pt x="6528816" y="0"/>
+                </a:cubicBezTo>
+                <a:cubicBezTo>
+                  <a:pt x="6625505" y="-6688"/>
+                  <a:pt x="6916805" y="-436"/>
+                  <a:pt x="7214616" y="0"/>
+                </a:cubicBezTo>
+                <a:cubicBezTo>
+                  <a:pt x="7512427" y="436"/>
+                  <a:pt x="7626159" y="-6909"/>
+                  <a:pt x="7790688" y="0"/>
+                </a:cubicBezTo>
+                <a:cubicBezTo>
+                  <a:pt x="7955217" y="6909"/>
+                  <a:pt x="8048891" y="15307"/>
+                  <a:pt x="8147304" y="0"/>
+                </a:cubicBezTo>
+                <a:cubicBezTo>
+                  <a:pt x="8245717" y="-15307"/>
+                  <a:pt x="8645618" y="-11734"/>
+                  <a:pt x="9052560" y="0"/>
+                </a:cubicBezTo>
+                <a:cubicBezTo>
+                  <a:pt x="9459502" y="11734"/>
+                  <a:pt x="9320584" y="8388"/>
+                  <a:pt x="9409176" y="0"/>
+                </a:cubicBezTo>
+                <a:cubicBezTo>
+                  <a:pt x="9497768" y="-8388"/>
+                  <a:pt x="9644192" y="8379"/>
+                  <a:pt x="9765792" y="0"/>
+                </a:cubicBezTo>
+                <a:cubicBezTo>
+                  <a:pt x="9887392" y="-8379"/>
+                  <a:pt x="10105220" y="-12663"/>
+                  <a:pt x="10341864" y="0"/>
+                </a:cubicBezTo>
+                <a:cubicBezTo>
+                  <a:pt x="10578508" y="12663"/>
+                  <a:pt x="10773103" y="-5786"/>
+                  <a:pt x="10972800" y="0"/>
+                </a:cubicBezTo>
+                <a:cubicBezTo>
+                  <a:pt x="10972146" y="8818"/>
+                  <a:pt x="10972240" y="13823"/>
+                  <a:pt x="10972800" y="18288"/>
+                </a:cubicBezTo>
+                <a:cubicBezTo>
+                  <a:pt x="10588778" y="31598"/>
+                  <a:pt x="10543381" y="-12698"/>
+                  <a:pt x="10177272" y="18288"/>
+                </a:cubicBezTo>
+                <a:cubicBezTo>
+                  <a:pt x="9811163" y="49274"/>
+                  <a:pt x="9996817" y="25662"/>
+                  <a:pt x="9820656" y="18288"/>
+                </a:cubicBezTo>
+                <a:cubicBezTo>
+                  <a:pt x="9644495" y="10914"/>
+                  <a:pt x="9607007" y="31631"/>
+                  <a:pt x="9464040" y="18288"/>
+                </a:cubicBezTo>
+                <a:cubicBezTo>
+                  <a:pt x="9321073" y="4945"/>
+                  <a:pt x="9114189" y="28940"/>
+                  <a:pt x="8778240" y="18288"/>
+                </a:cubicBezTo>
+                <a:cubicBezTo>
+                  <a:pt x="8442291" y="7636"/>
+                  <a:pt x="8594763" y="987"/>
+                  <a:pt x="8421624" y="18288"/>
+                </a:cubicBezTo>
+                <a:cubicBezTo>
+                  <a:pt x="8248485" y="35589"/>
+                  <a:pt x="7929515" y="37573"/>
+                  <a:pt x="7735824" y="18288"/>
+                </a:cubicBezTo>
+                <a:cubicBezTo>
+                  <a:pt x="7542133" y="-997"/>
+                  <a:pt x="7252504" y="33858"/>
+                  <a:pt x="6940296" y="18288"/>
+                </a:cubicBezTo>
+                <a:cubicBezTo>
+                  <a:pt x="6628088" y="2718"/>
+                  <a:pt x="6528503" y="48389"/>
+                  <a:pt x="6254496" y="18288"/>
+                </a:cubicBezTo>
+                <a:cubicBezTo>
+                  <a:pt x="5980489" y="-11813"/>
+                  <a:pt x="5695784" y="-3740"/>
+                  <a:pt x="5458968" y="18288"/>
+                </a:cubicBezTo>
+                <a:cubicBezTo>
+                  <a:pt x="5222152" y="40316"/>
+                  <a:pt x="5010751" y="19095"/>
+                  <a:pt x="4663440" y="18288"/>
+                </a:cubicBezTo>
+                <a:cubicBezTo>
+                  <a:pt x="4316129" y="17481"/>
+                  <a:pt x="4425552" y="1606"/>
+                  <a:pt x="4306824" y="18288"/>
+                </a:cubicBezTo>
+                <a:cubicBezTo>
+                  <a:pt x="4188096" y="34970"/>
+                  <a:pt x="3941535" y="7481"/>
+                  <a:pt x="3840480" y="18288"/>
+                </a:cubicBezTo>
+                <a:cubicBezTo>
+                  <a:pt x="3739425" y="29095"/>
+                  <a:pt x="3402388" y="17641"/>
+                  <a:pt x="3264408" y="18288"/>
+                </a:cubicBezTo>
+                <a:cubicBezTo>
+                  <a:pt x="3126428" y="18935"/>
+                  <a:pt x="2776779" y="9983"/>
+                  <a:pt x="2578608" y="18288"/>
+                </a:cubicBezTo>
+                <a:cubicBezTo>
+                  <a:pt x="2380437" y="26593"/>
+                  <a:pt x="1909468" y="25818"/>
+                  <a:pt x="1673352" y="18288"/>
+                </a:cubicBezTo>
+                <a:cubicBezTo>
+                  <a:pt x="1437236" y="10758"/>
+                  <a:pt x="1131180" y="49884"/>
+                  <a:pt x="877824" y="18288"/>
+                </a:cubicBezTo>
+                <a:cubicBezTo>
+                  <a:pt x="624468" y="-13308"/>
+                  <a:pt x="206753" y="2195"/>
+                  <a:pt x="0" y="18288"/>
+                </a:cubicBezTo>
+                <a:cubicBezTo>
+                  <a:pt x="313" y="10654"/>
+                  <a:pt x="-263" y="4056"/>
+                  <a:pt x="0" y="0"/>
+                </a:cubicBezTo>
+                <a:close/>
+              </a:path>
+              <a:path stroke="0" w="10972800" h="18288">
+                <a:moveTo>
+                  <a:pt x="0" y="0"/>
+                </a:moveTo>
+                <a:cubicBezTo>
+                  <a:pt x="164017" y="-17675"/>
+                  <a:pt x="309425" y="9913"/>
+                  <a:pt x="466344" y="0"/>
+                </a:cubicBezTo>
+                <a:cubicBezTo>
+                  <a:pt x="623263" y="-9913"/>
+                  <a:pt x="659300" y="-14524"/>
+                  <a:pt x="822960" y="0"/>
+                </a:cubicBezTo>
+                <a:cubicBezTo>
+                  <a:pt x="986620" y="14524"/>
+                  <a:pt x="1105222" y="-16481"/>
+                  <a:pt x="1289304" y="0"/>
+                </a:cubicBezTo>
+                <a:cubicBezTo>
+                  <a:pt x="1473386" y="16481"/>
+                  <a:pt x="1693223" y="26161"/>
+                  <a:pt x="1975104" y="0"/>
+                </a:cubicBezTo>
+                <a:cubicBezTo>
+                  <a:pt x="2256985" y="-26161"/>
+                  <a:pt x="2435781" y="23061"/>
+                  <a:pt x="2770632" y="0"/>
+                </a:cubicBezTo>
+                <a:cubicBezTo>
+                  <a:pt x="3105483" y="-23061"/>
+                  <a:pt x="3247479" y="-44011"/>
+                  <a:pt x="3675888" y="0"/>
+                </a:cubicBezTo>
+                <a:cubicBezTo>
+                  <a:pt x="4104297" y="44011"/>
+                  <a:pt x="4280918" y="4017"/>
+                  <a:pt x="4581144" y="0"/>
+                </a:cubicBezTo>
+                <a:cubicBezTo>
+                  <a:pt x="4881370" y="-4017"/>
+                  <a:pt x="5021699" y="-11889"/>
+                  <a:pt x="5157216" y="0"/>
+                </a:cubicBezTo>
+                <a:cubicBezTo>
+                  <a:pt x="5292733" y="11889"/>
+                  <a:pt x="5603398" y="-17698"/>
+                  <a:pt x="5952744" y="0"/>
+                </a:cubicBezTo>
+                <a:cubicBezTo>
+                  <a:pt x="6302090" y="17698"/>
+                  <a:pt x="6353093" y="-11909"/>
+                  <a:pt x="6638544" y="0"/>
+                </a:cubicBezTo>
+                <a:cubicBezTo>
+                  <a:pt x="6923995" y="11909"/>
+                  <a:pt x="7053404" y="21630"/>
+                  <a:pt x="7214616" y="0"/>
+                </a:cubicBezTo>
+                <a:cubicBezTo>
+                  <a:pt x="7375828" y="-21630"/>
+                  <a:pt x="7837963" y="3886"/>
+                  <a:pt x="8010144" y="0"/>
+                </a:cubicBezTo>
+                <a:cubicBezTo>
+                  <a:pt x="8182325" y="-3886"/>
+                  <a:pt x="8224183" y="16009"/>
+                  <a:pt x="8366760" y="0"/>
+                </a:cubicBezTo>
+                <a:cubicBezTo>
+                  <a:pt x="8509337" y="-16009"/>
+                  <a:pt x="8687920" y="-5720"/>
+                  <a:pt x="8942832" y="0"/>
+                </a:cubicBezTo>
+                <a:cubicBezTo>
+                  <a:pt x="9197744" y="5720"/>
+                  <a:pt x="9368437" y="20479"/>
+                  <a:pt x="9628632" y="0"/>
+                </a:cubicBezTo>
+                <a:cubicBezTo>
+                  <a:pt x="9888827" y="-20479"/>
+                  <a:pt x="10560858" y="-20746"/>
+                  <a:pt x="10972800" y="0"/>
+                </a:cubicBezTo>
+                <a:cubicBezTo>
+                  <a:pt x="10972186" y="5722"/>
+                  <a:pt x="10972980" y="12495"/>
+                  <a:pt x="10972800" y="18288"/>
+                </a:cubicBezTo>
+                <a:cubicBezTo>
+                  <a:pt x="10786146" y="12536"/>
+                  <a:pt x="10623717" y="14033"/>
+                  <a:pt x="10506456" y="18288"/>
+                </a:cubicBezTo>
+                <a:cubicBezTo>
+                  <a:pt x="10389195" y="22543"/>
+                  <a:pt x="10296178" y="20107"/>
+                  <a:pt x="10149840" y="18288"/>
+                </a:cubicBezTo>
+                <a:cubicBezTo>
+                  <a:pt x="10003502" y="16469"/>
+                  <a:pt x="9767530" y="28891"/>
+                  <a:pt x="9464040" y="18288"/>
+                </a:cubicBezTo>
+                <a:cubicBezTo>
+                  <a:pt x="9160550" y="7685"/>
+                  <a:pt x="9229050" y="2659"/>
+                  <a:pt x="8997696" y="18288"/>
+                </a:cubicBezTo>
+                <a:cubicBezTo>
+                  <a:pt x="8766342" y="33917"/>
+                  <a:pt x="8340136" y="34864"/>
+                  <a:pt x="8092440" y="18288"/>
+                </a:cubicBezTo>
+                <a:cubicBezTo>
+                  <a:pt x="7844744" y="1712"/>
+                  <a:pt x="7863720" y="27405"/>
+                  <a:pt x="7735824" y="18288"/>
+                </a:cubicBezTo>
+                <a:cubicBezTo>
+                  <a:pt x="7607928" y="9171"/>
+                  <a:pt x="7323619" y="461"/>
+                  <a:pt x="7050024" y="18288"/>
+                </a:cubicBezTo>
+                <a:cubicBezTo>
+                  <a:pt x="6776429" y="36115"/>
+                  <a:pt x="6787899" y="28206"/>
+                  <a:pt x="6693408" y="18288"/>
+                </a:cubicBezTo>
+                <a:cubicBezTo>
+                  <a:pt x="6598917" y="8370"/>
+                  <a:pt x="6395231" y="19114"/>
+                  <a:pt x="6227064" y="18288"/>
+                </a:cubicBezTo>
+                <a:cubicBezTo>
+                  <a:pt x="6058897" y="17462"/>
+                  <a:pt x="5618582" y="1091"/>
+                  <a:pt x="5431536" y="18288"/>
+                </a:cubicBezTo>
+                <a:cubicBezTo>
+                  <a:pt x="5244490" y="35485"/>
+                  <a:pt x="4729797" y="-9650"/>
+                  <a:pt x="4526280" y="18288"/>
+                </a:cubicBezTo>
+                <a:cubicBezTo>
+                  <a:pt x="4322763" y="46226"/>
+                  <a:pt x="4216797" y="756"/>
+                  <a:pt x="4059936" y="18288"/>
+                </a:cubicBezTo>
+                <a:cubicBezTo>
+                  <a:pt x="3903075" y="35820"/>
+                  <a:pt x="3537912" y="42098"/>
+                  <a:pt x="3374136" y="18288"/>
+                </a:cubicBezTo>
+                <a:cubicBezTo>
+                  <a:pt x="3210360" y="-5522"/>
+                  <a:pt x="3126842" y="39135"/>
+                  <a:pt x="2907792" y="18288"/>
+                </a:cubicBezTo>
+                <a:cubicBezTo>
+                  <a:pt x="2688742" y="-2559"/>
+                  <a:pt x="2490436" y="34100"/>
+                  <a:pt x="2112264" y="18288"/>
+                </a:cubicBezTo>
+                <a:cubicBezTo>
+                  <a:pt x="1734092" y="2476"/>
+                  <a:pt x="1744622" y="-7274"/>
+                  <a:pt x="1536192" y="18288"/>
+                </a:cubicBezTo>
+                <a:cubicBezTo>
+                  <a:pt x="1327762" y="43850"/>
+                  <a:pt x="1189025" y="6435"/>
+                  <a:pt x="1069848" y="18288"/>
+                </a:cubicBezTo>
+                <a:cubicBezTo>
+                  <a:pt x="950671" y="30141"/>
+                  <a:pt x="858345" y="33684"/>
+                  <a:pt x="713232" y="18288"/>
+                </a:cubicBezTo>
+                <a:cubicBezTo>
+                  <a:pt x="568119" y="2892"/>
+                  <a:pt x="250292" y="5410"/>
+                  <a:pt x="0" y="18288"/>
+                </a:cubicBezTo>
+                <a:cubicBezTo>
+                  <a:pt x="465" y="13062"/>
+                  <a:pt x="-894" y="9029"/>
+                  <a:pt x="0" y="0"/>
+                </a:cubicBezTo>
+                <a:close/>
+              </a:path>
+            </a:pathLst>
+          </a:custGeom>
+          <a:solidFill>
+            <a:schemeClr val="accent2">
+              <a:alpha val="75000"/>
+            </a:schemeClr>
+          </a:solidFill>
+          <a:ln cap="rnd" w="44450">
+            <a:solidFill>
+              <a:schemeClr val="accent2">
+                <a:alpha val="75000"/>
+              </a:schemeClr>
+            </a:solidFill>
+            <a:round/>
+          </a:ln>
+        </p:spPr>
+        <p:style>
+          <a:lnRef idx="2">
+            <a:schemeClr val="accent1">
+              <a:shade val="50000"/>
+            </a:schemeClr>
+          </a:lnRef>
+          <a:fillRef idx="1">
+            <a:schemeClr val="accent1"/>
+          </a:fillRef>
+          <a:effectRef idx="0">
+            <a:schemeClr val="accent1"/>
+          </a:effectRef>
+          <a:fontRef idx="minor"/>
+        </p:style>
+        <p:txBody>
+          <a:bodyPr lIns="90000" rIns="90000" tIns="-26640" bIns="-26640" anchor="ctr">
+            <a:noAutofit/>
+          </a:bodyPr>
+          <a:p>
+            <a:endParaRPr b="0" lang="en-US" sz="1800" strike="noStrike" u="none">
+              <a:solidFill>
+                <a:schemeClr val="lt1"/>
+              </a:solidFill>
+              <a:effectLst/>
+              <a:uFillTx/>
+              <a:latin typeface="Calibri"/>
+            </a:endParaRPr>
+          </a:p>
+        </p:txBody>
+      </p:sp>
+      <p:pic>
+        <p:nvPicPr>
+          <p:cNvPr id="121" name="Picture 12" descr="A blue and white logo&#10;&#10;Description automatically generated"/>
+          <p:cNvPicPr/>
+          <p:nvPr/>
+        </p:nvPicPr>
+        <p:blipFill>
+          <a:blip r:embed="rId1"/>
+          <a:stretch/>
+        </p:blipFill>
+        <p:spPr>
+          <a:xfrm>
+            <a:off x="10199520" y="282600"/>
+            <a:ext cx="1795680" cy="595440"/>
+          </a:xfrm>
+          <a:prstGeom prst="rect">
+            <a:avLst/>
+          </a:prstGeom>
+          <a:noFill/>
+          <a:ln w="0">
+            <a:noFill/>
+          </a:ln>
+        </p:spPr>
+      </p:pic>
+      <p:graphicFrame>
+        <p:nvGraphicFramePr>
+          <p:cNvPr id="122" name=""/>
+          <p:cNvGraphicFramePr/>
+          <p:nvPr/>
+        </p:nvGraphicFramePr>
+        <p:xfrm>
+          <a:off x="658800" y="2328480"/>
+          <a:ext cx="11107080" cy="1384920"/>
+        </p:xfrm>
+        <a:graphic>
+          <a:graphicData uri="http://schemas.openxmlformats.org/drawingml/2006/table">
+            <a:tbl>
+              <a:tblPr/>
+              <a:tblGrid>
+                <a:gridCol w="5553000"/>
+                <a:gridCol w="5554080"/>
+              </a:tblGrid>
+              <a:tr h="346320">
+                <a:tc>
+                  <a:txBody>
+                    <a:bodyPr lIns="36000" rIns="36000" tIns="36000" bIns="36000" anchor="t">
+                      <a:noAutofit/>
+                    </a:bodyPr>
+                    <a:p>
+                      <a:r>
+                        <a:rPr b="1" lang="en-US" sz="1800" strike="noStrike" u="none">
+                          <a:solidFill>
+                            <a:srgbClr val="000000"/>
+                          </a:solidFill>
+                          <a:effectLst/>
+                          <a:uFillTx/>
+                          <a:latin typeface="Arial"/>
+                        </a:rPr>
+                        <a:t>Challenges</a:t>
+                      </a:r>
+                      <a:endParaRPr b="1" lang="en-US" sz="1800" strike="noStrike" u="none">
+                        <a:solidFill>
+                          <a:srgbClr val="000000"/>
+                        </a:solidFill>
+                        <a:effectLst/>
+                        <a:uFillTx/>
+                        <a:latin typeface="Arial"/>
+                      </a:endParaRPr>
+                    </a:p>
+                  </a:txBody>
+                  <a:tcPr anchor="t" marL="36000" marR="36000" marT="36000" marB="36000">
+                    <a:lnL>
+                      <a:noFill/>
+                    </a:lnL>
+                    <a:lnR>
+                      <a:noFill/>
+                    </a:lnR>
+                    <a:lnT>
+                      <a:noFill/>
+                    </a:lnT>
+                    <a:lnB>
+                      <a:noFill/>
+                    </a:lnB>
+                    <a:noFill/>
+                  </a:tcPr>
+                </a:tc>
+                <a:tc>
+                  <a:txBody>
+                    <a:bodyPr lIns="36000" rIns="36000" tIns="36000" bIns="36000" anchor="t">
+                      <a:noAutofit/>
+                    </a:bodyPr>
+                    <a:p>
+                      <a:r>
+                        <a:rPr b="1" lang="en-US" sz="1800" strike="noStrike" u="none">
+                          <a:solidFill>
+                            <a:srgbClr val="000000"/>
+                          </a:solidFill>
+                          <a:effectLst/>
+                          <a:uFillTx/>
+                          <a:latin typeface="Arial"/>
+                        </a:rPr>
+                        <a:t>Solutions</a:t>
+                      </a:r>
+                      <a:endParaRPr b="1" lang="en-US" sz="1800" strike="noStrike" u="none">
+                        <a:solidFill>
+                          <a:srgbClr val="000000"/>
+                        </a:solidFill>
+                        <a:effectLst/>
+                        <a:uFillTx/>
+                        <a:latin typeface="Arial"/>
+                      </a:endParaRPr>
+                    </a:p>
+                  </a:txBody>
+                  <a:tcPr anchor="t" marL="36000" marR="36000" marT="36000" marB="36000">
+                    <a:lnL>
+                      <a:noFill/>
+                    </a:lnL>
+                    <a:lnR>
+                      <a:noFill/>
+                    </a:lnR>
+                    <a:lnT>
+                      <a:noFill/>
+                    </a:lnT>
+                    <a:lnB>
+                      <a:noFill/>
+                    </a:lnB>
+                    <a:noFill/>
+                  </a:tcPr>
+                </a:tc>
+              </a:tr>
+              <a:tr h="346320">
+                <a:tc>
+                  <a:txBody>
+                    <a:bodyPr lIns="36000" rIns="36000" tIns="36000" bIns="36000" anchor="t">
+                      <a:noAutofit/>
+                    </a:bodyPr>
+                    <a:p>
+                      <a:pPr marL="216000" indent="-216000">
+                        <a:buClr>
+                          <a:srgbClr val="000000"/>
+                        </a:buClr>
+                        <a:buSzPct val="45000"/>
+                        <a:buFont typeface="Wingdings" charset="2"/>
+                        <a:buChar char=""/>
+                      </a:pPr>
+                      <a:r>
+                        <a:rPr b="0" lang="en-US" sz="1800" strike="noStrike" u="none">
+                          <a:solidFill>
+                            <a:srgbClr val="000000"/>
+                          </a:solidFill>
+                          <a:effectLst/>
+                          <a:uFillTx/>
+                          <a:latin typeface="Arial"/>
+                        </a:rPr>
+                        <a:t>Attempted to use a pre-trained binary CNN classifier to classify post-treatment brain tumor MRI images.  Classifier could not determine if resection cavity was a tumor or not</a:t>
+                      </a:r>
+                      <a:endParaRPr b="0" lang="en-US" sz="1800" strike="noStrike" u="none">
+                        <a:solidFill>
+                          <a:srgbClr val="000000"/>
+                        </a:solidFill>
+                        <a:effectLst/>
+                        <a:uFillTx/>
+                        <a:latin typeface="Arial"/>
+                      </a:endParaRPr>
+                    </a:p>
+                  </a:txBody>
+                  <a:tcPr anchor="t" marL="36000" marR="36000" marT="36000" marB="36000">
+                    <a:lnL>
+                      <a:noFill/>
+                    </a:lnL>
+                    <a:lnR>
+                      <a:noFill/>
+                    </a:lnR>
+                    <a:lnT>
+                      <a:noFill/>
+                    </a:lnT>
+                    <a:lnB>
+                      <a:noFill/>
+                    </a:lnB>
+                    <a:noFill/>
+                  </a:tcPr>
+                </a:tc>
+                <a:tc>
+                  <a:txBody>
+                    <a:bodyPr lIns="36000" rIns="36000" tIns="36000" bIns="36000" anchor="t">
+                      <a:noAutofit/>
+                    </a:bodyPr>
+                    <a:p>
+                      <a:pPr marL="216000" indent="-216000">
+                        <a:buClr>
+                          <a:srgbClr val="000000"/>
+                        </a:buClr>
+                        <a:buSzPct val="45000"/>
+                        <a:buFont typeface="Wingdings" charset="2"/>
+                        <a:buChar char=""/>
+                      </a:pPr>
+                      <a:r>
+                        <a:rPr b="0" lang="en-US" sz="1800" strike="noStrike" u="none">
+                          <a:solidFill>
+                            <a:srgbClr val="000000"/>
+                          </a:solidFill>
+                          <a:effectLst/>
+                          <a:uFillTx/>
+                          <a:latin typeface="Arial"/>
+                        </a:rPr>
+                        <a:t>Further research indicated this approach was not feasible and many researchers used a encoder/decoder method to preform brain tumor segmentation.  Modified my study to follow this path</a:t>
+                      </a:r>
+                      <a:endParaRPr b="0" lang="en-US" sz="1800" strike="noStrike" u="none">
+                        <a:solidFill>
+                          <a:srgbClr val="000000"/>
+                        </a:solidFill>
+                        <a:effectLst/>
+                        <a:uFillTx/>
+                        <a:latin typeface="Arial"/>
+                      </a:endParaRPr>
+                    </a:p>
+                  </a:txBody>
+                  <a:tcPr anchor="t" marL="36000" marR="36000" marT="36000" marB="36000">
+                    <a:lnL>
+                      <a:noFill/>
+                    </a:lnL>
+                    <a:lnR>
+                      <a:noFill/>
+                    </a:lnR>
+                    <a:lnT>
+                      <a:noFill/>
+                    </a:lnT>
+                    <a:lnB>
+                      <a:noFill/>
+                    </a:lnB>
+                    <a:noFill/>
+                  </a:tcPr>
+                </a:tc>
+              </a:tr>
+              <a:tr h="346320">
+                <a:tc>
+                  <a:txBody>
+                    <a:bodyPr lIns="36000" rIns="36000" tIns="36000" bIns="36000" anchor="t">
+                      <a:noAutofit/>
+                    </a:bodyPr>
+                    <a:p>
+                      <a:pPr marL="216000" indent="-216000">
+                        <a:buClr>
+                          <a:srgbClr val="000000"/>
+                        </a:buClr>
+                        <a:buSzPct val="45000"/>
+                        <a:buFont typeface="Wingdings" charset="2"/>
+                        <a:buChar char=""/>
+                      </a:pPr>
+                      <a:r>
+                        <a:rPr b="0" lang="en-US" sz="1800" strike="noStrike" u="none">
+                          <a:solidFill>
+                            <a:srgbClr val="000000"/>
+                          </a:solidFill>
+                          <a:effectLst/>
+                          <a:uFillTx/>
+                          <a:latin typeface="Arial"/>
+                        </a:rPr>
+                        <a:t>Using </a:t>
+                      </a:r>
+                      <a:r>
+                        <a:rPr b="1" i="1" lang="en-US" sz="1800" strike="noStrike" u="none">
+                          <a:solidFill>
+                            <a:srgbClr val="000000"/>
+                          </a:solidFill>
+                          <a:effectLst/>
+                          <a:uFillTx/>
+                          <a:latin typeface="Arial"/>
+                        </a:rPr>
+                        <a:t>cutting-edge </a:t>
+                      </a:r>
+                      <a:r>
+                        <a:rPr b="0" lang="en-US" sz="1800" strike="noStrike" u="none">
+                          <a:solidFill>
+                            <a:srgbClr val="000000"/>
+                          </a:solidFill>
+                          <a:effectLst/>
+                          <a:uFillTx/>
+                          <a:latin typeface="Arial"/>
+                        </a:rPr>
+                        <a:t>models proved to be problematic.  Use of pre-trained models from MONAI often broke existing Python Packages  </a:t>
+                      </a:r>
+                      <a:endParaRPr b="0" lang="en-US" sz="1800" strike="noStrike" u="none">
+                        <a:solidFill>
+                          <a:srgbClr val="000000"/>
+                        </a:solidFill>
+                        <a:effectLst/>
+                        <a:uFillTx/>
+                        <a:latin typeface="Arial"/>
+                      </a:endParaRPr>
+                    </a:p>
+                  </a:txBody>
+                  <a:tcPr anchor="t" marL="36000" marR="36000" marT="36000" marB="36000">
+                    <a:lnL>
+                      <a:noFill/>
+                    </a:lnL>
+                    <a:lnR>
+                      <a:noFill/>
+                    </a:lnR>
+                    <a:lnT>
+                      <a:noFill/>
+                    </a:lnT>
+                    <a:lnB>
+                      <a:noFill/>
+                    </a:lnB>
+                    <a:noFill/>
+                  </a:tcPr>
+                </a:tc>
+                <a:tc>
+                  <a:txBody>
+                    <a:bodyPr lIns="36000" rIns="36000" tIns="36000" bIns="36000" anchor="t">
+                      <a:noAutofit/>
+                    </a:bodyPr>
+                    <a:p>
+                      <a:pPr marL="216000" indent="-216000">
+                        <a:buClr>
+                          <a:srgbClr val="000000"/>
+                        </a:buClr>
+                        <a:buSzPct val="45000"/>
+                        <a:buFont typeface="Wingdings" charset="2"/>
+                        <a:buChar char=""/>
+                      </a:pPr>
+                      <a:r>
+                        <a:rPr b="0" lang="en-US" sz="1800" strike="noStrike" u="none">
+                          <a:solidFill>
+                            <a:srgbClr val="000000"/>
+                          </a:solidFill>
+                          <a:effectLst/>
+                          <a:uFillTx/>
+                          <a:latin typeface="Arial"/>
+                        </a:rPr>
+                        <a:t>Worked around broken packages by paying extra attention to versions.  Used different packages when possible</a:t>
+                      </a:r>
+                      <a:endParaRPr b="0" lang="en-US" sz="1800" strike="noStrike" u="none">
+                        <a:solidFill>
+                          <a:srgbClr val="000000"/>
+                        </a:solidFill>
+                        <a:effectLst/>
+                        <a:uFillTx/>
+                        <a:latin typeface="Arial"/>
+                      </a:endParaRPr>
+                    </a:p>
+                  </a:txBody>
+                  <a:tcPr anchor="t" marL="36000" marR="36000" marT="36000" marB="36000">
+                    <a:lnL>
+                      <a:noFill/>
+                    </a:lnL>
+                    <a:lnR>
+                      <a:noFill/>
+                    </a:lnR>
+                    <a:lnT>
+                      <a:noFill/>
+                    </a:lnT>
+                    <a:lnB>
+                      <a:noFill/>
+                    </a:lnB>
+                    <a:noFill/>
+                  </a:tcPr>
+                </a:tc>
+              </a:tr>
+              <a:tr h="346320">
+                <a:tc>
+                  <a:txBody>
+                    <a:bodyPr lIns="36000" rIns="36000" tIns="36000" bIns="36000" anchor="t">
+                      <a:noAutofit/>
+                    </a:bodyPr>
+                    <a:p>
+                      <a:pPr marL="216000" indent="-216000">
+                        <a:buClr>
+                          <a:srgbClr val="000000"/>
+                        </a:buClr>
+                        <a:buSzPct val="45000"/>
+                        <a:buFont typeface="Wingdings" charset="2"/>
+                        <a:buChar char=""/>
+                      </a:pPr>
+                      <a:r>
+                        <a:rPr b="0" lang="en-US" sz="1800" strike="noStrike" u="none">
+                          <a:solidFill>
+                            <a:srgbClr val="000000"/>
+                          </a:solidFill>
+                          <a:effectLst/>
+                          <a:uFillTx/>
+                          <a:latin typeface="Arial"/>
+                        </a:rPr>
+                        <a:t>File path inconsistencies between datasets</a:t>
+                      </a:r>
+                      <a:endParaRPr b="0" lang="en-US" sz="1800" strike="noStrike" u="none">
+                        <a:solidFill>
+                          <a:srgbClr val="000000"/>
+                        </a:solidFill>
+                        <a:effectLst/>
+                        <a:uFillTx/>
+                        <a:latin typeface="Arial"/>
+                      </a:endParaRPr>
+                    </a:p>
+                  </a:txBody>
+                  <a:tcPr anchor="t" marL="36000" marR="36000" marT="36000" marB="36000">
+                    <a:lnL>
+                      <a:noFill/>
+                    </a:lnL>
+                    <a:lnR>
+                      <a:noFill/>
+                    </a:lnR>
+                    <a:lnT>
+                      <a:noFill/>
+                    </a:lnT>
+                    <a:lnB>
+                      <a:noFill/>
+                    </a:lnB>
+                    <a:noFill/>
+                  </a:tcPr>
+                </a:tc>
+                <a:tc>
+                  <a:txBody>
+                    <a:bodyPr lIns="36000" rIns="36000" tIns="36000" bIns="36000" anchor="t">
+                      <a:noAutofit/>
+                    </a:bodyPr>
+                    <a:p>
+                      <a:pPr marL="216000" indent="-216000">
+                        <a:buClr>
+                          <a:srgbClr val="000000"/>
+                        </a:buClr>
+                        <a:buSzPct val="45000"/>
+                        <a:buFont typeface="Wingdings" charset="2"/>
+                        <a:buChar char=""/>
+                      </a:pPr>
+                      <a:r>
+                        <a:rPr b="0" lang="en-US" sz="1800" strike="noStrike" u="none">
+                          <a:solidFill>
+                            <a:srgbClr val="000000"/>
+                          </a:solidFill>
+                          <a:effectLst/>
+                          <a:uFillTx/>
+                          <a:latin typeface="Arial"/>
+                        </a:rPr>
+                        <a:t>Created custom data loaders for each dataset</a:t>
+                      </a:r>
+                      <a:endParaRPr b="0" lang="en-US" sz="1800" strike="noStrike" u="none">
+                        <a:solidFill>
+                          <a:srgbClr val="000000"/>
+                        </a:solidFill>
+                        <a:effectLst/>
+                        <a:uFillTx/>
+                        <a:latin typeface="Arial"/>
+                      </a:endParaRPr>
+                    </a:p>
+                  </a:txBody>
+                  <a:tcPr anchor="t" marL="36000" marR="36000" marT="36000" marB="36000">
+                    <a:lnL>
+                      <a:noFill/>
+                    </a:lnL>
+                    <a:lnR>
+                      <a:noFill/>
+                    </a:lnR>
+                    <a:lnT>
+                      <a:noFill/>
+                    </a:lnT>
+                    <a:lnB>
+                      <a:noFill/>
+                    </a:lnB>
+                    <a:noFill/>
+                  </a:tcPr>
+                </a:tc>
+              </a:tr>
+            </a:tbl>
+          </a:graphicData>
+        </a:graphic>
+      </p:graphicFrame>
+    </p:spTree>
+  </p:cSld>
+  <mc:AlternateContent>
+    <mc:Choice Requires="p14">
+      <p:transition spd="slow" p14:dur="2000"/>
+    </mc:Choice>
+    <mc:Fallback>
+      <p:transition spd="slow"/>
+    </mc:Fallback>
+  </mc:AlternateContent>
+</p:sld>
+</file>
+
+<file path=ppt/slides/slide13.xml><?xml version="1.0" encoding="utf-8"?>
+<p:sld xmlns:a="http://schemas.openxmlformats.org/drawingml/2006/main" xmlns:p="http://schemas.openxmlformats.org/presentationml/2006/main" xmlns:r="http://schemas.openxmlformats.org/officeDocument/2006/relationships" xmlns:p14="http://schemas.microsoft.com/office/powerpoint/2010/main" xmlns:p15="http://schemas.microsoft.com/office/powerpoint/2012/main" xmlns:mc="http://schemas.openxmlformats.org/markup-compatibility/2006">
+  <p:cSld>
+    <p:bg>
+      <p:bgPr>
+        <a:solidFill>
+          <a:schemeClr val="lt1"/>
+        </a:solidFill>
+      </p:bgPr>
+    </p:bg>
+    <p:spTree>
+      <p:nvGrpSpPr>
+        <p:cNvPr id="1" name=""/>
+        <p:cNvGrpSpPr/>
+        <p:nvPr/>
+      </p:nvGrpSpPr>
+      <p:grpSpPr>
+        <a:xfrm>
+          <a:off x="0" y="0"/>
+          <a:ext cx="0" cy="0"/>
+          <a:chOff x="0" y="0"/>
+          <a:chExt cx="0" cy="0"/>
+        </a:xfrm>
+      </p:grpSpPr>
+      <p:sp useBgFill="1">
+        <p:nvSpPr>
+          <p:cNvPr id="123" name="Rectangle 9">
+            <a:extLst>
+              <a:ext uri="{C183D7F6-B498-43B3-948B-1728B52AA6E4}">
+                <adec:decorative xmlns:adec="http://schemas.microsoft.com/office/drawing/2017/decorative" val="1"/>
+              </a:ext>
+            </a:extLst>
+          </p:cNvPr>
+          <p:cNvSpPr/>
+          <p:nvPr/>
+        </p:nvSpPr>
+        <p:spPr>
+          <a:xfrm>
+            <a:off x="0" y="4680"/>
+            <a:ext cx="12184200" cy="6853320"/>
+          </a:xfrm>
+          <a:prstGeom prst="rect">
+            <a:avLst/>
+          </a:prstGeom>
+          <a:ln>
+            <a:noFill/>
+          </a:ln>
+        </p:spPr>
+        <p:style>
+          <a:lnRef idx="2">
+            <a:schemeClr val="accent1">
+              <a:shade val="50000"/>
+            </a:schemeClr>
+          </a:lnRef>
+          <a:fillRef idx="1">
+            <a:schemeClr val="accent1"/>
+          </a:fillRef>
+          <a:effectRef idx="0">
+            <a:schemeClr val="accent1"/>
+          </a:effectRef>
+          <a:fontRef idx="minor"/>
+        </p:style>
+        <p:txBody>
+          <a:bodyPr lIns="90000" rIns="90000" tIns="45000" bIns="45000" anchor="ctr">
+            <a:noAutofit/>
+          </a:bodyPr>
+          <a:p>
+            <a:endParaRPr b="0" lang="en-US" sz="1800" strike="noStrike" u="none">
+              <a:solidFill>
+                <a:schemeClr val="lt1"/>
+              </a:solidFill>
+              <a:effectLst/>
+              <a:uFillTx/>
+              <a:latin typeface="Calibri"/>
+            </a:endParaRPr>
+          </a:p>
+        </p:txBody>
+      </p:sp>
+      <p:sp>
+        <p:nvSpPr>
+          <p:cNvPr id="124" name="PlaceHolder 1"/>
+          <p:cNvSpPr>
+            <a:spLocks noGrp="1"/>
+          </p:cNvSpPr>
+          <p:nvPr>
+            <p:ph type="title"/>
+          </p:nvPr>
+        </p:nvSpPr>
+        <p:spPr>
+          <a:xfrm>
+            <a:off x="572400" y="238680"/>
+            <a:ext cx="11013840" cy="1128600"/>
+          </a:xfrm>
+          <a:prstGeom prst="rect">
+            <a:avLst/>
+          </a:prstGeom>
+          <a:noFill/>
+          <a:ln w="0">
+            <a:noFill/>
+          </a:ln>
+        </p:spPr>
+        <p:txBody>
+          <a:bodyPr lIns="91440" rIns="91440" tIns="45720" bIns="45720" anchor="b">
+            <a:normAutofit/>
+          </a:bodyPr>
+          <a:p>
+            <a:pPr indent="0" algn="ctr">
+              <a:buNone/>
+            </a:pPr>
+            <a:r>
+              <a:rPr b="0" lang="en-US" sz="4400" strike="noStrike" u="none">
+                <a:solidFill>
+                  <a:srgbClr val="000000"/>
+                </a:solidFill>
+                <a:effectLst/>
+                <a:uFillTx/>
+                <a:latin typeface="Arial"/>
+              </a:rPr>
+              <a:t>Future Steps</a:t>
+            </a:r>
+            <a:endParaRPr b="0" lang="en-US" sz="4400" strike="noStrike" u="none">
+              <a:solidFill>
+                <a:srgbClr val="000000"/>
+              </a:solidFill>
+              <a:effectLst/>
+              <a:uFillTx/>
+              <a:latin typeface="Arial"/>
+            </a:endParaRPr>
+          </a:p>
+        </p:txBody>
+      </p:sp>
+      <p:sp>
+        <p:nvSpPr>
+          <p:cNvPr id="125" name="sketchy line 10">
+            <a:extLst>
+              <a:ext uri="{C183D7F6-B498-43B3-948B-1728B52AA6E4}">
+                <adec:decorative xmlns:adec="http://schemas.microsoft.com/office/drawing/2017/decorative" val="1"/>
+              </a:ext>
+            </a:extLst>
+          </p:cNvPr>
+          <p:cNvSpPr/>
+          <p:nvPr/>
+        </p:nvSpPr>
+        <p:spPr>
+          <a:xfrm>
+            <a:off x="572400" y="1681560"/>
+            <a:ext cx="10968120" cy="13680"/>
+          </a:xfrm>
+          <a:custGeom>
+            <a:avLst/>
+            <a:gdLst>
+              <a:gd name="textAreaLeft" fmla="*/ 0 w 10968120"/>
+              <a:gd name="textAreaRight" fmla="*/ 10972800 w 10968120"/>
+              <a:gd name="textAreaTop" fmla="*/ 0 h 13680"/>
+              <a:gd name="textAreaBottom" fmla="*/ 18360 h 13680"/>
+              <a:gd name="GluePoint1X" fmla="*/ 0 w 10972800"/>
+              <a:gd name="GluePoint1Y" fmla="*/ 0 h 18288"/>
+              <a:gd name="GluePoint2X" fmla="*/ 356616 w 10972800"/>
+              <a:gd name="GluePoint2Y" fmla="*/ 0 h 18288"/>
+              <a:gd name="GluePoint3X" fmla="*/ 1042416 w 10972800"/>
+              <a:gd name="GluePoint3Y" fmla="*/ 0 h 18288"/>
+              <a:gd name="GluePoint4X" fmla="*/ 1947672 w 10972800"/>
+              <a:gd name="GluePoint4Y" fmla="*/ 0 h 18288"/>
+              <a:gd name="GluePoint5X" fmla="*/ 2633472 w 10972800"/>
+              <a:gd name="GluePoint5Y" fmla="*/ 0 h 18288"/>
+              <a:gd name="GluePoint6X" fmla="*/ 2990088 w 10972800"/>
+              <a:gd name="GluePoint6Y" fmla="*/ 0 h 18288"/>
+              <a:gd name="GluePoint7X" fmla="*/ 3456432 w 10972800"/>
+              <a:gd name="GluePoint7Y" fmla="*/ 0 h 18288"/>
+              <a:gd name="GluePoint8X" fmla="*/ 4361688 w 10972800"/>
+              <a:gd name="GluePoint8Y" fmla="*/ 0 h 18288"/>
+              <a:gd name="GluePoint9X" fmla="*/ 5266944 w 10972800"/>
+              <a:gd name="GluePoint9Y" fmla="*/ 0 h 18288"/>
+              <a:gd name="GluePoint10X" fmla="*/ 6172200 w 10972800"/>
+              <a:gd name="GluePoint10Y" fmla="*/ 0 h 18288"/>
+              <a:gd name="GluePoint11X" fmla="*/ 6528816 w 10972800"/>
+              <a:gd name="GluePoint11Y" fmla="*/ 0 h 18288"/>
+              <a:gd name="GluePoint12X" fmla="*/ 7214616 w 10972800"/>
+              <a:gd name="GluePoint12Y" fmla="*/ 0 h 18288"/>
+              <a:gd name="GluePoint13X" fmla="*/ 7790688 w 10972800"/>
+              <a:gd name="GluePoint13Y" fmla="*/ 0 h 18288"/>
+              <a:gd name="GluePoint14X" fmla="*/ 8147304 w 10972800"/>
+              <a:gd name="GluePoint14Y" fmla="*/ 0 h 18288"/>
+              <a:gd name="GluePoint15X" fmla="*/ 9052560 w 10972800"/>
+              <a:gd name="GluePoint15Y" fmla="*/ 0 h 18288"/>
+              <a:gd name="GluePoint16X" fmla="*/ 9409176 w 10972800"/>
+              <a:gd name="GluePoint16Y" fmla="*/ 0 h 18288"/>
+              <a:gd name="GluePoint17X" fmla="*/ 9765792 w 10972800"/>
+              <a:gd name="GluePoint17Y" fmla="*/ 0 h 18288"/>
+              <a:gd name="GluePoint18X" fmla="*/ 10341864 w 10972800"/>
+              <a:gd name="GluePoint18Y" fmla="*/ 0 h 18288"/>
+              <a:gd name="GluePoint19X" fmla="*/ 10972800 w 10972800"/>
+              <a:gd name="GluePoint19Y" fmla="*/ 0 h 18288"/>
+              <a:gd name="GluePoint20X" fmla="*/ 10972800 w 10972800"/>
+              <a:gd name="GluePoint20Y" fmla="*/ 18288 h 18288"/>
+              <a:gd name="GluePoint21X" fmla="*/ 10177272 w 10972800"/>
+              <a:gd name="GluePoint21Y" fmla="*/ 18288 h 18288"/>
+              <a:gd name="GluePoint22X" fmla="*/ 9820656 w 10972800"/>
+              <a:gd name="GluePoint22Y" fmla="*/ 18288 h 18288"/>
+              <a:gd name="GluePoint23X" fmla="*/ 9464040 w 10972800"/>
+              <a:gd name="GluePoint23Y" fmla="*/ 18288 h 18288"/>
+              <a:gd name="GluePoint24X" fmla="*/ 8778240 w 10972800"/>
+              <a:gd name="GluePoint24Y" fmla="*/ 18288 h 18288"/>
+              <a:gd name="GluePoint25X" fmla="*/ 8421624 w 10972800"/>
+              <a:gd name="GluePoint25Y" fmla="*/ 18288 h 18288"/>
+              <a:gd name="GluePoint26X" fmla="*/ 7735824 w 10972800"/>
+              <a:gd name="GluePoint26Y" fmla="*/ 18288 h 18288"/>
+              <a:gd name="GluePoint27X" fmla="*/ 6940296 w 10972800"/>
+              <a:gd name="GluePoint27Y" fmla="*/ 18288 h 18288"/>
+              <a:gd name="GluePoint28X" fmla="*/ 6254496 w 10972800"/>
+              <a:gd name="GluePoint28Y" fmla="*/ 18288 h 18288"/>
+              <a:gd name="GluePoint29X" fmla="*/ 5458968 w 10972800"/>
+              <a:gd name="GluePoint29Y" fmla="*/ 18288 h 18288"/>
+              <a:gd name="GluePoint30X" fmla="*/ 4663440 w 10972800"/>
+              <a:gd name="GluePoint30Y" fmla="*/ 18288 h 18288"/>
+              <a:gd name="GluePoint31X" fmla="*/ 4306824 w 10972800"/>
+              <a:gd name="GluePoint31Y" fmla="*/ 18288 h 18288"/>
+              <a:gd name="GluePoint32X" fmla="*/ 3840480 w 10972800"/>
+              <a:gd name="GluePoint32Y" fmla="*/ 18288 h 18288"/>
+              <a:gd name="GluePoint33X" fmla="*/ 3264408 w 10972800"/>
+              <a:gd name="GluePoint33Y" fmla="*/ 18288 h 18288"/>
+              <a:gd name="GluePoint34X" fmla="*/ 2578608 w 10972800"/>
+              <a:gd name="GluePoint34Y" fmla="*/ 18288 h 18288"/>
+              <a:gd name="GluePoint35X" fmla="*/ 1673352 w 10972800"/>
+              <a:gd name="GluePoint35Y" fmla="*/ 18288 h 18288"/>
+              <a:gd name="GluePoint36X" fmla="*/ 877824 w 10972800"/>
+              <a:gd name="GluePoint36Y" fmla="*/ 18288 h 18288"/>
+              <a:gd name="GluePoint37X" fmla="*/ 0 w 10972800"/>
+              <a:gd name="GluePoint37Y" fmla="*/ 18288 h 18288"/>
+              <a:gd name="GluePoint38X" fmla="*/ 0 w 10972800"/>
+              <a:gd name="GluePoint38Y" fmla="*/ 0 h 18288"/>
+            </a:gdLst>
+            <a:ahLst/>
+            <a:cxnLst>
+              <a:cxn ang="0">
+                <a:pos x="GluePoint1X" y="GluePoint1Y"/>
+              </a:cxn>
+              <a:cxn ang="0">
+                <a:pos x="GluePoint2X" y="GluePoint2Y"/>
+              </a:cxn>
+              <a:cxn ang="0">
+                <a:pos x="GluePoint3X" y="GluePoint3Y"/>
+              </a:cxn>
+              <a:cxn ang="0">
+                <a:pos x="GluePoint4X" y="GluePoint4Y"/>
+              </a:cxn>
+              <a:cxn ang="0">
+                <a:pos x="GluePoint5X" y="GluePoint5Y"/>
+              </a:cxn>
+              <a:cxn ang="0">
+                <a:pos x="GluePoint6X" y="GluePoint6Y"/>
+              </a:cxn>
+              <a:cxn ang="0">
+                <a:pos x="GluePoint7X" y="GluePoint7Y"/>
+              </a:cxn>
+              <a:cxn ang="0">
+                <a:pos x="GluePoint8X" y="GluePoint8Y"/>
+              </a:cxn>
+              <a:cxn ang="0">
+                <a:pos x="GluePoint9X" y="GluePoint9Y"/>
+              </a:cxn>
+              <a:cxn ang="0">
+                <a:pos x="GluePoint10X" y="GluePoint10Y"/>
+              </a:cxn>
+              <a:cxn ang="0">
+                <a:pos x="GluePoint11X" y="GluePoint11Y"/>
+              </a:cxn>
+              <a:cxn ang="0">
+                <a:pos x="GluePoint12X" y="GluePoint12Y"/>
+              </a:cxn>
+              <a:cxn ang="0">
+                <a:pos x="GluePoint13X" y="GluePoint13Y"/>
+              </a:cxn>
+              <a:cxn ang="0">
+                <a:pos x="GluePoint14X" y="GluePoint14Y"/>
+              </a:cxn>
+              <a:cxn ang="0">
+                <a:pos x="GluePoint15X" y="GluePoint15Y"/>
+              </a:cxn>
+              <a:cxn ang="0">
+                <a:pos x="GluePoint16X" y="GluePoint16Y"/>
+              </a:cxn>
+              <a:cxn ang="0">
+                <a:pos x="GluePoint17X" y="GluePoint17Y"/>
+              </a:cxn>
+              <a:cxn ang="0">
+                <a:pos x="GluePoint18X" y="GluePoint18Y"/>
+              </a:cxn>
+              <a:cxn ang="0">
+                <a:pos x="GluePoint19X" y="GluePoint19Y"/>
+              </a:cxn>
+              <a:cxn ang="0">
+                <a:pos x="GluePoint20X" y="GluePoint20Y"/>
+              </a:cxn>
+              <a:cxn ang="0">
+                <a:pos x="GluePoint21X" y="GluePoint21Y"/>
+              </a:cxn>
+              <a:cxn ang="0">
+                <a:pos x="GluePoint22X" y="GluePoint22Y"/>
+              </a:cxn>
+              <a:cxn ang="0">
+                <a:pos x="GluePoint23X" y="GluePoint23Y"/>
+              </a:cxn>
+              <a:cxn ang="0">
+                <a:pos x="GluePoint24X" y="GluePoint24Y"/>
+              </a:cxn>
+              <a:cxn ang="0">
+                <a:pos x="GluePoint25X" y="GluePoint25Y"/>
+              </a:cxn>
+              <a:cxn ang="0">
+                <a:pos x="GluePoint26X" y="GluePoint26Y"/>
+              </a:cxn>
+              <a:cxn ang="0">
+                <a:pos x="GluePoint27X" y="GluePoint27Y"/>
+              </a:cxn>
+              <a:cxn ang="0">
+                <a:pos x="GluePoint28X" y="GluePoint28Y"/>
+              </a:cxn>
+              <a:cxn ang="0">
+                <a:pos x="GluePoint29X" y="GluePoint29Y"/>
+              </a:cxn>
+              <a:cxn ang="0">
+                <a:pos x="GluePoint30X" y="GluePoint30Y"/>
+              </a:cxn>
+              <a:cxn ang="0">
+                <a:pos x="GluePoint31X" y="GluePoint31Y"/>
+              </a:cxn>
+              <a:cxn ang="0">
+                <a:pos x="GluePoint32X" y="GluePoint32Y"/>
+              </a:cxn>
+              <a:cxn ang="0">
+                <a:pos x="GluePoint33X" y="GluePoint33Y"/>
+              </a:cxn>
+              <a:cxn ang="0">
+                <a:pos x="GluePoint34X" y="GluePoint34Y"/>
+              </a:cxn>
+              <a:cxn ang="0">
+                <a:pos x="GluePoint35X" y="GluePoint35Y"/>
+              </a:cxn>
+              <a:cxn ang="0">
+                <a:pos x="GluePoint36X" y="GluePoint36Y"/>
+              </a:cxn>
+              <a:cxn ang="0">
+                <a:pos x="GluePoint37X" y="GluePoint37Y"/>
+              </a:cxn>
+              <a:cxn ang="0">
+                <a:pos x="GluePoint38X" y="GluePoint38Y"/>
+              </a:cxn>
+            </a:cxnLst>
+            <a:rect l="textAreaLeft" t="textAreaTop" r="textAreaRight" b="textAreaBottom"/>
+            <a:pathLst>
+              <a:path fill="none" w="10972800" h="18288">
+                <a:moveTo>
+                  <a:pt x="0" y="0"/>
+                </a:moveTo>
+                <a:cubicBezTo>
+                  <a:pt x="165916" y="-1866"/>
+                  <a:pt x="188720" y="13756"/>
+                  <a:pt x="356616" y="0"/>
+                </a:cubicBezTo>
+                <a:cubicBezTo>
+                  <a:pt x="524512" y="-13756"/>
+                  <a:pt x="734781" y="8922"/>
+                  <a:pt x="1042416" y="0"/>
+                </a:cubicBezTo>
+                <a:cubicBezTo>
+                  <a:pt x="1350051" y="-8922"/>
+                  <a:pt x="1595982" y="-26315"/>
+                  <a:pt x="1947672" y="0"/>
+                </a:cubicBezTo>
+                <a:cubicBezTo>
+                  <a:pt x="2299362" y="26315"/>
+                  <a:pt x="2292691" y="-19526"/>
+                  <a:pt x="2633472" y="0"/>
+                </a:cubicBezTo>
+                <a:cubicBezTo>
+                  <a:pt x="2974253" y="19526"/>
+                  <a:pt x="2857309" y="10773"/>
+                  <a:pt x="2990088" y="0"/>
+                </a:cubicBezTo>
+                <a:cubicBezTo>
+                  <a:pt x="3122867" y="-10773"/>
+                  <a:pt x="3359343" y="7194"/>
+                  <a:pt x="3456432" y="0"/>
+                </a:cubicBezTo>
+                <a:cubicBezTo>
+                  <a:pt x="3553521" y="-7194"/>
+                  <a:pt x="4136258" y="5108"/>
+                  <a:pt x="4361688" y="0"/>
+                </a:cubicBezTo>
+                <a:cubicBezTo>
+                  <a:pt x="4587118" y="-5108"/>
+                  <a:pt x="4992424" y="-42958"/>
+                  <a:pt x="5266944" y="0"/>
+                </a:cubicBezTo>
+                <a:cubicBezTo>
+                  <a:pt x="5541464" y="42958"/>
+                  <a:pt x="5882966" y="-3430"/>
+                  <a:pt x="6172200" y="0"/>
+                </a:cubicBezTo>
+                <a:cubicBezTo>
+                  <a:pt x="6461434" y="3430"/>
+                  <a:pt x="6432127" y="6688"/>
+                  <a:pt x="6528816" y="0"/>
+                </a:cubicBezTo>
+                <a:cubicBezTo>
+                  <a:pt x="6625505" y="-6688"/>
+                  <a:pt x="6916805" y="-436"/>
+                  <a:pt x="7214616" y="0"/>
+                </a:cubicBezTo>
+                <a:cubicBezTo>
+                  <a:pt x="7512427" y="436"/>
+                  <a:pt x="7626159" y="-6909"/>
+                  <a:pt x="7790688" y="0"/>
+                </a:cubicBezTo>
+                <a:cubicBezTo>
+                  <a:pt x="7955217" y="6909"/>
+                  <a:pt x="8048891" y="15307"/>
+                  <a:pt x="8147304" y="0"/>
+                </a:cubicBezTo>
+                <a:cubicBezTo>
+                  <a:pt x="8245717" y="-15307"/>
+                  <a:pt x="8645618" y="-11734"/>
+                  <a:pt x="9052560" y="0"/>
+                </a:cubicBezTo>
+                <a:cubicBezTo>
+                  <a:pt x="9459502" y="11734"/>
+                  <a:pt x="9320584" y="8388"/>
+                  <a:pt x="9409176" y="0"/>
+                </a:cubicBezTo>
+                <a:cubicBezTo>
+                  <a:pt x="9497768" y="-8388"/>
+                  <a:pt x="9644192" y="8379"/>
+                  <a:pt x="9765792" y="0"/>
+                </a:cubicBezTo>
+                <a:cubicBezTo>
+                  <a:pt x="9887392" y="-8379"/>
+                  <a:pt x="10105220" y="-12663"/>
+                  <a:pt x="10341864" y="0"/>
+                </a:cubicBezTo>
+                <a:cubicBezTo>
+                  <a:pt x="10578508" y="12663"/>
+                  <a:pt x="10773103" y="-5786"/>
+                  <a:pt x="10972800" y="0"/>
+                </a:cubicBezTo>
+                <a:cubicBezTo>
+                  <a:pt x="10972146" y="8818"/>
+                  <a:pt x="10972240" y="13823"/>
+                  <a:pt x="10972800" y="18288"/>
+                </a:cubicBezTo>
+                <a:cubicBezTo>
+                  <a:pt x="10588778" y="31598"/>
+                  <a:pt x="10543381" y="-12698"/>
+                  <a:pt x="10177272" y="18288"/>
+                </a:cubicBezTo>
+                <a:cubicBezTo>
+                  <a:pt x="9811163" y="49274"/>
+                  <a:pt x="9996817" y="25662"/>
+                  <a:pt x="9820656" y="18288"/>
+                </a:cubicBezTo>
+                <a:cubicBezTo>
+                  <a:pt x="9644495" y="10914"/>
+                  <a:pt x="9607007" y="31631"/>
+                  <a:pt x="9464040" y="18288"/>
+                </a:cubicBezTo>
+                <a:cubicBezTo>
+                  <a:pt x="9321073" y="4945"/>
+                  <a:pt x="9114189" y="28940"/>
+                  <a:pt x="8778240" y="18288"/>
+                </a:cubicBezTo>
+                <a:cubicBezTo>
+                  <a:pt x="8442291" y="7636"/>
+                  <a:pt x="8594763" y="987"/>
+                  <a:pt x="8421624" y="18288"/>
+                </a:cubicBezTo>
+                <a:cubicBezTo>
+                  <a:pt x="8248485" y="35589"/>
+                  <a:pt x="7929515" y="37573"/>
+                  <a:pt x="7735824" y="18288"/>
+                </a:cubicBezTo>
+                <a:cubicBezTo>
+                  <a:pt x="7542133" y="-997"/>
+                  <a:pt x="7252504" y="33858"/>
+                  <a:pt x="6940296" y="18288"/>
+                </a:cubicBezTo>
+                <a:cubicBezTo>
+                  <a:pt x="6628088" y="2718"/>
+                  <a:pt x="6528503" y="48389"/>
+                  <a:pt x="6254496" y="18288"/>
+                </a:cubicBezTo>
+                <a:cubicBezTo>
+                  <a:pt x="5980489" y="-11813"/>
+                  <a:pt x="5695784" y="-3740"/>
+                  <a:pt x="5458968" y="18288"/>
+                </a:cubicBezTo>
+                <a:cubicBezTo>
+                  <a:pt x="5222152" y="40316"/>
+                  <a:pt x="5010751" y="19095"/>
+                  <a:pt x="4663440" y="18288"/>
+                </a:cubicBezTo>
+                <a:cubicBezTo>
+                  <a:pt x="4316129" y="17481"/>
+                  <a:pt x="4425552" y="1606"/>
+                  <a:pt x="4306824" y="18288"/>
+                </a:cubicBezTo>
+                <a:cubicBezTo>
+                  <a:pt x="4188096" y="34970"/>
+                  <a:pt x="3941535" y="7481"/>
+                  <a:pt x="3840480" y="18288"/>
+                </a:cubicBezTo>
+                <a:cubicBezTo>
+                  <a:pt x="3739425" y="29095"/>
+                  <a:pt x="3402388" y="17641"/>
+                  <a:pt x="3264408" y="18288"/>
+                </a:cubicBezTo>
+                <a:cubicBezTo>
+                  <a:pt x="3126428" y="18935"/>
+                  <a:pt x="2776779" y="9983"/>
+                  <a:pt x="2578608" y="18288"/>
+                </a:cubicBezTo>
+                <a:cubicBezTo>
+                  <a:pt x="2380437" y="26593"/>
+                  <a:pt x="1909468" y="25818"/>
+                  <a:pt x="1673352" y="18288"/>
+                </a:cubicBezTo>
+                <a:cubicBezTo>
+                  <a:pt x="1437236" y="10758"/>
+                  <a:pt x="1131180" y="49884"/>
+                  <a:pt x="877824" y="18288"/>
+                </a:cubicBezTo>
+                <a:cubicBezTo>
+                  <a:pt x="624468" y="-13308"/>
+                  <a:pt x="206753" y="2195"/>
+                  <a:pt x="0" y="18288"/>
+                </a:cubicBezTo>
+                <a:cubicBezTo>
+                  <a:pt x="313" y="10654"/>
+                  <a:pt x="-263" y="4056"/>
+                  <a:pt x="0" y="0"/>
+                </a:cubicBezTo>
+                <a:close/>
+              </a:path>
+              <a:path stroke="0" w="10972800" h="18288">
+                <a:moveTo>
+                  <a:pt x="0" y="0"/>
+                </a:moveTo>
+                <a:cubicBezTo>
+                  <a:pt x="164017" y="-17675"/>
+                  <a:pt x="309425" y="9913"/>
+                  <a:pt x="466344" y="0"/>
+                </a:cubicBezTo>
+                <a:cubicBezTo>
+                  <a:pt x="623263" y="-9913"/>
+                  <a:pt x="659300" y="-14524"/>
+                  <a:pt x="822960" y="0"/>
+                </a:cubicBezTo>
+                <a:cubicBezTo>
+                  <a:pt x="986620" y="14524"/>
+                  <a:pt x="1105222" y="-16481"/>
+                  <a:pt x="1289304" y="0"/>
+                </a:cubicBezTo>
+                <a:cubicBezTo>
+                  <a:pt x="1473386" y="16481"/>
+                  <a:pt x="1693223" y="26161"/>
+                  <a:pt x="1975104" y="0"/>
+                </a:cubicBezTo>
+                <a:cubicBezTo>
+                  <a:pt x="2256985" y="-26161"/>
+                  <a:pt x="2435781" y="23061"/>
+                  <a:pt x="2770632" y="0"/>
+                </a:cubicBezTo>
+                <a:cubicBezTo>
+                  <a:pt x="3105483" y="-23061"/>
+                  <a:pt x="3247479" y="-44011"/>
+                  <a:pt x="3675888" y="0"/>
+                </a:cubicBezTo>
+                <a:cubicBezTo>
+                  <a:pt x="4104297" y="44011"/>
+                  <a:pt x="4280918" y="4017"/>
+                  <a:pt x="4581144" y="0"/>
+                </a:cubicBezTo>
+                <a:cubicBezTo>
+                  <a:pt x="4881370" y="-4017"/>
+                  <a:pt x="5021699" y="-11889"/>
+                  <a:pt x="5157216" y="0"/>
+                </a:cubicBezTo>
+                <a:cubicBezTo>
+                  <a:pt x="5292733" y="11889"/>
+                  <a:pt x="5603398" y="-17698"/>
+                  <a:pt x="5952744" y="0"/>
+                </a:cubicBezTo>
+                <a:cubicBezTo>
+                  <a:pt x="6302090" y="17698"/>
+                  <a:pt x="6353093" y="-11909"/>
+                  <a:pt x="6638544" y="0"/>
+                </a:cubicBezTo>
+                <a:cubicBezTo>
+                  <a:pt x="6923995" y="11909"/>
+                  <a:pt x="7053404" y="21630"/>
+                  <a:pt x="7214616" y="0"/>
+                </a:cubicBezTo>
+                <a:cubicBezTo>
+                  <a:pt x="7375828" y="-21630"/>
+                  <a:pt x="7837963" y="3886"/>
+                  <a:pt x="8010144" y="0"/>
+                </a:cubicBezTo>
+                <a:cubicBezTo>
+                  <a:pt x="8182325" y="-3886"/>
+                  <a:pt x="8224183" y="16009"/>
+                  <a:pt x="8366760" y="0"/>
+                </a:cubicBezTo>
+                <a:cubicBezTo>
+                  <a:pt x="8509337" y="-16009"/>
+                  <a:pt x="8687920" y="-5720"/>
+                  <a:pt x="8942832" y="0"/>
+                </a:cubicBezTo>
+                <a:cubicBezTo>
+                  <a:pt x="9197744" y="5720"/>
+                  <a:pt x="9368437" y="20479"/>
+                  <a:pt x="9628632" y="0"/>
+                </a:cubicBezTo>
+                <a:cubicBezTo>
+                  <a:pt x="9888827" y="-20479"/>
+                  <a:pt x="10560858" y="-20746"/>
+                  <a:pt x="10972800" y="0"/>
+                </a:cubicBezTo>
+                <a:cubicBezTo>
+                  <a:pt x="10972186" y="5722"/>
+                  <a:pt x="10972980" y="12495"/>
+                  <a:pt x="10972800" y="18288"/>
+                </a:cubicBezTo>
+                <a:cubicBezTo>
+                  <a:pt x="10786146" y="12536"/>
+                  <a:pt x="10623717" y="14033"/>
+                  <a:pt x="10506456" y="18288"/>
+                </a:cubicBezTo>
+                <a:cubicBezTo>
+                  <a:pt x="10389195" y="22543"/>
+                  <a:pt x="10296178" y="20107"/>
+                  <a:pt x="10149840" y="18288"/>
+                </a:cubicBezTo>
+                <a:cubicBezTo>
+                  <a:pt x="10003502" y="16469"/>
+                  <a:pt x="9767530" y="28891"/>
+                  <a:pt x="9464040" y="18288"/>
+                </a:cubicBezTo>
+                <a:cubicBezTo>
+                  <a:pt x="9160550" y="7685"/>
+                  <a:pt x="9229050" y="2659"/>
+                  <a:pt x="8997696" y="18288"/>
+                </a:cubicBezTo>
+                <a:cubicBezTo>
+                  <a:pt x="8766342" y="33917"/>
+                  <a:pt x="8340136" y="34864"/>
+                  <a:pt x="8092440" y="18288"/>
+                </a:cubicBezTo>
+                <a:cubicBezTo>
+                  <a:pt x="7844744" y="1712"/>
+                  <a:pt x="7863720" y="27405"/>
+                  <a:pt x="7735824" y="18288"/>
+                </a:cubicBezTo>
+                <a:cubicBezTo>
+                  <a:pt x="7607928" y="9171"/>
+                  <a:pt x="7323619" y="461"/>
+                  <a:pt x="7050024" y="18288"/>
+                </a:cubicBezTo>
+                <a:cubicBezTo>
+                  <a:pt x="6776429" y="36115"/>
+                  <a:pt x="6787899" y="28206"/>
+                  <a:pt x="6693408" y="18288"/>
+                </a:cubicBezTo>
+                <a:cubicBezTo>
+                  <a:pt x="6598917" y="8370"/>
+                  <a:pt x="6395231" y="19114"/>
+                  <a:pt x="6227064" y="18288"/>
+                </a:cubicBezTo>
+                <a:cubicBezTo>
+                  <a:pt x="6058897" y="17462"/>
+                  <a:pt x="5618582" y="1091"/>
+                  <a:pt x="5431536" y="18288"/>
+                </a:cubicBezTo>
+                <a:cubicBezTo>
+                  <a:pt x="5244490" y="35485"/>
+                  <a:pt x="4729797" y="-9650"/>
+                  <a:pt x="4526280" y="18288"/>
+                </a:cubicBezTo>
+                <a:cubicBezTo>
+                  <a:pt x="4322763" y="46226"/>
+                  <a:pt x="4216797" y="756"/>
+                  <a:pt x="4059936" y="18288"/>
+                </a:cubicBezTo>
+                <a:cubicBezTo>
+                  <a:pt x="3903075" y="35820"/>
+                  <a:pt x="3537912" y="42098"/>
+                  <a:pt x="3374136" y="18288"/>
+                </a:cubicBezTo>
+                <a:cubicBezTo>
+                  <a:pt x="3210360" y="-5522"/>
+                  <a:pt x="3126842" y="39135"/>
+                  <a:pt x="2907792" y="18288"/>
+                </a:cubicBezTo>
+                <a:cubicBezTo>
+                  <a:pt x="2688742" y="-2559"/>
+                  <a:pt x="2490436" y="34100"/>
+                  <a:pt x="2112264" y="18288"/>
+                </a:cubicBezTo>
+                <a:cubicBezTo>
+                  <a:pt x="1734092" y="2476"/>
+                  <a:pt x="1744622" y="-7274"/>
+                  <a:pt x="1536192" y="18288"/>
+                </a:cubicBezTo>
+                <a:cubicBezTo>
+                  <a:pt x="1327762" y="43850"/>
+                  <a:pt x="1189025" y="6435"/>
+                  <a:pt x="1069848" y="18288"/>
+                </a:cubicBezTo>
+                <a:cubicBezTo>
+                  <a:pt x="950671" y="30141"/>
+                  <a:pt x="858345" y="33684"/>
+                  <a:pt x="713232" y="18288"/>
+                </a:cubicBezTo>
+                <a:cubicBezTo>
+                  <a:pt x="568119" y="2892"/>
+                  <a:pt x="250292" y="5410"/>
+                  <a:pt x="0" y="18288"/>
+                </a:cubicBezTo>
+                <a:cubicBezTo>
+                  <a:pt x="465" y="13062"/>
+                  <a:pt x="-894" y="9029"/>
+                  <a:pt x="0" y="0"/>
+                </a:cubicBezTo>
+                <a:close/>
+              </a:path>
+            </a:pathLst>
+          </a:custGeom>
+          <a:solidFill>
+            <a:schemeClr val="accent2">
+              <a:alpha val="75000"/>
+            </a:schemeClr>
+          </a:solidFill>
+          <a:ln cap="rnd" w="44450">
+            <a:solidFill>
+              <a:schemeClr val="accent2">
+                <a:alpha val="75000"/>
+              </a:schemeClr>
+            </a:solidFill>
+            <a:round/>
+          </a:ln>
+        </p:spPr>
+        <p:style>
+          <a:lnRef idx="2">
+            <a:schemeClr val="accent1">
+              <a:shade val="50000"/>
+            </a:schemeClr>
+          </a:lnRef>
+          <a:fillRef idx="1">
+            <a:schemeClr val="accent1"/>
+          </a:fillRef>
+          <a:effectRef idx="0">
+            <a:schemeClr val="accent1"/>
+          </a:effectRef>
+          <a:fontRef idx="minor"/>
+        </p:style>
+        <p:txBody>
+          <a:bodyPr lIns="90000" rIns="90000" tIns="-26640" bIns="-26640" anchor="ctr">
+            <a:noAutofit/>
+          </a:bodyPr>
+          <a:p>
+            <a:endParaRPr b="0" lang="en-US" sz="1800" strike="noStrike" u="none">
+              <a:solidFill>
+                <a:schemeClr val="lt1"/>
+              </a:solidFill>
+              <a:effectLst/>
+              <a:uFillTx/>
+              <a:latin typeface="Calibri"/>
+            </a:endParaRPr>
+          </a:p>
+        </p:txBody>
+      </p:sp>
+      <p:pic>
+        <p:nvPicPr>
+          <p:cNvPr id="126" name="Picture 13" descr="A blue and white logo&#10;&#10;Description automatically generated"/>
+          <p:cNvPicPr/>
+          <p:nvPr/>
+        </p:nvPicPr>
+        <p:blipFill>
+          <a:blip r:embed="rId1"/>
+          <a:stretch/>
+        </p:blipFill>
+        <p:spPr>
+          <a:xfrm>
+            <a:off x="10199520" y="282600"/>
+            <a:ext cx="1795680" cy="595440"/>
+          </a:xfrm>
+          <a:prstGeom prst="rect">
+            <a:avLst/>
+          </a:prstGeom>
+          <a:noFill/>
+          <a:ln w="0">
+            <a:noFill/>
+          </a:ln>
+        </p:spPr>
+      </p:pic>
+      <p:sp>
+        <p:nvSpPr>
+          <p:cNvPr id="127" name=""/>
+          <p:cNvSpPr txBox="1"/>
+          <p:nvPr/>
+        </p:nvSpPr>
+        <p:spPr>
+          <a:xfrm>
+            <a:off x="1600200" y="2743200"/>
+            <a:ext cx="8686800" cy="2057400"/>
+          </a:xfrm>
+          <a:prstGeom prst="rect">
+            <a:avLst/>
+          </a:prstGeom>
+          <a:noFill/>
+          <a:ln w="0">
+            <a:noFill/>
+          </a:ln>
+        </p:spPr>
+        <p:txBody>
+          <a:bodyPr lIns="90000" rIns="90000" tIns="45000" bIns="45000" anchor="t">
+            <a:spAutoFit/>
+          </a:bodyPr>
+          <a:p>
+            <a:pPr marL="216000" indent="-216000">
+              <a:buClr>
+                <a:srgbClr val="000000"/>
+              </a:buClr>
+              <a:buSzPct val="45000"/>
+              <a:buFont typeface="Wingdings" charset="2"/>
+              <a:buChar char=""/>
+            </a:pPr>
+            <a:r>
+              <a:rPr b="0" lang="en-US" sz="2400" strike="noStrike" u="none">
+                <a:solidFill>
+                  <a:srgbClr val="000000"/>
+                </a:solidFill>
+                <a:effectLst/>
+                <a:uFillTx/>
+                <a:latin typeface="Arial"/>
+              </a:rPr>
+              <a:t>Continue work on training a MONAI SegResNet model on BraTS dataset</a:t>
+            </a:r>
+            <a:endParaRPr b="0" lang="en-US" sz="2400" strike="noStrike" u="none">
+              <a:solidFill>
+                <a:srgbClr val="000000"/>
+              </a:solidFill>
+              <a:effectLst/>
+              <a:uFillTx/>
+              <a:latin typeface="Arial"/>
+            </a:endParaRPr>
+          </a:p>
+          <a:p>
+            <a:pPr marL="216000" indent="-216000">
+              <a:buClr>
+                <a:srgbClr val="000000"/>
+              </a:buClr>
+              <a:buSzPct val="45000"/>
+              <a:buFont typeface="Wingdings" charset="2"/>
+              <a:buChar char=""/>
+            </a:pPr>
+            <a:r>
+              <a:rPr b="0" lang="en-US" sz="2400" strike="noStrike" u="none">
+                <a:solidFill>
+                  <a:srgbClr val="000000"/>
+                </a:solidFill>
+                <a:effectLst/>
+                <a:uFillTx/>
+                <a:latin typeface="Arial"/>
+              </a:rPr>
+              <a:t>After successfully training the model, perform inference on post-treatment Glioma brain tumor dataset</a:t>
+            </a:r>
+            <a:endParaRPr b="0" lang="en-US" sz="2400" strike="noStrike" u="none">
+              <a:solidFill>
+                <a:srgbClr val="000000"/>
+              </a:solidFill>
+              <a:effectLst/>
+              <a:uFillTx/>
+              <a:latin typeface="Arial"/>
+            </a:endParaRPr>
+          </a:p>
+          <a:p>
+            <a:pPr marL="216000" indent="-216000">
+              <a:buClr>
+                <a:srgbClr val="000000"/>
+              </a:buClr>
+              <a:buSzPct val="45000"/>
+              <a:buFont typeface="Wingdings" charset="2"/>
+              <a:buChar char=""/>
+            </a:pPr>
+            <a:r>
+              <a:rPr b="0" lang="en-US" sz="2400" strike="noStrike" u="none">
+                <a:solidFill>
+                  <a:srgbClr val="000000"/>
+                </a:solidFill>
+                <a:effectLst/>
+                <a:uFillTx/>
+                <a:latin typeface="Arial"/>
+              </a:rPr>
+              <a:t>Document findings and complete research paper</a:t>
+            </a:r>
+            <a:endParaRPr b="0" lang="en-US" sz="2400" strike="noStrike" u="none">
+              <a:solidFill>
+                <a:srgbClr val="000000"/>
+              </a:solidFill>
+              <a:effectLst/>
+              <a:uFillTx/>
+              <a:latin typeface="Arial"/>
+            </a:endParaRPr>
+          </a:p>
+        </p:txBody>
+      </p:sp>
     </p:spTree>
   </p:cSld>
   <mc:AlternateContent>
@@ -9162,7 +11231,7 @@
                 <a:uFillTx/>
                 <a:latin typeface="Arial"/>
               </a:rPr>
-              <a:t>This study will train a PyTorch U-Net model using datasets from the BraTS (Brain Tumor Segmentation) challenge sponsored by the Center for Biomedical Image Computing and Analytics.  After training the model will be used on a post-treatment dataset to preform segmentation </a:t>
+              <a:t>This study will train a MONAI SegResNet model using datasets from the BraTS (Brain Tumor Segmentation) challenge sponsored by the Center for Biomedical Image Computing and Analytics.  After training the model will be used on a post-treatment dataset to preform segmentation </a:t>
             </a:r>
             <a:endParaRPr b="0" lang="en-US" sz="2400" strike="noStrike" u="none">
               <a:solidFill>

--- a/week6/Week6_draftPresentation.pptx
+++ b/week6/Week6_draftPresentation.pptx
@@ -25,8 +25,8 @@
 </file>
 
 <file path=ppt/slideLayouts/slideLayout1.xml><?xml version="1.0" encoding="utf-8"?>
-<p:sldLayout xmlns:a="http://schemas.openxmlformats.org/drawingml/2006/main" xmlns:p="http://schemas.openxmlformats.org/presentationml/2006/main" xmlns:r="http://schemas.openxmlformats.org/officeDocument/2006/relationships" xmlns:p14="http://schemas.microsoft.com/office/powerpoint/2010/main" xmlns:p15="http://schemas.microsoft.com/office/powerpoint/2012/main" xmlns:mc="http://schemas.openxmlformats.org/markup-compatibility/2006" type="blank" preserve="1">
-  <p:cSld name="Blank">
+<p:sldLayout xmlns:a="http://schemas.openxmlformats.org/drawingml/2006/main" xmlns:p="http://schemas.openxmlformats.org/presentationml/2006/main" xmlns:r="http://schemas.openxmlformats.org/officeDocument/2006/relationships" xmlns:p14="http://schemas.microsoft.com/office/powerpoint/2010/main" xmlns:p15="http://schemas.microsoft.com/office/powerpoint/2012/main" xmlns:mc="http://schemas.openxmlformats.org/markup-compatibility/2006" type="twoObj" preserve="1">
+  <p:cSld name="Two Content">
     <p:bg>
       <p:bgPr>
         <a:solidFill>
@@ -55,13 +55,470 @@
             <a:spLocks noGrp="1"/>
           </p:cNvSpPr>
           <p:nvPr>
+            <p:ph type="title"/>
+          </p:nvPr>
+        </p:nvSpPr>
+        <p:spPr>
+          <a:xfrm>
+            <a:off x="838080" y="365040"/>
+            <a:ext cx="10510560" cy="1320480"/>
+          </a:xfrm>
+          <a:prstGeom prst="rect">
+            <a:avLst/>
+          </a:prstGeom>
+          <a:noFill/>
+          <a:ln w="0">
+            <a:noFill/>
+          </a:ln>
+        </p:spPr>
+        <p:txBody>
+          <a:bodyPr lIns="91440" rIns="91440" tIns="45720" bIns="45720" anchor="ctr">
+            <a:noAutofit/>
+          </a:bodyPr>
+          <a:p>
+            <a:pPr indent="0" defTabSz="914400">
+              <a:lnSpc>
+                <a:spcPct val="90000"/>
+              </a:lnSpc>
+              <a:buNone/>
+              <a:tabLst>
+                <a:tab algn="l" pos="0"/>
+              </a:tabLst>
+            </a:pPr>
+            <a:r>
+              <a:rPr b="0" lang="en-US" sz="4400" strike="noStrike" u="none">
+                <a:solidFill>
+                  <a:schemeClr val="dk1"/>
+                </a:solidFill>
+                <a:effectLst/>
+                <a:uFillTx/>
+                <a:latin typeface="Calibri Light"/>
+              </a:rPr>
+              <a:t>Click to edit Master title style</a:t>
+            </a:r>
+            <a:endParaRPr b="0" lang="en-US" sz="4400" strike="noStrike" u="none">
+              <a:solidFill>
+                <a:srgbClr val="000000"/>
+              </a:solidFill>
+              <a:effectLst/>
+              <a:uFillTx/>
+              <a:latin typeface="Arial"/>
+            </a:endParaRPr>
+          </a:p>
+        </p:txBody>
+      </p:sp>
+      <p:sp>
+        <p:nvSpPr>
+          <p:cNvPr id="3" name="PlaceHolder 2"/>
+          <p:cNvSpPr>
+            <a:spLocks noGrp="1"/>
+          </p:cNvSpPr>
+          <p:nvPr>
+            <p:ph type="body"/>
+          </p:nvPr>
+        </p:nvSpPr>
+        <p:spPr>
+          <a:xfrm>
+            <a:off x="838080" y="1825560"/>
+            <a:ext cx="5176440" cy="4346280"/>
+          </a:xfrm>
+          <a:prstGeom prst="rect">
+            <a:avLst/>
+          </a:prstGeom>
+          <a:noFill/>
+          <a:ln w="0">
+            <a:noFill/>
+          </a:ln>
+        </p:spPr>
+        <p:txBody>
+          <a:bodyPr lIns="91440" rIns="91440" tIns="45720" bIns="45720" anchor="t">
+            <a:noAutofit/>
+          </a:bodyPr>
+          <a:p>
+            <a:pPr marL="228600" indent="-228600" defTabSz="914400">
+              <a:lnSpc>
+                <a:spcPct val="90000"/>
+              </a:lnSpc>
+              <a:spcBef>
+                <a:spcPts val="1001"/>
+              </a:spcBef>
+              <a:buClr>
+                <a:srgbClr val="000000"/>
+              </a:buClr>
+              <a:buFont typeface="Arial"/>
+              <a:buChar char="•"/>
+            </a:pPr>
+            <a:r>
+              <a:rPr b="0" lang="en-US" sz="2800" strike="noStrike" u="none">
+                <a:solidFill>
+                  <a:schemeClr val="dk1"/>
+                </a:solidFill>
+                <a:effectLst/>
+                <a:uFillTx/>
+                <a:latin typeface="Calibri"/>
+              </a:rPr>
+              <a:t>Click to edit Master text styles</a:t>
+            </a:r>
+            <a:endParaRPr b="0" lang="en-US" sz="2800" strike="noStrike" u="none">
+              <a:solidFill>
+                <a:srgbClr val="000000"/>
+              </a:solidFill>
+              <a:effectLst/>
+              <a:uFillTx/>
+              <a:latin typeface="Arial"/>
+            </a:endParaRPr>
+          </a:p>
+          <a:p>
+            <a:pPr lvl="1" marL="685800" indent="-228600" defTabSz="914400">
+              <a:lnSpc>
+                <a:spcPct val="90000"/>
+              </a:lnSpc>
+              <a:spcBef>
+                <a:spcPts val="499"/>
+              </a:spcBef>
+              <a:buClr>
+                <a:srgbClr val="000000"/>
+              </a:buClr>
+              <a:buFont typeface="Arial"/>
+              <a:buChar char="•"/>
+            </a:pPr>
+            <a:r>
+              <a:rPr b="0" lang="en-US" sz="2400" strike="noStrike" u="none">
+                <a:solidFill>
+                  <a:schemeClr val="dk1"/>
+                </a:solidFill>
+                <a:effectLst/>
+                <a:uFillTx/>
+                <a:latin typeface="Calibri"/>
+              </a:rPr>
+              <a:t>Second level</a:t>
+            </a:r>
+            <a:endParaRPr b="0" lang="en-US" sz="2400" strike="noStrike" u="none">
+              <a:solidFill>
+                <a:srgbClr val="000000"/>
+              </a:solidFill>
+              <a:effectLst/>
+              <a:uFillTx/>
+              <a:latin typeface="Arial"/>
+            </a:endParaRPr>
+          </a:p>
+          <a:p>
+            <a:pPr lvl="2" marL="1143000" indent="-228600" defTabSz="914400">
+              <a:lnSpc>
+                <a:spcPct val="90000"/>
+              </a:lnSpc>
+              <a:spcBef>
+                <a:spcPts val="499"/>
+              </a:spcBef>
+              <a:buClr>
+                <a:srgbClr val="000000"/>
+              </a:buClr>
+              <a:buFont typeface="Arial"/>
+              <a:buChar char="•"/>
+            </a:pPr>
+            <a:r>
+              <a:rPr b="0" lang="en-US" sz="2000" strike="noStrike" u="none">
+                <a:solidFill>
+                  <a:schemeClr val="dk1"/>
+                </a:solidFill>
+                <a:effectLst/>
+                <a:uFillTx/>
+                <a:latin typeface="Calibri"/>
+              </a:rPr>
+              <a:t>Third level</a:t>
+            </a:r>
+            <a:endParaRPr b="0" lang="en-US" sz="2000" strike="noStrike" u="none">
+              <a:solidFill>
+                <a:srgbClr val="000000"/>
+              </a:solidFill>
+              <a:effectLst/>
+              <a:uFillTx/>
+              <a:latin typeface="Arial"/>
+            </a:endParaRPr>
+          </a:p>
+          <a:p>
+            <a:pPr lvl="3" marL="1600200" indent="-228600" defTabSz="914400">
+              <a:lnSpc>
+                <a:spcPct val="90000"/>
+              </a:lnSpc>
+              <a:spcBef>
+                <a:spcPts val="499"/>
+              </a:spcBef>
+              <a:buClr>
+                <a:srgbClr val="000000"/>
+              </a:buClr>
+              <a:buFont typeface="Arial"/>
+              <a:buChar char="•"/>
+            </a:pPr>
+            <a:r>
+              <a:rPr b="0" lang="en-US" sz="1800" strike="noStrike" u="none">
+                <a:solidFill>
+                  <a:schemeClr val="dk1"/>
+                </a:solidFill>
+                <a:effectLst/>
+                <a:uFillTx/>
+                <a:latin typeface="Calibri"/>
+              </a:rPr>
+              <a:t>Fourth level</a:t>
+            </a:r>
+            <a:endParaRPr b="0" lang="en-US" sz="1800" strike="noStrike" u="none">
+              <a:solidFill>
+                <a:srgbClr val="000000"/>
+              </a:solidFill>
+              <a:effectLst/>
+              <a:uFillTx/>
+              <a:latin typeface="Arial"/>
+            </a:endParaRPr>
+          </a:p>
+          <a:p>
+            <a:pPr lvl="4" marL="2057400" indent="-228600" defTabSz="914400">
+              <a:lnSpc>
+                <a:spcPct val="90000"/>
+              </a:lnSpc>
+              <a:spcBef>
+                <a:spcPts val="499"/>
+              </a:spcBef>
+              <a:buClr>
+                <a:srgbClr val="000000"/>
+              </a:buClr>
+              <a:buFont typeface="Arial"/>
+              <a:buChar char="•"/>
+            </a:pPr>
+            <a:r>
+              <a:rPr b="0" lang="en-US" sz="1800" strike="noStrike" u="none">
+                <a:solidFill>
+                  <a:schemeClr val="dk1"/>
+                </a:solidFill>
+                <a:effectLst/>
+                <a:uFillTx/>
+                <a:latin typeface="Calibri"/>
+              </a:rPr>
+              <a:t>Fifth level</a:t>
+            </a:r>
+            <a:endParaRPr b="0" lang="en-US" sz="1800" strike="noStrike" u="none">
+              <a:solidFill>
+                <a:srgbClr val="000000"/>
+              </a:solidFill>
+              <a:effectLst/>
+              <a:uFillTx/>
+              <a:latin typeface="Arial"/>
+            </a:endParaRPr>
+          </a:p>
+        </p:txBody>
+      </p:sp>
+      <p:sp>
+        <p:nvSpPr>
+          <p:cNvPr id="4" name="PlaceHolder 3"/>
+          <p:cNvSpPr>
+            <a:spLocks noGrp="1"/>
+          </p:cNvSpPr>
+          <p:nvPr>
+            <p:ph type="body"/>
+          </p:nvPr>
+        </p:nvSpPr>
+        <p:spPr>
+          <a:xfrm>
+            <a:off x="6172200" y="1825560"/>
+            <a:ext cx="5176440" cy="4346280"/>
+          </a:xfrm>
+          <a:prstGeom prst="rect">
+            <a:avLst/>
+          </a:prstGeom>
+          <a:noFill/>
+          <a:ln w="0">
+            <a:noFill/>
+          </a:ln>
+        </p:spPr>
+        <p:txBody>
+          <a:bodyPr lIns="91440" rIns="91440" tIns="45720" bIns="45720" anchor="t">
+            <a:noAutofit/>
+          </a:bodyPr>
+          <a:p>
+            <a:pPr marL="228600" indent="-228600" defTabSz="914400">
+              <a:lnSpc>
+                <a:spcPct val="90000"/>
+              </a:lnSpc>
+              <a:spcBef>
+                <a:spcPts val="1001"/>
+              </a:spcBef>
+              <a:buClr>
+                <a:srgbClr val="000000"/>
+              </a:buClr>
+              <a:buFont typeface="Arial"/>
+              <a:buChar char="•"/>
+            </a:pPr>
+            <a:r>
+              <a:rPr b="0" lang="en-US" sz="2800" strike="noStrike" u="none">
+                <a:solidFill>
+                  <a:schemeClr val="dk1"/>
+                </a:solidFill>
+                <a:effectLst/>
+                <a:uFillTx/>
+                <a:latin typeface="Calibri"/>
+              </a:rPr>
+              <a:t>Click to edit Master text styles</a:t>
+            </a:r>
+            <a:endParaRPr b="0" lang="en-US" sz="2800" strike="noStrike" u="none">
+              <a:solidFill>
+                <a:srgbClr val="000000"/>
+              </a:solidFill>
+              <a:effectLst/>
+              <a:uFillTx/>
+              <a:latin typeface="Arial"/>
+            </a:endParaRPr>
+          </a:p>
+          <a:p>
+            <a:pPr lvl="1" marL="685800" indent="-228600" defTabSz="914400">
+              <a:lnSpc>
+                <a:spcPct val="90000"/>
+              </a:lnSpc>
+              <a:spcBef>
+                <a:spcPts val="499"/>
+              </a:spcBef>
+              <a:buClr>
+                <a:srgbClr val="000000"/>
+              </a:buClr>
+              <a:buFont typeface="Arial"/>
+              <a:buChar char="•"/>
+            </a:pPr>
+            <a:r>
+              <a:rPr b="0" lang="en-US" sz="2400" strike="noStrike" u="none">
+                <a:solidFill>
+                  <a:schemeClr val="dk1"/>
+                </a:solidFill>
+                <a:effectLst/>
+                <a:uFillTx/>
+                <a:latin typeface="Calibri"/>
+              </a:rPr>
+              <a:t>Second level</a:t>
+            </a:r>
+            <a:endParaRPr b="0" lang="en-US" sz="2400" strike="noStrike" u="none">
+              <a:solidFill>
+                <a:srgbClr val="000000"/>
+              </a:solidFill>
+              <a:effectLst/>
+              <a:uFillTx/>
+              <a:latin typeface="Arial"/>
+            </a:endParaRPr>
+          </a:p>
+          <a:p>
+            <a:pPr lvl="2" marL="1143000" indent="-228600" defTabSz="914400">
+              <a:lnSpc>
+                <a:spcPct val="90000"/>
+              </a:lnSpc>
+              <a:spcBef>
+                <a:spcPts val="499"/>
+              </a:spcBef>
+              <a:buClr>
+                <a:srgbClr val="000000"/>
+              </a:buClr>
+              <a:buFont typeface="Arial"/>
+              <a:buChar char="•"/>
+            </a:pPr>
+            <a:r>
+              <a:rPr b="0" lang="en-US" sz="2000" strike="noStrike" u="none">
+                <a:solidFill>
+                  <a:schemeClr val="dk1"/>
+                </a:solidFill>
+                <a:effectLst/>
+                <a:uFillTx/>
+                <a:latin typeface="Calibri"/>
+              </a:rPr>
+              <a:t>Third level</a:t>
+            </a:r>
+            <a:endParaRPr b="0" lang="en-US" sz="2000" strike="noStrike" u="none">
+              <a:solidFill>
+                <a:srgbClr val="000000"/>
+              </a:solidFill>
+              <a:effectLst/>
+              <a:uFillTx/>
+              <a:latin typeface="Arial"/>
+            </a:endParaRPr>
+          </a:p>
+          <a:p>
+            <a:pPr lvl="3" marL="1600200" indent="-228600" defTabSz="914400">
+              <a:lnSpc>
+                <a:spcPct val="90000"/>
+              </a:lnSpc>
+              <a:spcBef>
+                <a:spcPts val="499"/>
+              </a:spcBef>
+              <a:buClr>
+                <a:srgbClr val="000000"/>
+              </a:buClr>
+              <a:buFont typeface="Arial"/>
+              <a:buChar char="•"/>
+            </a:pPr>
+            <a:r>
+              <a:rPr b="0" lang="en-US" sz="1800" strike="noStrike" u="none">
+                <a:solidFill>
+                  <a:schemeClr val="dk1"/>
+                </a:solidFill>
+                <a:effectLst/>
+                <a:uFillTx/>
+                <a:latin typeface="Calibri"/>
+              </a:rPr>
+              <a:t>Fourth level</a:t>
+            </a:r>
+            <a:endParaRPr b="0" lang="en-US" sz="1800" strike="noStrike" u="none">
+              <a:solidFill>
+                <a:srgbClr val="000000"/>
+              </a:solidFill>
+              <a:effectLst/>
+              <a:uFillTx/>
+              <a:latin typeface="Arial"/>
+            </a:endParaRPr>
+          </a:p>
+          <a:p>
+            <a:pPr lvl="4" marL="2057400" indent="-228600" defTabSz="914400">
+              <a:lnSpc>
+                <a:spcPct val="90000"/>
+              </a:lnSpc>
+              <a:spcBef>
+                <a:spcPts val="499"/>
+              </a:spcBef>
+              <a:buClr>
+                <a:srgbClr val="000000"/>
+              </a:buClr>
+              <a:buFont typeface="Arial"/>
+              <a:buChar char="•"/>
+            </a:pPr>
+            <a:r>
+              <a:rPr b="0" lang="en-US" sz="1800" strike="noStrike" u="none">
+                <a:solidFill>
+                  <a:schemeClr val="dk1"/>
+                </a:solidFill>
+                <a:effectLst/>
+                <a:uFillTx/>
+                <a:latin typeface="Calibri"/>
+              </a:rPr>
+              <a:t>Fifth level</a:t>
+            </a:r>
+            <a:endParaRPr b="0" lang="en-US" sz="1800" strike="noStrike" u="none">
+              <a:solidFill>
+                <a:srgbClr val="000000"/>
+              </a:solidFill>
+              <a:effectLst/>
+              <a:uFillTx/>
+              <a:latin typeface="Arial"/>
+            </a:endParaRPr>
+          </a:p>
+        </p:txBody>
+      </p:sp>
+      <p:sp>
+        <p:nvSpPr>
+          <p:cNvPr id="5" name="PlaceHolder 4"/>
+          <p:cNvSpPr>
+            <a:spLocks noGrp="1"/>
+          </p:cNvSpPr>
+          <p:nvPr>
             <p:ph type="dt" idx="1"/>
           </p:nvPr>
         </p:nvSpPr>
         <p:spPr>
           <a:xfrm>
             <a:off x="838080" y="6356520"/>
-            <a:ext cx="2738520" cy="360360"/>
+            <a:ext cx="2738160" cy="360000"/>
           </a:xfrm>
           <a:prstGeom prst="rect">
             <a:avLst/>
@@ -117,7 +574,7 @@
                 <a:uFillTx/>
                 <a:latin typeface="Calibri"/>
               </a:rPr>
-              <a:t> </a:t>
+              <a:t>&lt;date/time&gt;</a:t>
             </a:r>
             <a:endParaRPr b="0" lang="en-US" sz="1200" strike="noStrike" u="none">
               <a:solidFill>
@@ -132,7 +589,7 @@
       </p:sp>
       <p:sp>
         <p:nvSpPr>
-          <p:cNvPr id="3" name="PlaceHolder 2"/>
+          <p:cNvPr id="6" name="PlaceHolder 5"/>
           <p:cNvSpPr>
             <a:spLocks noGrp="1"/>
           </p:cNvSpPr>
@@ -143,7 +600,7 @@
         <p:spPr>
           <a:xfrm>
             <a:off x="4038480" y="6356520"/>
-            <a:ext cx="4110120" cy="360360"/>
+            <a:ext cx="4109760" cy="360000"/>
           </a:xfrm>
           <a:prstGeom prst="rect">
             <a:avLst/>
@@ -195,7 +652,7 @@
                 <a:uFillTx/>
                 <a:latin typeface="Times New Roman"/>
               </a:rPr>
-              <a:t> </a:t>
+              <a:t>&lt;footer&gt;</a:t>
             </a:r>
             <a:endParaRPr b="0" lang="en-US" sz="1400" strike="noStrike" u="none">
               <a:solidFill>
@@ -210,7 +667,7 @@
       </p:sp>
       <p:sp>
         <p:nvSpPr>
-          <p:cNvPr id="4" name="PlaceHolder 3"/>
+          <p:cNvPr id="7" name="PlaceHolder 6"/>
           <p:cNvSpPr>
             <a:spLocks noGrp="1"/>
           </p:cNvSpPr>
@@ -221,7 +678,7 @@
         <p:spPr>
           <a:xfrm>
             <a:off x="8610480" y="6356520"/>
-            <a:ext cx="2738520" cy="360360"/>
+            <a:ext cx="2738160" cy="360000"/>
           </a:xfrm>
           <a:prstGeom prst="rect">
             <a:avLst/>
@@ -266,7 +723,7 @@
                 <a:tab algn="l" pos="0"/>
               </a:tabLst>
             </a:pPr>
-            <a:fld id="{25FB1F38-29D5-4CBF-93C3-4895CB01FF99}" type="slidenum">
+            <a:fld id="{3F1AB9F6-849F-427B-80FD-B5A937FC6CBB}" type="slidenum">
               <a:rPr b="0" lang="en-US" sz="1200" strike="noStrike" u="none">
                 <a:solidFill>
                   <a:schemeClr val="dk1">
@@ -277,7 +734,7 @@
                 <a:uFillTx/>
                 <a:latin typeface="Calibri"/>
               </a:rPr>
-              <a:t>13</a:t>
+              <a:t>&lt;number&gt;</a:t>
             </a:fld>
             <a:endParaRPr b="0" lang="en-US" sz="1200" strike="noStrike" u="none">
               <a:solidFill>
@@ -296,6 +753,929 @@
 </file>
 
 <file path=ppt/slideLayouts/slideLayout10.xml><?xml version="1.0" encoding="utf-8"?>
+<p:sldLayout xmlns:a="http://schemas.openxmlformats.org/drawingml/2006/main" xmlns:p="http://schemas.openxmlformats.org/presentationml/2006/main" xmlns:r="http://schemas.openxmlformats.org/officeDocument/2006/relationships" xmlns:p14="http://schemas.microsoft.com/office/powerpoint/2010/main" xmlns:p15="http://schemas.microsoft.com/office/powerpoint/2012/main" xmlns:mc="http://schemas.openxmlformats.org/markup-compatibility/2006" type="obj" preserve="1">
+  <p:cSld name="Title and Content">
+    <p:bg>
+      <p:bgPr>
+        <a:solidFill>
+          <a:srgbClr val="ffffff"/>
+        </a:solidFill>
+      </p:bgPr>
+    </p:bg>
+    <p:spTree>
+      <p:nvGrpSpPr>
+        <p:cNvPr id="1" name=""/>
+        <p:cNvGrpSpPr/>
+        <p:nvPr/>
+      </p:nvGrpSpPr>
+      <p:grpSpPr>
+        <a:xfrm>
+          <a:off x="0" y="0"/>
+          <a:ext cx="0" cy="0"/>
+          <a:chOff x="0" y="0"/>
+          <a:chExt cx="0" cy="0"/>
+        </a:xfrm>
+      </p:grpSpPr>
+      <p:sp>
+        <p:nvSpPr>
+          <p:cNvPr id="50" name="PlaceHolder 1"/>
+          <p:cNvSpPr>
+            <a:spLocks noGrp="1"/>
+          </p:cNvSpPr>
+          <p:nvPr>
+            <p:ph type="title"/>
+          </p:nvPr>
+        </p:nvSpPr>
+        <p:spPr>
+          <a:xfrm>
+            <a:off x="838080" y="365040"/>
+            <a:ext cx="10510560" cy="1320480"/>
+          </a:xfrm>
+          <a:prstGeom prst="rect">
+            <a:avLst/>
+          </a:prstGeom>
+          <a:noFill/>
+          <a:ln w="0">
+            <a:noFill/>
+          </a:ln>
+        </p:spPr>
+        <p:txBody>
+          <a:bodyPr lIns="91440" rIns="91440" tIns="45720" bIns="45720" anchor="ctr">
+            <a:noAutofit/>
+          </a:bodyPr>
+          <a:p>
+            <a:pPr indent="0" defTabSz="914400">
+              <a:lnSpc>
+                <a:spcPct val="90000"/>
+              </a:lnSpc>
+              <a:buNone/>
+              <a:tabLst>
+                <a:tab algn="l" pos="0"/>
+              </a:tabLst>
+            </a:pPr>
+            <a:r>
+              <a:rPr b="0" lang="en-US" sz="4400" strike="noStrike" u="none">
+                <a:solidFill>
+                  <a:schemeClr val="dk1"/>
+                </a:solidFill>
+                <a:effectLst/>
+                <a:uFillTx/>
+                <a:latin typeface="Calibri Light"/>
+              </a:rPr>
+              <a:t>Click to edit Master title style</a:t>
+            </a:r>
+            <a:endParaRPr b="0" lang="en-US" sz="4400" strike="noStrike" u="none">
+              <a:solidFill>
+                <a:srgbClr val="000000"/>
+              </a:solidFill>
+              <a:effectLst/>
+              <a:uFillTx/>
+              <a:latin typeface="Arial"/>
+            </a:endParaRPr>
+          </a:p>
+        </p:txBody>
+      </p:sp>
+      <p:sp>
+        <p:nvSpPr>
+          <p:cNvPr id="51" name="PlaceHolder 2"/>
+          <p:cNvSpPr>
+            <a:spLocks noGrp="1"/>
+          </p:cNvSpPr>
+          <p:nvPr>
+            <p:ph type="body"/>
+          </p:nvPr>
+        </p:nvSpPr>
+        <p:spPr>
+          <a:xfrm>
+            <a:off x="838080" y="1825560"/>
+            <a:ext cx="10510560" cy="4346280"/>
+          </a:xfrm>
+          <a:prstGeom prst="rect">
+            <a:avLst/>
+          </a:prstGeom>
+          <a:noFill/>
+          <a:ln w="0">
+            <a:noFill/>
+          </a:ln>
+        </p:spPr>
+        <p:txBody>
+          <a:bodyPr lIns="91440" rIns="91440" tIns="45720" bIns="45720" anchor="t">
+            <a:noAutofit/>
+          </a:bodyPr>
+          <a:p>
+            <a:pPr marL="228600" indent="-228600" defTabSz="914400">
+              <a:lnSpc>
+                <a:spcPct val="90000"/>
+              </a:lnSpc>
+              <a:spcBef>
+                <a:spcPts val="1001"/>
+              </a:spcBef>
+              <a:buClr>
+                <a:srgbClr val="000000"/>
+              </a:buClr>
+              <a:buFont typeface="Arial"/>
+              <a:buChar char="•"/>
+            </a:pPr>
+            <a:r>
+              <a:rPr b="0" lang="en-US" sz="2800" strike="noStrike" u="none">
+                <a:solidFill>
+                  <a:schemeClr val="dk1"/>
+                </a:solidFill>
+                <a:effectLst/>
+                <a:uFillTx/>
+                <a:latin typeface="Calibri"/>
+              </a:rPr>
+              <a:t>Click to edit Master text styles</a:t>
+            </a:r>
+            <a:endParaRPr b="0" lang="en-US" sz="2800" strike="noStrike" u="none">
+              <a:solidFill>
+                <a:srgbClr val="000000"/>
+              </a:solidFill>
+              <a:effectLst/>
+              <a:uFillTx/>
+              <a:latin typeface="Arial"/>
+            </a:endParaRPr>
+          </a:p>
+          <a:p>
+            <a:pPr lvl="1" marL="685800" indent="-228600" defTabSz="914400">
+              <a:lnSpc>
+                <a:spcPct val="90000"/>
+              </a:lnSpc>
+              <a:spcBef>
+                <a:spcPts val="499"/>
+              </a:spcBef>
+              <a:buClr>
+                <a:srgbClr val="000000"/>
+              </a:buClr>
+              <a:buFont typeface="Arial"/>
+              <a:buChar char="•"/>
+            </a:pPr>
+            <a:r>
+              <a:rPr b="0" lang="en-US" sz="2400" strike="noStrike" u="none">
+                <a:solidFill>
+                  <a:schemeClr val="dk1"/>
+                </a:solidFill>
+                <a:effectLst/>
+                <a:uFillTx/>
+                <a:latin typeface="Calibri"/>
+              </a:rPr>
+              <a:t>Second level</a:t>
+            </a:r>
+            <a:endParaRPr b="0" lang="en-US" sz="2400" strike="noStrike" u="none">
+              <a:solidFill>
+                <a:srgbClr val="000000"/>
+              </a:solidFill>
+              <a:effectLst/>
+              <a:uFillTx/>
+              <a:latin typeface="Arial"/>
+            </a:endParaRPr>
+          </a:p>
+          <a:p>
+            <a:pPr lvl="2" marL="1143000" indent="-228600" defTabSz="914400">
+              <a:lnSpc>
+                <a:spcPct val="90000"/>
+              </a:lnSpc>
+              <a:spcBef>
+                <a:spcPts val="499"/>
+              </a:spcBef>
+              <a:buClr>
+                <a:srgbClr val="000000"/>
+              </a:buClr>
+              <a:buFont typeface="Arial"/>
+              <a:buChar char="•"/>
+            </a:pPr>
+            <a:r>
+              <a:rPr b="0" lang="en-US" sz="2000" strike="noStrike" u="none">
+                <a:solidFill>
+                  <a:schemeClr val="dk1"/>
+                </a:solidFill>
+                <a:effectLst/>
+                <a:uFillTx/>
+                <a:latin typeface="Calibri"/>
+              </a:rPr>
+              <a:t>Third level</a:t>
+            </a:r>
+            <a:endParaRPr b="0" lang="en-US" sz="2000" strike="noStrike" u="none">
+              <a:solidFill>
+                <a:srgbClr val="000000"/>
+              </a:solidFill>
+              <a:effectLst/>
+              <a:uFillTx/>
+              <a:latin typeface="Arial"/>
+            </a:endParaRPr>
+          </a:p>
+          <a:p>
+            <a:pPr lvl="3" marL="1600200" indent="-228600" defTabSz="914400">
+              <a:lnSpc>
+                <a:spcPct val="90000"/>
+              </a:lnSpc>
+              <a:spcBef>
+                <a:spcPts val="499"/>
+              </a:spcBef>
+              <a:buClr>
+                <a:srgbClr val="000000"/>
+              </a:buClr>
+              <a:buFont typeface="Arial"/>
+              <a:buChar char="•"/>
+            </a:pPr>
+            <a:r>
+              <a:rPr b="0" lang="en-US" sz="1800" strike="noStrike" u="none">
+                <a:solidFill>
+                  <a:schemeClr val="dk1"/>
+                </a:solidFill>
+                <a:effectLst/>
+                <a:uFillTx/>
+                <a:latin typeface="Calibri"/>
+              </a:rPr>
+              <a:t>Fourth level</a:t>
+            </a:r>
+            <a:endParaRPr b="0" lang="en-US" sz="1800" strike="noStrike" u="none">
+              <a:solidFill>
+                <a:srgbClr val="000000"/>
+              </a:solidFill>
+              <a:effectLst/>
+              <a:uFillTx/>
+              <a:latin typeface="Arial"/>
+            </a:endParaRPr>
+          </a:p>
+          <a:p>
+            <a:pPr lvl="4" marL="2057400" indent="-228600" defTabSz="914400">
+              <a:lnSpc>
+                <a:spcPct val="90000"/>
+              </a:lnSpc>
+              <a:spcBef>
+                <a:spcPts val="499"/>
+              </a:spcBef>
+              <a:buClr>
+                <a:srgbClr val="000000"/>
+              </a:buClr>
+              <a:buFont typeface="Arial"/>
+              <a:buChar char="•"/>
+            </a:pPr>
+            <a:r>
+              <a:rPr b="0" lang="en-US" sz="1800" strike="noStrike" u="none">
+                <a:solidFill>
+                  <a:schemeClr val="dk1"/>
+                </a:solidFill>
+                <a:effectLst/>
+                <a:uFillTx/>
+                <a:latin typeface="Calibri"/>
+              </a:rPr>
+              <a:t>Fifth level</a:t>
+            </a:r>
+            <a:endParaRPr b="0" lang="en-US" sz="1800" strike="noStrike" u="none">
+              <a:solidFill>
+                <a:srgbClr val="000000"/>
+              </a:solidFill>
+              <a:effectLst/>
+              <a:uFillTx/>
+              <a:latin typeface="Arial"/>
+            </a:endParaRPr>
+          </a:p>
+        </p:txBody>
+      </p:sp>
+      <p:sp>
+        <p:nvSpPr>
+          <p:cNvPr id="52" name="PlaceHolder 3"/>
+          <p:cNvSpPr>
+            <a:spLocks noGrp="1"/>
+          </p:cNvSpPr>
+          <p:nvPr>
+            <p:ph type="dt" idx="28"/>
+          </p:nvPr>
+        </p:nvSpPr>
+        <p:spPr>
+          <a:xfrm>
+            <a:off x="838080" y="6356520"/>
+            <a:ext cx="2738160" cy="360000"/>
+          </a:xfrm>
+          <a:prstGeom prst="rect">
+            <a:avLst/>
+          </a:prstGeom>
+          <a:noFill/>
+          <a:ln w="0">
+            <a:noFill/>
+          </a:ln>
+        </p:spPr>
+        <p:txBody>
+          <a:bodyPr lIns="91440" rIns="91440" tIns="45720" bIns="45720" anchor="ctr">
+            <a:noAutofit/>
+          </a:bodyPr>
+          <a:lstStyle>
+            <a:lvl1pPr indent="0" defTabSz="914400">
+              <a:lnSpc>
+                <a:spcPct val="100000"/>
+              </a:lnSpc>
+              <a:buNone/>
+              <a:tabLst>
+                <a:tab algn="l" pos="0"/>
+              </a:tabLst>
+              <a:defRPr b="0" lang="en-US" sz="1200" strike="noStrike" u="none">
+                <a:solidFill>
+                  <a:schemeClr val="dk1">
+                    <a:tint val="75000"/>
+                  </a:schemeClr>
+                </a:solidFill>
+                <a:effectLst/>
+                <a:uFillTx/>
+                <a:latin typeface="Calibri"/>
+              </a:defRPr>
+            </a:lvl1pPr>
+          </a:lstStyle>
+          <a:p>
+            <a:pPr indent="0" defTabSz="914400">
+              <a:lnSpc>
+                <a:spcPct val="100000"/>
+              </a:lnSpc>
+              <a:buNone/>
+              <a:tabLst>
+                <a:tab algn="l" pos="0"/>
+              </a:tabLst>
+            </a:pPr>
+            <a:r>
+              <a:rPr b="0" lang="en-US" sz="1200" strike="noStrike" u="none">
+                <a:solidFill>
+                  <a:schemeClr val="dk1">
+                    <a:tint val="75000"/>
+                  </a:schemeClr>
+                </a:solidFill>
+                <a:effectLst/>
+                <a:uFillTx/>
+                <a:latin typeface="Calibri"/>
+              </a:rPr>
+              <a:t>&lt;date/time&gt;</a:t>
+            </a:r>
+            <a:endParaRPr b="0" lang="en-US" sz="1200" strike="noStrike" u="none">
+              <a:solidFill>
+                <a:srgbClr val="000000"/>
+              </a:solidFill>
+              <a:effectLst/>
+              <a:uFillTx/>
+              <a:latin typeface="Times New Roman"/>
+            </a:endParaRPr>
+          </a:p>
+        </p:txBody>
+      </p:sp>
+      <p:sp>
+        <p:nvSpPr>
+          <p:cNvPr id="53" name="PlaceHolder 4"/>
+          <p:cNvSpPr>
+            <a:spLocks noGrp="1"/>
+          </p:cNvSpPr>
+          <p:nvPr>
+            <p:ph type="ftr" idx="29"/>
+          </p:nvPr>
+        </p:nvSpPr>
+        <p:spPr>
+          <a:xfrm>
+            <a:off x="4038480" y="6356520"/>
+            <a:ext cx="4109760" cy="360000"/>
+          </a:xfrm>
+          <a:prstGeom prst="rect">
+            <a:avLst/>
+          </a:prstGeom>
+          <a:noFill/>
+          <a:ln w="0">
+            <a:noFill/>
+          </a:ln>
+        </p:spPr>
+        <p:txBody>
+          <a:bodyPr lIns="91440" rIns="91440" tIns="45720" bIns="45720" anchor="ctr">
+            <a:noAutofit/>
+          </a:bodyPr>
+          <a:lstStyle>
+            <a:lvl1pPr indent="0" algn="ctr">
+              <a:lnSpc>
+                <a:spcPct val="100000"/>
+              </a:lnSpc>
+              <a:buNone/>
+              <a:tabLst>
+                <a:tab algn="l" pos="0"/>
+              </a:tabLst>
+              <a:defRPr b="0" lang="en-US" sz="1400" strike="noStrike" u="none">
+                <a:solidFill>
+                  <a:srgbClr val="000000"/>
+                </a:solidFill>
+                <a:effectLst/>
+                <a:uFillTx/>
+                <a:latin typeface="Times New Roman"/>
+              </a:defRPr>
+            </a:lvl1pPr>
+          </a:lstStyle>
+          <a:p>
+            <a:pPr indent="0" algn="ctr">
+              <a:lnSpc>
+                <a:spcPct val="100000"/>
+              </a:lnSpc>
+              <a:buNone/>
+              <a:tabLst>
+                <a:tab algn="l" pos="0"/>
+              </a:tabLst>
+            </a:pPr>
+            <a:r>
+              <a:rPr b="0" lang="en-US" sz="1400" strike="noStrike" u="none">
+                <a:solidFill>
+                  <a:srgbClr val="000000"/>
+                </a:solidFill>
+                <a:effectLst/>
+                <a:uFillTx/>
+                <a:latin typeface="Times New Roman"/>
+              </a:rPr>
+              <a:t>&lt;footer&gt;</a:t>
+            </a:r>
+            <a:endParaRPr b="0" lang="en-US" sz="1400" strike="noStrike" u="none">
+              <a:solidFill>
+                <a:srgbClr val="000000"/>
+              </a:solidFill>
+              <a:effectLst/>
+              <a:uFillTx/>
+              <a:latin typeface="Times New Roman"/>
+            </a:endParaRPr>
+          </a:p>
+        </p:txBody>
+      </p:sp>
+      <p:sp>
+        <p:nvSpPr>
+          <p:cNvPr id="54" name="PlaceHolder 5"/>
+          <p:cNvSpPr>
+            <a:spLocks noGrp="1"/>
+          </p:cNvSpPr>
+          <p:nvPr>
+            <p:ph type="sldNum" idx="30"/>
+          </p:nvPr>
+        </p:nvSpPr>
+        <p:spPr>
+          <a:xfrm>
+            <a:off x="8610480" y="6356520"/>
+            <a:ext cx="2738160" cy="360000"/>
+          </a:xfrm>
+          <a:prstGeom prst="rect">
+            <a:avLst/>
+          </a:prstGeom>
+          <a:noFill/>
+          <a:ln w="0">
+            <a:noFill/>
+          </a:ln>
+        </p:spPr>
+        <p:txBody>
+          <a:bodyPr lIns="91440" rIns="91440" tIns="45720" bIns="45720" anchor="ctr">
+            <a:noAutofit/>
+          </a:bodyPr>
+          <a:lstStyle>
+            <a:lvl1pPr indent="0" algn="r" defTabSz="914400">
+              <a:lnSpc>
+                <a:spcPct val="100000"/>
+              </a:lnSpc>
+              <a:buNone/>
+              <a:tabLst>
+                <a:tab algn="l" pos="0"/>
+              </a:tabLst>
+              <a:defRPr b="0" lang="en-US" sz="1200" strike="noStrike" u="none">
+                <a:solidFill>
+                  <a:schemeClr val="dk1">
+                    <a:tint val="75000"/>
+                  </a:schemeClr>
+                </a:solidFill>
+                <a:effectLst/>
+                <a:uFillTx/>
+                <a:latin typeface="Calibri"/>
+              </a:defRPr>
+            </a:lvl1pPr>
+          </a:lstStyle>
+          <a:p>
+            <a:pPr indent="0" algn="r" defTabSz="914400">
+              <a:lnSpc>
+                <a:spcPct val="100000"/>
+              </a:lnSpc>
+              <a:buNone/>
+              <a:tabLst>
+                <a:tab algn="l" pos="0"/>
+              </a:tabLst>
+            </a:pPr>
+            <a:fld id="{20A9B8C0-1A9D-4D3E-92BB-15905C81A688}" type="slidenum">
+              <a:rPr b="0" lang="en-US" sz="1200" strike="noStrike" u="none">
+                <a:solidFill>
+                  <a:schemeClr val="dk1">
+                    <a:tint val="75000"/>
+                  </a:schemeClr>
+                </a:solidFill>
+                <a:effectLst/>
+                <a:uFillTx/>
+                <a:latin typeface="Calibri"/>
+              </a:rPr>
+              <a:t>&lt;number&gt;</a:t>
+            </a:fld>
+            <a:endParaRPr b="0" lang="en-US" sz="1200" strike="noStrike" u="none">
+              <a:solidFill>
+                <a:srgbClr val="000000"/>
+              </a:solidFill>
+              <a:effectLst/>
+              <a:uFillTx/>
+              <a:latin typeface="Times New Roman"/>
+            </a:endParaRPr>
+          </a:p>
+        </p:txBody>
+      </p:sp>
+    </p:spTree>
+  </p:cSld>
+</p:sldLayout>
+</file>
+
+<file path=ppt/slideLayouts/slideLayout11.xml><?xml version="1.0" encoding="utf-8"?>
+<p:sldLayout xmlns:a="http://schemas.openxmlformats.org/drawingml/2006/main" xmlns:p="http://schemas.openxmlformats.org/presentationml/2006/main" xmlns:r="http://schemas.openxmlformats.org/officeDocument/2006/relationships" xmlns:p14="http://schemas.microsoft.com/office/powerpoint/2010/main" xmlns:p15="http://schemas.microsoft.com/office/powerpoint/2012/main" xmlns:mc="http://schemas.openxmlformats.org/markup-compatibility/2006" type="blank" preserve="1">
+  <p:cSld name="Section Header">
+    <p:bg>
+      <p:bgPr>
+        <a:solidFill>
+          <a:srgbClr val="ffffff"/>
+        </a:solidFill>
+      </p:bgPr>
+    </p:bg>
+    <p:spTree>
+      <p:nvGrpSpPr>
+        <p:cNvPr id="1" name=""/>
+        <p:cNvGrpSpPr/>
+        <p:nvPr/>
+      </p:nvGrpSpPr>
+      <p:grpSpPr>
+        <a:xfrm>
+          <a:off x="0" y="0"/>
+          <a:ext cx="0" cy="0"/>
+          <a:chOff x="0" y="0"/>
+          <a:chExt cx="0" cy="0"/>
+        </a:xfrm>
+      </p:grpSpPr>
+      <p:sp>
+        <p:nvSpPr>
+          <p:cNvPr id="55" name="PlaceHolder 1"/>
+          <p:cNvSpPr>
+            <a:spLocks noGrp="1"/>
+          </p:cNvSpPr>
+          <p:nvPr>
+            <p:ph type="title"/>
+          </p:nvPr>
+        </p:nvSpPr>
+        <p:spPr>
+          <a:xfrm>
+            <a:off x="831960" y="1709640"/>
+            <a:ext cx="10510560" cy="2847600"/>
+          </a:xfrm>
+          <a:prstGeom prst="rect">
+            <a:avLst/>
+          </a:prstGeom>
+          <a:noFill/>
+          <a:ln w="0">
+            <a:noFill/>
+          </a:ln>
+        </p:spPr>
+        <p:txBody>
+          <a:bodyPr lIns="91440" rIns="91440" tIns="45720" bIns="45720" anchor="b">
+            <a:noAutofit/>
+          </a:bodyPr>
+          <a:p>
+            <a:pPr indent="0" defTabSz="914400">
+              <a:lnSpc>
+                <a:spcPct val="90000"/>
+              </a:lnSpc>
+              <a:buNone/>
+              <a:tabLst>
+                <a:tab algn="l" pos="0"/>
+              </a:tabLst>
+            </a:pPr>
+            <a:r>
+              <a:rPr b="0" lang="en-US" sz="6000" strike="noStrike" u="none">
+                <a:solidFill>
+                  <a:schemeClr val="dk1"/>
+                </a:solidFill>
+                <a:effectLst/>
+                <a:uFillTx/>
+                <a:latin typeface="Calibri Light"/>
+              </a:rPr>
+              <a:t>Click to edit Master title style</a:t>
+            </a:r>
+            <a:endParaRPr b="0" lang="en-US" sz="6000" strike="noStrike" u="none">
+              <a:solidFill>
+                <a:srgbClr val="000000"/>
+              </a:solidFill>
+              <a:effectLst/>
+              <a:uFillTx/>
+              <a:latin typeface="Arial"/>
+            </a:endParaRPr>
+          </a:p>
+        </p:txBody>
+      </p:sp>
+      <p:sp>
+        <p:nvSpPr>
+          <p:cNvPr id="56" name="PlaceHolder 2"/>
+          <p:cNvSpPr>
+            <a:spLocks noGrp="1"/>
+          </p:cNvSpPr>
+          <p:nvPr>
+            <p:ph type="body"/>
+          </p:nvPr>
+        </p:nvSpPr>
+        <p:spPr>
+          <a:xfrm>
+            <a:off x="831960" y="4589640"/>
+            <a:ext cx="10510560" cy="1495080"/>
+          </a:xfrm>
+          <a:prstGeom prst="rect">
+            <a:avLst/>
+          </a:prstGeom>
+          <a:noFill/>
+          <a:ln w="0">
+            <a:noFill/>
+          </a:ln>
+        </p:spPr>
+        <p:txBody>
+          <a:bodyPr lIns="91440" rIns="91440" tIns="45720" bIns="45720" anchor="t">
+            <a:noAutofit/>
+          </a:bodyPr>
+          <a:p>
+            <a:pPr indent="0" defTabSz="914400">
+              <a:lnSpc>
+                <a:spcPct val="90000"/>
+              </a:lnSpc>
+              <a:spcBef>
+                <a:spcPts val="1001"/>
+              </a:spcBef>
+              <a:buNone/>
+              <a:tabLst>
+                <a:tab algn="l" pos="0"/>
+              </a:tabLst>
+            </a:pPr>
+            <a:r>
+              <a:rPr b="0" lang="en-US" sz="2400" strike="noStrike" u="none">
+                <a:solidFill>
+                  <a:schemeClr val="dk1">
+                    <a:tint val="75000"/>
+                  </a:schemeClr>
+                </a:solidFill>
+                <a:effectLst/>
+                <a:uFillTx/>
+                <a:latin typeface="Calibri"/>
+              </a:rPr>
+              <a:t>Click to edit Master text styles</a:t>
+            </a:r>
+            <a:endParaRPr b="0" lang="en-US" sz="2400" strike="noStrike" u="none">
+              <a:solidFill>
+                <a:srgbClr val="000000"/>
+              </a:solidFill>
+              <a:effectLst/>
+              <a:uFillTx/>
+              <a:latin typeface="Arial"/>
+            </a:endParaRPr>
+          </a:p>
+        </p:txBody>
+      </p:sp>
+      <p:sp>
+        <p:nvSpPr>
+          <p:cNvPr id="57" name="PlaceHolder 3"/>
+          <p:cNvSpPr>
+            <a:spLocks noGrp="1"/>
+          </p:cNvSpPr>
+          <p:nvPr>
+            <p:ph type="dt" idx="31"/>
+          </p:nvPr>
+        </p:nvSpPr>
+        <p:spPr>
+          <a:xfrm>
+            <a:off x="838080" y="6356520"/>
+            <a:ext cx="2738160" cy="360000"/>
+          </a:xfrm>
+          <a:prstGeom prst="rect">
+            <a:avLst/>
+          </a:prstGeom>
+          <a:noFill/>
+          <a:ln w="0">
+            <a:noFill/>
+          </a:ln>
+        </p:spPr>
+        <p:txBody>
+          <a:bodyPr lIns="91440" rIns="91440" tIns="45720" bIns="45720" anchor="ctr">
+            <a:noAutofit/>
+          </a:bodyPr>
+          <a:lstStyle>
+            <a:lvl1pPr indent="0" defTabSz="914400">
+              <a:lnSpc>
+                <a:spcPct val="100000"/>
+              </a:lnSpc>
+              <a:buNone/>
+              <a:tabLst>
+                <a:tab algn="l" pos="0"/>
+              </a:tabLst>
+              <a:defRPr b="0" lang="en-US" sz="1200" strike="noStrike" u="none">
+                <a:solidFill>
+                  <a:schemeClr val="dk1">
+                    <a:tint val="75000"/>
+                  </a:schemeClr>
+                </a:solidFill>
+                <a:effectLst/>
+                <a:uFillTx/>
+                <a:latin typeface="Calibri"/>
+              </a:defRPr>
+            </a:lvl1pPr>
+          </a:lstStyle>
+          <a:p>
+            <a:pPr indent="0" defTabSz="914400">
+              <a:lnSpc>
+                <a:spcPct val="100000"/>
+              </a:lnSpc>
+              <a:buNone/>
+              <a:tabLst>
+                <a:tab algn="l" pos="0"/>
+              </a:tabLst>
+            </a:pPr>
+            <a:r>
+              <a:rPr b="0" lang="en-US" sz="1200" strike="noStrike" u="none">
+                <a:solidFill>
+                  <a:schemeClr val="dk1">
+                    <a:tint val="75000"/>
+                  </a:schemeClr>
+                </a:solidFill>
+                <a:effectLst/>
+                <a:uFillTx/>
+                <a:latin typeface="Calibri"/>
+              </a:rPr>
+              <a:t>&lt;date/time&gt;</a:t>
+            </a:r>
+            <a:endParaRPr b="0" lang="en-US" sz="1200" strike="noStrike" u="none">
+              <a:solidFill>
+                <a:srgbClr val="000000"/>
+              </a:solidFill>
+              <a:effectLst/>
+              <a:uFillTx/>
+              <a:latin typeface="Times New Roman"/>
+            </a:endParaRPr>
+          </a:p>
+        </p:txBody>
+      </p:sp>
+      <p:sp>
+        <p:nvSpPr>
+          <p:cNvPr id="58" name="PlaceHolder 4"/>
+          <p:cNvSpPr>
+            <a:spLocks noGrp="1"/>
+          </p:cNvSpPr>
+          <p:nvPr>
+            <p:ph type="ftr" idx="32"/>
+          </p:nvPr>
+        </p:nvSpPr>
+        <p:spPr>
+          <a:xfrm>
+            <a:off x="4038480" y="6356520"/>
+            <a:ext cx="4109760" cy="360000"/>
+          </a:xfrm>
+          <a:prstGeom prst="rect">
+            <a:avLst/>
+          </a:prstGeom>
+          <a:noFill/>
+          <a:ln w="0">
+            <a:noFill/>
+          </a:ln>
+        </p:spPr>
+        <p:txBody>
+          <a:bodyPr lIns="91440" rIns="91440" tIns="45720" bIns="45720" anchor="ctr">
+            <a:noAutofit/>
+          </a:bodyPr>
+          <a:lstStyle>
+            <a:lvl1pPr indent="0" algn="ctr">
+              <a:lnSpc>
+                <a:spcPct val="100000"/>
+              </a:lnSpc>
+              <a:buNone/>
+              <a:tabLst>
+                <a:tab algn="l" pos="0"/>
+              </a:tabLst>
+              <a:defRPr b="0" lang="en-US" sz="1400" strike="noStrike" u="none">
+                <a:solidFill>
+                  <a:srgbClr val="000000"/>
+                </a:solidFill>
+                <a:effectLst/>
+                <a:uFillTx/>
+                <a:latin typeface="Times New Roman"/>
+              </a:defRPr>
+            </a:lvl1pPr>
+          </a:lstStyle>
+          <a:p>
+            <a:pPr indent="0" algn="ctr">
+              <a:lnSpc>
+                <a:spcPct val="100000"/>
+              </a:lnSpc>
+              <a:buNone/>
+              <a:tabLst>
+                <a:tab algn="l" pos="0"/>
+              </a:tabLst>
+            </a:pPr>
+            <a:r>
+              <a:rPr b="0" lang="en-US" sz="1400" strike="noStrike" u="none">
+                <a:solidFill>
+                  <a:srgbClr val="000000"/>
+                </a:solidFill>
+                <a:effectLst/>
+                <a:uFillTx/>
+                <a:latin typeface="Times New Roman"/>
+              </a:rPr>
+              <a:t>&lt;footer&gt;</a:t>
+            </a:r>
+            <a:endParaRPr b="0" lang="en-US" sz="1400" strike="noStrike" u="none">
+              <a:solidFill>
+                <a:srgbClr val="000000"/>
+              </a:solidFill>
+              <a:effectLst/>
+              <a:uFillTx/>
+              <a:latin typeface="Times New Roman"/>
+            </a:endParaRPr>
+          </a:p>
+        </p:txBody>
+      </p:sp>
+      <p:sp>
+        <p:nvSpPr>
+          <p:cNvPr id="59" name="PlaceHolder 5"/>
+          <p:cNvSpPr>
+            <a:spLocks noGrp="1"/>
+          </p:cNvSpPr>
+          <p:nvPr>
+            <p:ph type="sldNum" idx="33"/>
+          </p:nvPr>
+        </p:nvSpPr>
+        <p:spPr>
+          <a:xfrm>
+            <a:off x="8610480" y="6356520"/>
+            <a:ext cx="2738160" cy="360000"/>
+          </a:xfrm>
+          <a:prstGeom prst="rect">
+            <a:avLst/>
+          </a:prstGeom>
+          <a:noFill/>
+          <a:ln w="0">
+            <a:noFill/>
+          </a:ln>
+        </p:spPr>
+        <p:txBody>
+          <a:bodyPr lIns="91440" rIns="91440" tIns="45720" bIns="45720" anchor="ctr">
+            <a:noAutofit/>
+          </a:bodyPr>
+          <a:lstStyle>
+            <a:lvl1pPr indent="0" algn="r" defTabSz="914400">
+              <a:lnSpc>
+                <a:spcPct val="100000"/>
+              </a:lnSpc>
+              <a:buNone/>
+              <a:tabLst>
+                <a:tab algn="l" pos="0"/>
+              </a:tabLst>
+              <a:defRPr b="0" lang="en-US" sz="1200" strike="noStrike" u="none">
+                <a:solidFill>
+                  <a:schemeClr val="dk1">
+                    <a:tint val="75000"/>
+                  </a:schemeClr>
+                </a:solidFill>
+                <a:effectLst/>
+                <a:uFillTx/>
+                <a:latin typeface="Calibri"/>
+              </a:defRPr>
+            </a:lvl1pPr>
+          </a:lstStyle>
+          <a:p>
+            <a:pPr indent="0" algn="r" defTabSz="914400">
+              <a:lnSpc>
+                <a:spcPct val="100000"/>
+              </a:lnSpc>
+              <a:buNone/>
+              <a:tabLst>
+                <a:tab algn="l" pos="0"/>
+              </a:tabLst>
+            </a:pPr>
+            <a:fld id="{F5D55155-8DA3-4FFE-B425-69BBB3B082C1}" type="slidenum">
+              <a:rPr b="0" lang="en-US" sz="1200" strike="noStrike" u="none">
+                <a:solidFill>
+                  <a:schemeClr val="dk1">
+                    <a:tint val="75000"/>
+                  </a:schemeClr>
+                </a:solidFill>
+                <a:effectLst/>
+                <a:uFillTx/>
+                <a:latin typeface="Calibri"/>
+              </a:rPr>
+              <a:t>&lt;number&gt;</a:t>
+            </a:fld>
+            <a:endParaRPr b="0" lang="en-US" sz="1200" strike="noStrike" u="none">
+              <a:solidFill>
+                <a:srgbClr val="000000"/>
+              </a:solidFill>
+              <a:effectLst/>
+              <a:uFillTx/>
+              <a:latin typeface="Times New Roman"/>
+            </a:endParaRPr>
+          </a:p>
+        </p:txBody>
+      </p:sp>
+    </p:spTree>
+  </p:cSld>
+</p:sldLayout>
+</file>
+
+<file path=ppt/slideLayouts/slideLayout2.xml><?xml version="1.0" encoding="utf-8"?>
 <p:sldLayout xmlns:a="http://schemas.openxmlformats.org/drawingml/2006/main" xmlns:p="http://schemas.openxmlformats.org/presentationml/2006/main" xmlns:r="http://schemas.openxmlformats.org/officeDocument/2006/relationships" xmlns:p14="http://schemas.microsoft.com/office/powerpoint/2010/main" xmlns:p15="http://schemas.microsoft.com/office/powerpoint/2012/main" xmlns:mc="http://schemas.openxmlformats.org/markup-compatibility/2006" type="blank" preserve="1">
   <p:cSld name="Comparison">
     <p:bg>
@@ -321,7 +1701,7 @@
       </p:grpSpPr>
       <p:sp>
         <p:nvSpPr>
-          <p:cNvPr id="48" name="PlaceHolder 1"/>
+          <p:cNvPr id="8" name="PlaceHolder 1"/>
           <p:cNvSpPr>
             <a:spLocks noGrp="1"/>
           </p:cNvSpPr>
@@ -332,7 +1712,7 @@
         <p:spPr>
           <a:xfrm>
             <a:off x="839880" y="365040"/>
-            <a:ext cx="10510920" cy="1320840"/>
+            <a:ext cx="10510560" cy="1320480"/>
           </a:xfrm>
           <a:prstGeom prst="rect">
             <a:avLst/>
@@ -380,7 +1760,7 @@
       </p:sp>
       <p:sp>
         <p:nvSpPr>
-          <p:cNvPr id="49" name="PlaceHolder 2"/>
+          <p:cNvPr id="9" name="PlaceHolder 2"/>
           <p:cNvSpPr>
             <a:spLocks noGrp="1"/>
           </p:cNvSpPr>
@@ -391,7 +1771,7 @@
         <p:spPr>
           <a:xfrm>
             <a:off x="839880" y="1681200"/>
-            <a:ext cx="5153040" cy="819360"/>
+            <a:ext cx="5152680" cy="819000"/>
           </a:xfrm>
           <a:prstGeom prst="rect">
             <a:avLst/>
@@ -442,7 +1822,7 @@
       </p:sp>
       <p:sp>
         <p:nvSpPr>
-          <p:cNvPr id="50" name="PlaceHolder 3"/>
+          <p:cNvPr id="10" name="PlaceHolder 3"/>
           <p:cNvSpPr>
             <a:spLocks noGrp="1"/>
           </p:cNvSpPr>
@@ -453,7 +1833,7 @@
         <p:spPr>
           <a:xfrm>
             <a:off x="839880" y="2505240"/>
-            <a:ext cx="5153040" cy="3679920"/>
+            <a:ext cx="5152680" cy="3679560"/>
           </a:xfrm>
           <a:prstGeom prst="rect">
             <a:avLst/>
@@ -641,7 +2021,7 @@
       </p:sp>
       <p:sp>
         <p:nvSpPr>
-          <p:cNvPr id="51" name="PlaceHolder 4"/>
+          <p:cNvPr id="11" name="PlaceHolder 4"/>
           <p:cNvSpPr>
             <a:spLocks noGrp="1"/>
           </p:cNvSpPr>
@@ -652,7 +2032,7 @@
         <p:spPr>
           <a:xfrm>
             <a:off x="6172200" y="1681200"/>
-            <a:ext cx="5178600" cy="819360"/>
+            <a:ext cx="5178240" cy="819000"/>
           </a:xfrm>
           <a:prstGeom prst="rect">
             <a:avLst/>
@@ -703,7 +2083,7 @@
       </p:sp>
       <p:sp>
         <p:nvSpPr>
-          <p:cNvPr id="52" name="PlaceHolder 5"/>
+          <p:cNvPr id="12" name="PlaceHolder 5"/>
           <p:cNvSpPr>
             <a:spLocks noGrp="1"/>
           </p:cNvSpPr>
@@ -714,7 +2094,7 @@
         <p:spPr>
           <a:xfrm>
             <a:off x="6172200" y="2505240"/>
-            <a:ext cx="5178600" cy="3679920"/>
+            <a:ext cx="5178240" cy="3679560"/>
           </a:xfrm>
           <a:prstGeom prst="rect">
             <a:avLst/>
@@ -902,18 +2282,18 @@
       </p:sp>
       <p:sp>
         <p:nvSpPr>
-          <p:cNvPr id="53" name="PlaceHolder 6"/>
+          <p:cNvPr id="13" name="PlaceHolder 6"/>
           <p:cNvSpPr>
             <a:spLocks noGrp="1"/>
           </p:cNvSpPr>
           <p:nvPr>
-            <p:ph type="dt" idx="28"/>
+            <p:ph type="dt" idx="4"/>
           </p:nvPr>
         </p:nvSpPr>
         <p:spPr>
           <a:xfrm>
             <a:off x="838080" y="6356520"/>
-            <a:ext cx="2738520" cy="360360"/>
+            <a:ext cx="2738160" cy="360000"/>
           </a:xfrm>
           <a:prstGeom prst="rect">
             <a:avLst/>
@@ -984,18 +2364,18 @@
       </p:sp>
       <p:sp>
         <p:nvSpPr>
-          <p:cNvPr id="54" name="PlaceHolder 7"/>
+          <p:cNvPr id="14" name="PlaceHolder 7"/>
           <p:cNvSpPr>
             <a:spLocks noGrp="1"/>
           </p:cNvSpPr>
           <p:nvPr>
-            <p:ph type="ftr" idx="29"/>
+            <p:ph type="ftr" idx="5"/>
           </p:nvPr>
         </p:nvSpPr>
         <p:spPr>
           <a:xfrm>
             <a:off x="4038480" y="6356520"/>
-            <a:ext cx="4110120" cy="360360"/>
+            <a:ext cx="4109760" cy="360000"/>
           </a:xfrm>
           <a:prstGeom prst="rect">
             <a:avLst/>
@@ -1062,18 +2442,18 @@
       </p:sp>
       <p:sp>
         <p:nvSpPr>
-          <p:cNvPr id="55" name="PlaceHolder 8"/>
+          <p:cNvPr id="15" name="PlaceHolder 8"/>
           <p:cNvSpPr>
             <a:spLocks noGrp="1"/>
           </p:cNvSpPr>
           <p:nvPr>
-            <p:ph type="sldNum" idx="30"/>
+            <p:ph type="sldNum" idx="6"/>
           </p:nvPr>
         </p:nvSpPr>
         <p:spPr>
           <a:xfrm>
             <a:off x="8610480" y="6356520"/>
-            <a:ext cx="2738520" cy="360360"/>
+            <a:ext cx="2738160" cy="360000"/>
           </a:xfrm>
           <a:prstGeom prst="rect">
             <a:avLst/>
@@ -1118,7 +2498,7 @@
                 <a:tab algn="l" pos="0"/>
               </a:tabLst>
             </a:pPr>
-            <a:fld id="{28065BC5-6859-4F95-BEE5-47068A5A2EF4}" type="slidenum">
+            <a:fld id="{852F85AD-0F49-4EAB-8CB0-A885F42B3513}" type="slidenum">
               <a:rPr b="0" lang="en-US" sz="1200" strike="noStrike" u="none">
                 <a:solidFill>
                   <a:schemeClr val="dk1">
@@ -1147,7 +2527,7 @@
 </p:sldLayout>
 </file>
 
-<file path=ppt/slideLayouts/slideLayout11.xml><?xml version="1.0" encoding="utf-8"?>
+<file path=ppt/slideLayouts/slideLayout3.xml><?xml version="1.0" encoding="utf-8"?>
 <p:sldLayout xmlns:a="http://schemas.openxmlformats.org/drawingml/2006/main" xmlns:p="http://schemas.openxmlformats.org/presentationml/2006/main" xmlns:r="http://schemas.openxmlformats.org/officeDocument/2006/relationships" xmlns:p14="http://schemas.microsoft.com/office/powerpoint/2010/main" xmlns:p15="http://schemas.microsoft.com/office/powerpoint/2012/main" xmlns:mc="http://schemas.openxmlformats.org/markup-compatibility/2006" type="titleOnly" preserve="1">
   <p:cSld name="Title Only">
     <p:bg>
@@ -1173,7 +2553,7 @@
       </p:grpSpPr>
       <p:sp>
         <p:nvSpPr>
-          <p:cNvPr id="56" name="PlaceHolder 1"/>
+          <p:cNvPr id="16" name="PlaceHolder 1"/>
           <p:cNvSpPr>
             <a:spLocks noGrp="1"/>
           </p:cNvSpPr>
@@ -1184,7 +2564,7 @@
         <p:spPr>
           <a:xfrm>
             <a:off x="838080" y="365040"/>
-            <a:ext cx="10510920" cy="1320840"/>
+            <a:ext cx="10510560" cy="1320480"/>
           </a:xfrm>
           <a:prstGeom prst="rect">
             <a:avLst/>
@@ -1232,18 +2612,18 @@
       </p:sp>
       <p:sp>
         <p:nvSpPr>
-          <p:cNvPr id="57" name="PlaceHolder 2"/>
+          <p:cNvPr id="17" name="PlaceHolder 2"/>
           <p:cNvSpPr>
             <a:spLocks noGrp="1"/>
           </p:cNvSpPr>
           <p:nvPr>
-            <p:ph type="dt" idx="31"/>
+            <p:ph type="dt" idx="7"/>
           </p:nvPr>
         </p:nvSpPr>
         <p:spPr>
           <a:xfrm>
             <a:off x="838080" y="6356520"/>
-            <a:ext cx="2738520" cy="360360"/>
+            <a:ext cx="2738160" cy="360000"/>
           </a:xfrm>
           <a:prstGeom prst="rect">
             <a:avLst/>
@@ -1314,18 +2694,18 @@
       </p:sp>
       <p:sp>
         <p:nvSpPr>
-          <p:cNvPr id="58" name="PlaceHolder 3"/>
+          <p:cNvPr id="18" name="PlaceHolder 3"/>
           <p:cNvSpPr>
             <a:spLocks noGrp="1"/>
           </p:cNvSpPr>
           <p:nvPr>
-            <p:ph type="ftr" idx="32"/>
+            <p:ph type="ftr" idx="8"/>
           </p:nvPr>
         </p:nvSpPr>
         <p:spPr>
           <a:xfrm>
             <a:off x="4038480" y="6356520"/>
-            <a:ext cx="4110120" cy="360360"/>
+            <a:ext cx="4109760" cy="360000"/>
           </a:xfrm>
           <a:prstGeom prst="rect">
             <a:avLst/>
@@ -1392,18 +2772,18 @@
       </p:sp>
       <p:sp>
         <p:nvSpPr>
-          <p:cNvPr id="59" name="PlaceHolder 4"/>
+          <p:cNvPr id="19" name="PlaceHolder 4"/>
           <p:cNvSpPr>
             <a:spLocks noGrp="1"/>
           </p:cNvSpPr>
           <p:nvPr>
-            <p:ph type="sldNum" idx="33"/>
+            <p:ph type="sldNum" idx="9"/>
           </p:nvPr>
         </p:nvSpPr>
         <p:spPr>
           <a:xfrm>
             <a:off x="8610480" y="6356520"/>
-            <a:ext cx="2738520" cy="360360"/>
+            <a:ext cx="2738160" cy="360000"/>
           </a:xfrm>
           <a:prstGeom prst="rect">
             <a:avLst/>
@@ -1448,7 +2828,7 @@
                 <a:tab algn="l" pos="0"/>
               </a:tabLst>
             </a:pPr>
-            <a:fld id="{A137ED08-1591-4657-B7F9-B44C1F41460F}" type="slidenum">
+            <a:fld id="{86B4A074-3FCE-4985-9F9B-F9967D98AFF2}" type="slidenum">
               <a:rPr b="0" lang="en-US" sz="1200" strike="noStrike" u="none">
                 <a:solidFill>
                   <a:schemeClr val="dk1">
@@ -1477,7 +2857,278 @@
 </p:sldLayout>
 </file>
 
-<file path=ppt/slideLayouts/slideLayout2.xml><?xml version="1.0" encoding="utf-8"?>
+<file path=ppt/slideLayouts/slideLayout4.xml><?xml version="1.0" encoding="utf-8"?>
+<p:sldLayout xmlns:a="http://schemas.openxmlformats.org/drawingml/2006/main" xmlns:p="http://schemas.openxmlformats.org/presentationml/2006/main" xmlns:r="http://schemas.openxmlformats.org/officeDocument/2006/relationships" xmlns:p14="http://schemas.microsoft.com/office/powerpoint/2010/main" xmlns:p15="http://schemas.microsoft.com/office/powerpoint/2012/main" xmlns:mc="http://schemas.openxmlformats.org/markup-compatibility/2006" type="blank" preserve="1">
+  <p:cSld name="Blank">
+    <p:bg>
+      <p:bgPr>
+        <a:solidFill>
+          <a:srgbClr val="ffffff"/>
+        </a:solidFill>
+      </p:bgPr>
+    </p:bg>
+    <p:spTree>
+      <p:nvGrpSpPr>
+        <p:cNvPr id="1" name=""/>
+        <p:cNvGrpSpPr/>
+        <p:nvPr/>
+      </p:nvGrpSpPr>
+      <p:grpSpPr>
+        <a:xfrm>
+          <a:off x="0" y="0"/>
+          <a:ext cx="0" cy="0"/>
+          <a:chOff x="0" y="0"/>
+          <a:chExt cx="0" cy="0"/>
+        </a:xfrm>
+      </p:grpSpPr>
+      <p:sp>
+        <p:nvSpPr>
+          <p:cNvPr id="20" name="PlaceHolder 1"/>
+          <p:cNvSpPr>
+            <a:spLocks noGrp="1"/>
+          </p:cNvSpPr>
+          <p:nvPr>
+            <p:ph type="dt" idx="10"/>
+          </p:nvPr>
+        </p:nvSpPr>
+        <p:spPr>
+          <a:xfrm>
+            <a:off x="838080" y="6356520"/>
+            <a:ext cx="2738160" cy="360000"/>
+          </a:xfrm>
+          <a:prstGeom prst="rect">
+            <a:avLst/>
+          </a:prstGeom>
+          <a:noFill/>
+          <a:ln w="0">
+            <a:noFill/>
+          </a:ln>
+        </p:spPr>
+        <p:txBody>
+          <a:bodyPr lIns="91440" rIns="91440" tIns="45720" bIns="45720" anchor="ctr">
+            <a:noAutofit/>
+          </a:bodyPr>
+          <a:lstStyle>
+            <a:lvl1pPr indent="0" defTabSz="914400">
+              <a:lnSpc>
+                <a:spcPct val="100000"/>
+              </a:lnSpc>
+              <a:buNone/>
+              <a:tabLst>
+                <a:tab algn="l" pos="0"/>
+              </a:tabLst>
+              <a:defRPr b="0" lang="en-US" sz="1200" strike="noStrike" u="none">
+                <a:solidFill>
+                  <a:schemeClr val="dk1">
+                    <a:tint val="75000"/>
+                  </a:schemeClr>
+                </a:solidFill>
+                <a:effectLst/>
+                <a:uFillTx/>
+                <a:latin typeface="Calibri"/>
+              </a:defRPr>
+            </a:lvl1pPr>
+          </a:lstStyle>
+          <a:p>
+            <a:pPr indent="0" defTabSz="914400">
+              <a:lnSpc>
+                <a:spcPct val="100000"/>
+              </a:lnSpc>
+              <a:buNone/>
+              <a:tabLst>
+                <a:tab algn="l" pos="0"/>
+              </a:tabLst>
+            </a:pPr>
+            <a:r>
+              <a:rPr b="0" lang="en-US" sz="1200" strike="noStrike" u="none">
+                <a:solidFill>
+                  <a:schemeClr val="dk1">
+                    <a:tint val="75000"/>
+                  </a:schemeClr>
+                </a:solidFill>
+                <a:effectLst/>
+                <a:uFillTx/>
+                <a:latin typeface="Calibri"/>
+              </a:rPr>
+              <a:t>&lt;date/time&gt;</a:t>
+            </a:r>
+            <a:endParaRPr b="0" lang="en-US" sz="1200" strike="noStrike" u="none">
+              <a:solidFill>
+                <a:srgbClr val="000000"/>
+              </a:solidFill>
+              <a:effectLst/>
+              <a:uFillTx/>
+              <a:latin typeface="Times New Roman"/>
+            </a:endParaRPr>
+          </a:p>
+        </p:txBody>
+      </p:sp>
+      <p:sp>
+        <p:nvSpPr>
+          <p:cNvPr id="21" name="PlaceHolder 2"/>
+          <p:cNvSpPr>
+            <a:spLocks noGrp="1"/>
+          </p:cNvSpPr>
+          <p:nvPr>
+            <p:ph type="ftr" idx="11"/>
+          </p:nvPr>
+        </p:nvSpPr>
+        <p:spPr>
+          <a:xfrm>
+            <a:off x="4038480" y="6356520"/>
+            <a:ext cx="4109760" cy="360000"/>
+          </a:xfrm>
+          <a:prstGeom prst="rect">
+            <a:avLst/>
+          </a:prstGeom>
+          <a:noFill/>
+          <a:ln w="0">
+            <a:noFill/>
+          </a:ln>
+        </p:spPr>
+        <p:txBody>
+          <a:bodyPr lIns="91440" rIns="91440" tIns="45720" bIns="45720" anchor="ctr">
+            <a:noAutofit/>
+          </a:bodyPr>
+          <a:lstStyle>
+            <a:lvl1pPr indent="0" algn="ctr">
+              <a:lnSpc>
+                <a:spcPct val="100000"/>
+              </a:lnSpc>
+              <a:buNone/>
+              <a:tabLst>
+                <a:tab algn="l" pos="0"/>
+              </a:tabLst>
+              <a:defRPr b="0" lang="en-US" sz="1400" strike="noStrike" u="none">
+                <a:solidFill>
+                  <a:srgbClr val="000000"/>
+                </a:solidFill>
+                <a:effectLst/>
+                <a:uFillTx/>
+                <a:latin typeface="Times New Roman"/>
+              </a:defRPr>
+            </a:lvl1pPr>
+          </a:lstStyle>
+          <a:p>
+            <a:pPr indent="0" algn="ctr">
+              <a:lnSpc>
+                <a:spcPct val="100000"/>
+              </a:lnSpc>
+              <a:buNone/>
+              <a:tabLst>
+                <a:tab algn="l" pos="0"/>
+              </a:tabLst>
+            </a:pPr>
+            <a:r>
+              <a:rPr b="0" lang="en-US" sz="1400" strike="noStrike" u="none">
+                <a:solidFill>
+                  <a:srgbClr val="000000"/>
+                </a:solidFill>
+                <a:effectLst/>
+                <a:uFillTx/>
+                <a:latin typeface="Times New Roman"/>
+              </a:rPr>
+              <a:t>&lt;footer&gt;</a:t>
+            </a:r>
+            <a:endParaRPr b="0" lang="en-US" sz="1400" strike="noStrike" u="none">
+              <a:solidFill>
+                <a:srgbClr val="000000"/>
+              </a:solidFill>
+              <a:effectLst/>
+              <a:uFillTx/>
+              <a:latin typeface="Times New Roman"/>
+            </a:endParaRPr>
+          </a:p>
+        </p:txBody>
+      </p:sp>
+      <p:sp>
+        <p:nvSpPr>
+          <p:cNvPr id="22" name="PlaceHolder 3"/>
+          <p:cNvSpPr>
+            <a:spLocks noGrp="1"/>
+          </p:cNvSpPr>
+          <p:nvPr>
+            <p:ph type="sldNum" idx="12"/>
+          </p:nvPr>
+        </p:nvSpPr>
+        <p:spPr>
+          <a:xfrm>
+            <a:off x="8610480" y="6356520"/>
+            <a:ext cx="2738160" cy="360000"/>
+          </a:xfrm>
+          <a:prstGeom prst="rect">
+            <a:avLst/>
+          </a:prstGeom>
+          <a:noFill/>
+          <a:ln w="0">
+            <a:noFill/>
+          </a:ln>
+        </p:spPr>
+        <p:txBody>
+          <a:bodyPr lIns="91440" rIns="91440" tIns="45720" bIns="45720" anchor="ctr">
+            <a:noAutofit/>
+          </a:bodyPr>
+          <a:lstStyle>
+            <a:lvl1pPr indent="0" algn="r" defTabSz="914400">
+              <a:lnSpc>
+                <a:spcPct val="100000"/>
+              </a:lnSpc>
+              <a:buNone/>
+              <a:tabLst>
+                <a:tab algn="l" pos="0"/>
+              </a:tabLst>
+              <a:defRPr b="0" lang="en-US" sz="1200" strike="noStrike" u="none">
+                <a:solidFill>
+                  <a:schemeClr val="dk1">
+                    <a:tint val="75000"/>
+                  </a:schemeClr>
+                </a:solidFill>
+                <a:effectLst/>
+                <a:uFillTx/>
+                <a:latin typeface="Calibri"/>
+              </a:defRPr>
+            </a:lvl1pPr>
+          </a:lstStyle>
+          <a:p>
+            <a:pPr indent="0" algn="r" defTabSz="914400">
+              <a:lnSpc>
+                <a:spcPct val="100000"/>
+              </a:lnSpc>
+              <a:buNone/>
+              <a:tabLst>
+                <a:tab algn="l" pos="0"/>
+              </a:tabLst>
+            </a:pPr>
+            <a:fld id="{6F8F4C1B-E3E1-4347-B572-42F0386D434D}" type="slidenum">
+              <a:rPr b="0" lang="en-US" sz="1200" strike="noStrike" u="none">
+                <a:solidFill>
+                  <a:schemeClr val="dk1">
+                    <a:tint val="75000"/>
+                  </a:schemeClr>
+                </a:solidFill>
+                <a:effectLst/>
+                <a:uFillTx/>
+                <a:latin typeface="Calibri"/>
+              </a:rPr>
+              <a:t>&lt;number&gt;</a:t>
+            </a:fld>
+            <a:endParaRPr b="0" lang="en-US" sz="1200" strike="noStrike" u="none">
+              <a:solidFill>
+                <a:srgbClr val="000000"/>
+              </a:solidFill>
+              <a:effectLst/>
+              <a:uFillTx/>
+              <a:latin typeface="Times New Roman"/>
+            </a:endParaRPr>
+          </a:p>
+        </p:txBody>
+      </p:sp>
+    </p:spTree>
+  </p:cSld>
+</p:sldLayout>
+</file>
+
+<file path=ppt/slideLayouts/slideLayout5.xml><?xml version="1.0" encoding="utf-8"?>
 <p:sldLayout xmlns:a="http://schemas.openxmlformats.org/drawingml/2006/main" xmlns:p="http://schemas.openxmlformats.org/presentationml/2006/main" xmlns:r="http://schemas.openxmlformats.org/officeDocument/2006/relationships" xmlns:p14="http://schemas.microsoft.com/office/powerpoint/2010/main" xmlns:p15="http://schemas.microsoft.com/office/powerpoint/2012/main" xmlns:mc="http://schemas.openxmlformats.org/markup-compatibility/2006" type="blank" preserve="1">
   <p:cSld name="Content with Caption">
     <p:bg>
@@ -1503,7 +3154,7 @@
       </p:grpSpPr>
       <p:sp>
         <p:nvSpPr>
-          <p:cNvPr id="5" name="PlaceHolder 1"/>
+          <p:cNvPr id="23" name="PlaceHolder 1"/>
           <p:cNvSpPr>
             <a:spLocks noGrp="1"/>
           </p:cNvSpPr>
@@ -1514,7 +3165,7 @@
         <p:spPr>
           <a:xfrm>
             <a:off x="839880" y="457200"/>
-            <a:ext cx="3927600" cy="1595520"/>
+            <a:ext cx="3927240" cy="1595160"/>
           </a:xfrm>
           <a:prstGeom prst="rect">
             <a:avLst/>
@@ -1562,7 +3213,7 @@
       </p:sp>
       <p:sp>
         <p:nvSpPr>
-          <p:cNvPr id="6" name="PlaceHolder 2"/>
+          <p:cNvPr id="24" name="PlaceHolder 2"/>
           <p:cNvSpPr>
             <a:spLocks noGrp="1"/>
           </p:cNvSpPr>
@@ -1573,7 +3224,7 @@
         <p:spPr>
           <a:xfrm>
             <a:off x="5183280" y="987480"/>
-            <a:ext cx="6167520" cy="4869000"/>
+            <a:ext cx="6167160" cy="4868640"/>
           </a:xfrm>
           <a:prstGeom prst="rect">
             <a:avLst/>
@@ -1761,7 +3412,7 @@
       </p:sp>
       <p:sp>
         <p:nvSpPr>
-          <p:cNvPr id="7" name="PlaceHolder 3"/>
+          <p:cNvPr id="25" name="PlaceHolder 3"/>
           <p:cNvSpPr>
             <a:spLocks noGrp="1"/>
           </p:cNvSpPr>
@@ -1772,7 +3423,7 @@
         <p:spPr>
           <a:xfrm>
             <a:off x="839880" y="2057400"/>
-            <a:ext cx="3927600" cy="3807000"/>
+            <a:ext cx="3927240" cy="3806640"/>
           </a:xfrm>
           <a:prstGeom prst="rect">
             <a:avLst/>
@@ -1823,18 +3474,18 @@
       </p:sp>
       <p:sp>
         <p:nvSpPr>
-          <p:cNvPr id="8" name="PlaceHolder 4"/>
+          <p:cNvPr id="26" name="PlaceHolder 4"/>
           <p:cNvSpPr>
             <a:spLocks noGrp="1"/>
           </p:cNvSpPr>
           <p:nvPr>
-            <p:ph type="dt" idx="4"/>
+            <p:ph type="dt" idx="13"/>
           </p:nvPr>
         </p:nvSpPr>
         <p:spPr>
           <a:xfrm>
             <a:off x="838080" y="6356520"/>
-            <a:ext cx="2738520" cy="360360"/>
+            <a:ext cx="2738160" cy="360000"/>
           </a:xfrm>
           <a:prstGeom prst="rect">
             <a:avLst/>
@@ -1890,7 +3541,7 @@
                 <a:uFillTx/>
                 <a:latin typeface="Calibri"/>
               </a:rPr>
-              <a:t> </a:t>
+              <a:t>&lt;date/time&gt;</a:t>
             </a:r>
             <a:endParaRPr b="0" lang="en-US" sz="1200" strike="noStrike" u="none">
               <a:solidFill>
@@ -1905,18 +3556,18 @@
       </p:sp>
       <p:sp>
         <p:nvSpPr>
-          <p:cNvPr id="9" name="PlaceHolder 5"/>
+          <p:cNvPr id="27" name="PlaceHolder 5"/>
           <p:cNvSpPr>
             <a:spLocks noGrp="1"/>
           </p:cNvSpPr>
           <p:nvPr>
-            <p:ph type="ftr" idx="5"/>
+            <p:ph type="ftr" idx="14"/>
           </p:nvPr>
         </p:nvSpPr>
         <p:spPr>
           <a:xfrm>
             <a:off x="4038480" y="6356520"/>
-            <a:ext cx="4110120" cy="360360"/>
+            <a:ext cx="4109760" cy="360000"/>
           </a:xfrm>
           <a:prstGeom prst="rect">
             <a:avLst/>
@@ -1968,7 +3619,7 @@
                 <a:uFillTx/>
                 <a:latin typeface="Times New Roman"/>
               </a:rPr>
-              <a:t> </a:t>
+              <a:t>&lt;footer&gt;</a:t>
             </a:r>
             <a:endParaRPr b="0" lang="en-US" sz="1400" strike="noStrike" u="none">
               <a:solidFill>
@@ -1983,18 +3634,18 @@
       </p:sp>
       <p:sp>
         <p:nvSpPr>
-          <p:cNvPr id="10" name="PlaceHolder 6"/>
+          <p:cNvPr id="28" name="PlaceHolder 6"/>
           <p:cNvSpPr>
             <a:spLocks noGrp="1"/>
           </p:cNvSpPr>
           <p:nvPr>
-            <p:ph type="sldNum" idx="6"/>
+            <p:ph type="sldNum" idx="15"/>
           </p:nvPr>
         </p:nvSpPr>
         <p:spPr>
           <a:xfrm>
             <a:off x="8610480" y="6356520"/>
-            <a:ext cx="2738520" cy="360360"/>
+            <a:ext cx="2738160" cy="360000"/>
           </a:xfrm>
           <a:prstGeom prst="rect">
             <a:avLst/>
@@ -2039,7 +3690,7 @@
                 <a:tab algn="l" pos="0"/>
               </a:tabLst>
             </a:pPr>
-            <a:fld id="{A765D1F4-7897-45D6-A296-88D13AD702DD}" type="slidenum">
+            <a:fld id="{9D4F8973-C203-4488-8A6A-53239125D1E0}" type="slidenum">
               <a:rPr b="0" lang="en-US" sz="1200" strike="noStrike" u="none">
                 <a:solidFill>
                   <a:schemeClr val="dk1">
@@ -2050,7 +3701,7 @@
                 <a:uFillTx/>
                 <a:latin typeface="Calibri"/>
               </a:rPr>
-              <a:t>13</a:t>
+              <a:t>&lt;number&gt;</a:t>
             </a:fld>
             <a:endParaRPr b="0" lang="en-US" sz="1200" strike="noStrike" u="none">
               <a:solidFill>
@@ -2068,7 +3719,7 @@
 </p:sldLayout>
 </file>
 
-<file path=ppt/slideLayouts/slideLayout3.xml><?xml version="1.0" encoding="utf-8"?>
+<file path=ppt/slideLayouts/slideLayout6.xml><?xml version="1.0" encoding="utf-8"?>
 <p:sldLayout xmlns:a="http://schemas.openxmlformats.org/drawingml/2006/main" xmlns:p="http://schemas.openxmlformats.org/presentationml/2006/main" xmlns:r="http://schemas.openxmlformats.org/officeDocument/2006/relationships" xmlns:p14="http://schemas.microsoft.com/office/powerpoint/2010/main" xmlns:p15="http://schemas.microsoft.com/office/powerpoint/2012/main" xmlns:mc="http://schemas.openxmlformats.org/markup-compatibility/2006" type="blank" preserve="1">
   <p:cSld name="Picture with Caption">
     <p:bg>
@@ -2094,7 +3745,7 @@
       </p:grpSpPr>
       <p:sp>
         <p:nvSpPr>
-          <p:cNvPr id="11" name="PlaceHolder 1"/>
+          <p:cNvPr id="29" name="PlaceHolder 1"/>
           <p:cNvSpPr>
             <a:spLocks noGrp="1"/>
           </p:cNvSpPr>
@@ -2105,7 +3756,7 @@
         <p:spPr>
           <a:xfrm>
             <a:off x="839880" y="457200"/>
-            <a:ext cx="3927600" cy="1595520"/>
+            <a:ext cx="3927240" cy="1595160"/>
           </a:xfrm>
           <a:prstGeom prst="rect">
             <a:avLst/>
@@ -2153,7 +3804,7 @@
       </p:sp>
       <p:sp>
         <p:nvSpPr>
-          <p:cNvPr id="12" name="PlaceHolder 2"/>
+          <p:cNvPr id="30" name="PlaceHolder 2"/>
           <p:cNvSpPr>
             <a:spLocks noGrp="1"/>
           </p:cNvSpPr>
@@ -2164,7 +3815,7 @@
         <p:spPr>
           <a:xfrm>
             <a:off x="5183280" y="987480"/>
-            <a:ext cx="6167520" cy="4869000"/>
+            <a:ext cx="6167160" cy="4868640"/>
           </a:xfrm>
           <a:prstGeom prst="rect">
             <a:avLst/>
@@ -2212,7 +3863,7 @@
       </p:sp>
       <p:sp>
         <p:nvSpPr>
-          <p:cNvPr id="13" name="PlaceHolder 3"/>
+          <p:cNvPr id="31" name="PlaceHolder 3"/>
           <p:cNvSpPr>
             <a:spLocks noGrp="1"/>
           </p:cNvSpPr>
@@ -2223,7 +3874,7 @@
         <p:spPr>
           <a:xfrm>
             <a:off x="839880" y="2057400"/>
-            <a:ext cx="3927600" cy="3807000"/>
+            <a:ext cx="3927240" cy="3806640"/>
           </a:xfrm>
           <a:prstGeom prst="rect">
             <a:avLst/>
@@ -2274,18 +3925,18 @@
       </p:sp>
       <p:sp>
         <p:nvSpPr>
-          <p:cNvPr id="14" name="PlaceHolder 4"/>
+          <p:cNvPr id="32" name="PlaceHolder 4"/>
           <p:cNvSpPr>
             <a:spLocks noGrp="1"/>
           </p:cNvSpPr>
           <p:nvPr>
-            <p:ph type="dt" idx="7"/>
+            <p:ph type="dt" idx="16"/>
           </p:nvPr>
         </p:nvSpPr>
         <p:spPr>
           <a:xfrm>
             <a:off x="838080" y="6356520"/>
-            <a:ext cx="2738520" cy="360360"/>
+            <a:ext cx="2738160" cy="360000"/>
           </a:xfrm>
           <a:prstGeom prst="rect">
             <a:avLst/>
@@ -2341,7 +3992,7 @@
                 <a:uFillTx/>
                 <a:latin typeface="Calibri"/>
               </a:rPr>
-              <a:t> </a:t>
+              <a:t>&lt;date/time&gt;</a:t>
             </a:r>
             <a:endParaRPr b="0" lang="en-US" sz="1200" strike="noStrike" u="none">
               <a:solidFill>
@@ -2356,18 +4007,18 @@
       </p:sp>
       <p:sp>
         <p:nvSpPr>
-          <p:cNvPr id="15" name="PlaceHolder 5"/>
+          <p:cNvPr id="33" name="PlaceHolder 5"/>
           <p:cNvSpPr>
             <a:spLocks noGrp="1"/>
           </p:cNvSpPr>
           <p:nvPr>
-            <p:ph type="ftr" idx="8"/>
+            <p:ph type="ftr" idx="17"/>
           </p:nvPr>
         </p:nvSpPr>
         <p:spPr>
           <a:xfrm>
             <a:off x="4038480" y="6356520"/>
-            <a:ext cx="4110120" cy="360360"/>
+            <a:ext cx="4109760" cy="360000"/>
           </a:xfrm>
           <a:prstGeom prst="rect">
             <a:avLst/>
@@ -2419,7 +4070,7 @@
                 <a:uFillTx/>
                 <a:latin typeface="Times New Roman"/>
               </a:rPr>
-              <a:t> </a:t>
+              <a:t>&lt;footer&gt;</a:t>
             </a:r>
             <a:endParaRPr b="0" lang="en-US" sz="1400" strike="noStrike" u="none">
               <a:solidFill>
@@ -2434,18 +4085,18 @@
       </p:sp>
       <p:sp>
         <p:nvSpPr>
-          <p:cNvPr id="16" name="PlaceHolder 6"/>
+          <p:cNvPr id="34" name="PlaceHolder 6"/>
           <p:cNvSpPr>
             <a:spLocks noGrp="1"/>
           </p:cNvSpPr>
           <p:nvPr>
-            <p:ph type="sldNum" idx="9"/>
+            <p:ph type="sldNum" idx="18"/>
           </p:nvPr>
         </p:nvSpPr>
         <p:spPr>
           <a:xfrm>
             <a:off x="8610480" y="6356520"/>
-            <a:ext cx="2738520" cy="360360"/>
+            <a:ext cx="2738160" cy="360000"/>
           </a:xfrm>
           <a:prstGeom prst="rect">
             <a:avLst/>
@@ -2490,7 +4141,7 @@
                 <a:tab algn="l" pos="0"/>
               </a:tabLst>
             </a:pPr>
-            <a:fld id="{A844FE3C-4F5D-4733-ABDE-5A702C34BEBB}" type="slidenum">
+            <a:fld id="{8502B383-5E76-4A3B-BC19-F15B5010B7C7}" type="slidenum">
               <a:rPr b="0" lang="en-US" sz="1200" strike="noStrike" u="none">
                 <a:solidFill>
                   <a:schemeClr val="dk1">
@@ -2501,7 +4152,7 @@
                 <a:uFillTx/>
                 <a:latin typeface="Calibri"/>
               </a:rPr>
-              <a:t>13</a:t>
+              <a:t>&lt;number&gt;</a:t>
             </a:fld>
             <a:endParaRPr b="0" lang="en-US" sz="1200" strike="noStrike" u="none">
               <a:solidFill>
@@ -2519,7 +4170,7 @@
 </p:sldLayout>
 </file>
 
-<file path=ppt/slideLayouts/slideLayout4.xml><?xml version="1.0" encoding="utf-8"?>
+<file path=ppt/slideLayouts/slideLayout7.xml><?xml version="1.0" encoding="utf-8"?>
 <p:sldLayout xmlns:a="http://schemas.openxmlformats.org/drawingml/2006/main" xmlns:p="http://schemas.openxmlformats.org/presentationml/2006/main" xmlns:r="http://schemas.openxmlformats.org/officeDocument/2006/relationships" xmlns:p14="http://schemas.microsoft.com/office/powerpoint/2010/main" xmlns:p15="http://schemas.microsoft.com/office/powerpoint/2012/main" xmlns:mc="http://schemas.openxmlformats.org/markup-compatibility/2006" type="title" preserve="1">
   <p:cSld name="Title Slide">
     <p:bg>
@@ -2545,7 +4196,7 @@
       </p:grpSpPr>
       <p:sp>
         <p:nvSpPr>
-          <p:cNvPr id="17" name="PlaceHolder 1"/>
+          <p:cNvPr id="35" name="PlaceHolder 1"/>
           <p:cNvSpPr>
             <a:spLocks noGrp="1"/>
           </p:cNvSpPr>
@@ -2556,7 +4207,7 @@
         <p:spPr>
           <a:xfrm>
             <a:off x="1523880" y="1122480"/>
-            <a:ext cx="9139320" cy="2382840"/>
+            <a:ext cx="9138960" cy="2382480"/>
           </a:xfrm>
           <a:prstGeom prst="rect">
             <a:avLst/>
@@ -2604,18 +4255,18 @@
       </p:sp>
       <p:sp>
         <p:nvSpPr>
-          <p:cNvPr id="18" name="PlaceHolder 2"/>
+          <p:cNvPr id="36" name="PlaceHolder 2"/>
           <p:cNvSpPr>
             <a:spLocks noGrp="1"/>
           </p:cNvSpPr>
           <p:nvPr>
-            <p:ph type="dt" idx="10"/>
+            <p:ph type="dt" idx="19"/>
           </p:nvPr>
         </p:nvSpPr>
         <p:spPr>
           <a:xfrm>
             <a:off x="838080" y="6356520"/>
-            <a:ext cx="2738520" cy="360360"/>
+            <a:ext cx="2738160" cy="360000"/>
           </a:xfrm>
           <a:prstGeom prst="rect">
             <a:avLst/>
@@ -2671,7 +4322,7 @@
                 <a:uFillTx/>
                 <a:latin typeface="Calibri"/>
               </a:rPr>
-              <a:t> </a:t>
+              <a:t>&lt;date/time&gt;</a:t>
             </a:r>
             <a:endParaRPr b="0" lang="en-US" sz="1200" strike="noStrike" u="none">
               <a:solidFill>
@@ -2686,18 +4337,18 @@
       </p:sp>
       <p:sp>
         <p:nvSpPr>
-          <p:cNvPr id="19" name="PlaceHolder 3"/>
+          <p:cNvPr id="37" name="PlaceHolder 3"/>
           <p:cNvSpPr>
             <a:spLocks noGrp="1"/>
           </p:cNvSpPr>
           <p:nvPr>
-            <p:ph type="ftr" idx="11"/>
+            <p:ph type="ftr" idx="20"/>
           </p:nvPr>
         </p:nvSpPr>
         <p:spPr>
           <a:xfrm>
             <a:off x="4038480" y="6356520"/>
-            <a:ext cx="4110120" cy="360360"/>
+            <a:ext cx="4109760" cy="360000"/>
           </a:xfrm>
           <a:prstGeom prst="rect">
             <a:avLst/>
@@ -2749,7 +4400,7 @@
                 <a:uFillTx/>
                 <a:latin typeface="Times New Roman"/>
               </a:rPr>
-              <a:t> </a:t>
+              <a:t>&lt;footer&gt;</a:t>
             </a:r>
             <a:endParaRPr b="0" lang="en-US" sz="1400" strike="noStrike" u="none">
               <a:solidFill>
@@ -2764,18 +4415,18 @@
       </p:sp>
       <p:sp>
         <p:nvSpPr>
-          <p:cNvPr id="20" name="PlaceHolder 4"/>
+          <p:cNvPr id="38" name="PlaceHolder 4"/>
           <p:cNvSpPr>
             <a:spLocks noGrp="1"/>
           </p:cNvSpPr>
           <p:nvPr>
-            <p:ph type="sldNum" idx="12"/>
+            <p:ph type="sldNum" idx="21"/>
           </p:nvPr>
         </p:nvSpPr>
         <p:spPr>
           <a:xfrm>
             <a:off x="8610480" y="6356520"/>
-            <a:ext cx="2738520" cy="360360"/>
+            <a:ext cx="2738160" cy="360000"/>
           </a:xfrm>
           <a:prstGeom prst="rect">
             <a:avLst/>
@@ -2820,7 +4471,7 @@
                 <a:tab algn="l" pos="0"/>
               </a:tabLst>
             </a:pPr>
-            <a:fld id="{2EFCDB78-F17D-4254-822C-5F5CE05FF797}" type="slidenum">
+            <a:fld id="{049BF9F5-F2C0-4D5B-A12A-7F674F037991}" type="slidenum">
               <a:rPr b="0" lang="en-US" sz="1200" strike="noStrike" u="none">
                 <a:solidFill>
                   <a:schemeClr val="dk1">
@@ -2831,7 +4482,7 @@
                 <a:uFillTx/>
                 <a:latin typeface="Calibri"/>
               </a:rPr>
-              <a:t>13</a:t>
+              <a:t>&lt;number&gt;</a:t>
             </a:fld>
             <a:endParaRPr b="0" lang="en-US" sz="1200" strike="noStrike" u="none">
               <a:solidFill>
@@ -2846,7 +4497,7 @@
       </p:sp>
       <p:sp>
         <p:nvSpPr>
-          <p:cNvPr id="21" name="PlaceHolder 5"/>
+          <p:cNvPr id="39" name="PlaceHolder 5"/>
           <p:cNvSpPr>
             <a:spLocks noGrp="1"/>
           </p:cNvSpPr>
@@ -2857,7 +4508,7 @@
         <p:spPr>
           <a:xfrm>
             <a:off x="609480" y="1604520"/>
-            <a:ext cx="10968120" cy="3972960"/>
+            <a:ext cx="10967760" cy="3972600"/>
           </a:xfrm>
           <a:prstGeom prst="rect">
             <a:avLst/>
@@ -3123,7 +4774,7 @@
 </p:sldLayout>
 </file>
 
-<file path=ppt/slideLayouts/slideLayout5.xml><?xml version="1.0" encoding="utf-8"?>
+<file path=ppt/slideLayouts/slideLayout8.xml><?xml version="1.0" encoding="utf-8"?>
 <p:sldLayout xmlns:a="http://schemas.openxmlformats.org/drawingml/2006/main" xmlns:p="http://schemas.openxmlformats.org/presentationml/2006/main" xmlns:r="http://schemas.openxmlformats.org/officeDocument/2006/relationships" xmlns:p14="http://schemas.microsoft.com/office/powerpoint/2010/main" xmlns:p15="http://schemas.microsoft.com/office/powerpoint/2012/main" xmlns:mc="http://schemas.openxmlformats.org/markup-compatibility/2006" type="vertTx" preserve="1">
   <p:cSld name="Title and Vertical Text">
     <p:bg>
@@ -3149,7 +4800,7 @@
       </p:grpSpPr>
       <p:sp>
         <p:nvSpPr>
-          <p:cNvPr id="22" name="PlaceHolder 1"/>
+          <p:cNvPr id="40" name="PlaceHolder 1"/>
           <p:cNvSpPr>
             <a:spLocks noGrp="1"/>
           </p:cNvSpPr>
@@ -3160,7 +4811,7 @@
         <p:spPr>
           <a:xfrm>
             <a:off x="838080" y="365040"/>
-            <a:ext cx="10510920" cy="1320840"/>
+            <a:ext cx="10510560" cy="1320480"/>
           </a:xfrm>
           <a:prstGeom prst="rect">
             <a:avLst/>
@@ -3208,7 +4859,7 @@
       </p:sp>
       <p:sp>
         <p:nvSpPr>
-          <p:cNvPr id="23" name="PlaceHolder 2"/>
+          <p:cNvPr id="41" name="PlaceHolder 2"/>
           <p:cNvSpPr>
             <a:spLocks noGrp="1"/>
           </p:cNvSpPr>
@@ -3219,7 +4870,7 @@
         <p:spPr>
           <a:xfrm>
             <a:off x="838080" y="1825560"/>
-            <a:ext cx="10510920" cy="4346640"/>
+            <a:ext cx="10510560" cy="4346280"/>
           </a:xfrm>
           <a:prstGeom prst="rect">
             <a:avLst/>
@@ -3407,18 +5058,18 @@
       </p:sp>
       <p:sp>
         <p:nvSpPr>
-          <p:cNvPr id="24" name="PlaceHolder 3"/>
+          <p:cNvPr id="42" name="PlaceHolder 3"/>
           <p:cNvSpPr>
             <a:spLocks noGrp="1"/>
           </p:cNvSpPr>
           <p:nvPr>
-            <p:ph type="dt" idx="13"/>
+            <p:ph type="dt" idx="22"/>
           </p:nvPr>
         </p:nvSpPr>
         <p:spPr>
           <a:xfrm>
             <a:off x="838080" y="6356520"/>
-            <a:ext cx="2738520" cy="360360"/>
+            <a:ext cx="2738160" cy="360000"/>
           </a:xfrm>
           <a:prstGeom prst="rect">
             <a:avLst/>
@@ -3489,18 +5140,18 @@
       </p:sp>
       <p:sp>
         <p:nvSpPr>
-          <p:cNvPr id="25" name="PlaceHolder 4"/>
+          <p:cNvPr id="43" name="PlaceHolder 4"/>
           <p:cNvSpPr>
             <a:spLocks noGrp="1"/>
           </p:cNvSpPr>
           <p:nvPr>
-            <p:ph type="ftr" idx="14"/>
+            <p:ph type="ftr" idx="23"/>
           </p:nvPr>
         </p:nvSpPr>
         <p:spPr>
           <a:xfrm>
             <a:off x="4038480" y="6356520"/>
-            <a:ext cx="4110120" cy="360360"/>
+            <a:ext cx="4109760" cy="360000"/>
           </a:xfrm>
           <a:prstGeom prst="rect">
             <a:avLst/>
@@ -3567,18 +5218,18 @@
       </p:sp>
       <p:sp>
         <p:nvSpPr>
-          <p:cNvPr id="26" name="PlaceHolder 5"/>
+          <p:cNvPr id="44" name="PlaceHolder 5"/>
           <p:cNvSpPr>
             <a:spLocks noGrp="1"/>
           </p:cNvSpPr>
           <p:nvPr>
-            <p:ph type="sldNum" idx="15"/>
+            <p:ph type="sldNum" idx="24"/>
           </p:nvPr>
         </p:nvSpPr>
         <p:spPr>
           <a:xfrm>
             <a:off x="8610480" y="6356520"/>
-            <a:ext cx="2738520" cy="360360"/>
+            <a:ext cx="2738160" cy="360000"/>
           </a:xfrm>
           <a:prstGeom prst="rect">
             <a:avLst/>
@@ -3623,7 +5274,7 @@
                 <a:tab algn="l" pos="0"/>
               </a:tabLst>
             </a:pPr>
-            <a:fld id="{8E1014AB-3FF9-4F87-A669-D41B85C2EC07}" type="slidenum">
+            <a:fld id="{500A5637-B837-49F6-B932-9704DBD2BDC0}" type="slidenum">
               <a:rPr b="0" lang="en-US" sz="1200" strike="noStrike" u="none">
                 <a:solidFill>
                   <a:schemeClr val="dk1">
@@ -3652,7 +5303,7 @@
 </p:sldLayout>
 </file>
 
-<file path=ppt/slideLayouts/slideLayout6.xml><?xml version="1.0" encoding="utf-8"?>
+<file path=ppt/slideLayouts/slideLayout9.xml><?xml version="1.0" encoding="utf-8"?>
 <p:sldLayout xmlns:a="http://schemas.openxmlformats.org/drawingml/2006/main" xmlns:p="http://schemas.openxmlformats.org/presentationml/2006/main" xmlns:r="http://schemas.openxmlformats.org/officeDocument/2006/relationships" xmlns:p14="http://schemas.microsoft.com/office/powerpoint/2010/main" xmlns:p15="http://schemas.microsoft.com/office/powerpoint/2012/main" xmlns:mc="http://schemas.openxmlformats.org/markup-compatibility/2006" type="vertTitleAndTx" preserve="1">
   <p:cSld name="Vertical Title and Text">
     <p:bg>
@@ -3678,7 +5329,7 @@
       </p:grpSpPr>
       <p:sp>
         <p:nvSpPr>
-          <p:cNvPr id="27" name="PlaceHolder 1"/>
+          <p:cNvPr id="45" name="PlaceHolder 1"/>
           <p:cNvSpPr>
             <a:spLocks noGrp="1"/>
           </p:cNvSpPr>
@@ -3689,7 +5340,7 @@
         <p:spPr>
           <a:xfrm>
             <a:off x="8724960" y="365040"/>
-            <a:ext cx="2624400" cy="5807160"/>
+            <a:ext cx="2624040" cy="5806800"/>
           </a:xfrm>
           <a:prstGeom prst="rect">
             <a:avLst/>
@@ -3737,7 +5388,7 @@
       </p:sp>
       <p:sp>
         <p:nvSpPr>
-          <p:cNvPr id="28" name="PlaceHolder 2"/>
+          <p:cNvPr id="46" name="PlaceHolder 2"/>
           <p:cNvSpPr>
             <a:spLocks noGrp="1"/>
           </p:cNvSpPr>
@@ -3748,7 +5399,7 @@
         <p:spPr>
           <a:xfrm>
             <a:off x="838080" y="365040"/>
-            <a:ext cx="7729560" cy="5807160"/>
+            <a:ext cx="7729200" cy="5806800"/>
           </a:xfrm>
           <a:prstGeom prst="rect">
             <a:avLst/>
@@ -3936,18 +5587,18 @@
       </p:sp>
       <p:sp>
         <p:nvSpPr>
-          <p:cNvPr id="29" name="PlaceHolder 3"/>
+          <p:cNvPr id="47" name="PlaceHolder 3"/>
           <p:cNvSpPr>
             <a:spLocks noGrp="1"/>
           </p:cNvSpPr>
           <p:nvPr>
-            <p:ph type="dt" idx="16"/>
+            <p:ph type="dt" idx="25"/>
           </p:nvPr>
         </p:nvSpPr>
         <p:spPr>
           <a:xfrm>
             <a:off x="838080" y="6356520"/>
-            <a:ext cx="2738520" cy="360360"/>
+            <a:ext cx="2738160" cy="360000"/>
           </a:xfrm>
           <a:prstGeom prst="rect">
             <a:avLst/>
@@ -4018,18 +5669,18 @@
       </p:sp>
       <p:sp>
         <p:nvSpPr>
-          <p:cNvPr id="30" name="PlaceHolder 4"/>
+          <p:cNvPr id="48" name="PlaceHolder 4"/>
           <p:cNvSpPr>
             <a:spLocks noGrp="1"/>
           </p:cNvSpPr>
           <p:nvPr>
-            <p:ph type="ftr" idx="17"/>
+            <p:ph type="ftr" idx="26"/>
           </p:nvPr>
         </p:nvSpPr>
         <p:spPr>
           <a:xfrm>
             <a:off x="4038480" y="6356520"/>
-            <a:ext cx="4110120" cy="360360"/>
+            <a:ext cx="4109760" cy="360000"/>
           </a:xfrm>
           <a:prstGeom prst="rect">
             <a:avLst/>
@@ -4096,18 +5747,18 @@
       </p:sp>
       <p:sp>
         <p:nvSpPr>
-          <p:cNvPr id="31" name="PlaceHolder 5"/>
+          <p:cNvPr id="49" name="PlaceHolder 5"/>
           <p:cNvSpPr>
             <a:spLocks noGrp="1"/>
           </p:cNvSpPr>
           <p:nvPr>
-            <p:ph type="sldNum" idx="18"/>
+            <p:ph type="sldNum" idx="27"/>
           </p:nvPr>
         </p:nvSpPr>
         <p:spPr>
           <a:xfrm>
             <a:off x="8610480" y="6356520"/>
-            <a:ext cx="2738520" cy="360360"/>
+            <a:ext cx="2738160" cy="360000"/>
           </a:xfrm>
           <a:prstGeom prst="rect">
             <a:avLst/>
@@ -4152,1658 +5803,7 @@
                 <a:tab algn="l" pos="0"/>
               </a:tabLst>
             </a:pPr>
-            <a:fld id="{C2D0FF09-645A-452A-986D-2470CD185441}" type="slidenum">
-              <a:rPr b="0" lang="en-US" sz="1200" strike="noStrike" u="none">
-                <a:solidFill>
-                  <a:schemeClr val="dk1">
-                    <a:tint val="75000"/>
-                  </a:schemeClr>
-                </a:solidFill>
-                <a:effectLst/>
-                <a:uFillTx/>
-                <a:latin typeface="Calibri"/>
-              </a:rPr>
-              <a:t>&lt;number&gt;</a:t>
-            </a:fld>
-            <a:endParaRPr b="0" lang="en-US" sz="1200" strike="noStrike" u="none">
-              <a:solidFill>
-                <a:srgbClr val="000000"/>
-              </a:solidFill>
-              <a:effectLst/>
-              <a:uFillTx/>
-              <a:latin typeface="Times New Roman"/>
-            </a:endParaRPr>
-          </a:p>
-        </p:txBody>
-      </p:sp>
-    </p:spTree>
-  </p:cSld>
-</p:sldLayout>
-</file>
-
-<file path=ppt/slideLayouts/slideLayout7.xml><?xml version="1.0" encoding="utf-8"?>
-<p:sldLayout xmlns:a="http://schemas.openxmlformats.org/drawingml/2006/main" xmlns:p="http://schemas.openxmlformats.org/presentationml/2006/main" xmlns:r="http://schemas.openxmlformats.org/officeDocument/2006/relationships" xmlns:p14="http://schemas.microsoft.com/office/powerpoint/2010/main" xmlns:p15="http://schemas.microsoft.com/office/powerpoint/2012/main" xmlns:mc="http://schemas.openxmlformats.org/markup-compatibility/2006" type="obj" preserve="1">
-  <p:cSld name="Title and Content">
-    <p:bg>
-      <p:bgPr>
-        <a:solidFill>
-          <a:srgbClr val="ffffff"/>
-        </a:solidFill>
-      </p:bgPr>
-    </p:bg>
-    <p:spTree>
-      <p:nvGrpSpPr>
-        <p:cNvPr id="1" name=""/>
-        <p:cNvGrpSpPr/>
-        <p:nvPr/>
-      </p:nvGrpSpPr>
-      <p:grpSpPr>
-        <a:xfrm>
-          <a:off x="0" y="0"/>
-          <a:ext cx="0" cy="0"/>
-          <a:chOff x="0" y="0"/>
-          <a:chExt cx="0" cy="0"/>
-        </a:xfrm>
-      </p:grpSpPr>
-      <p:sp>
-        <p:nvSpPr>
-          <p:cNvPr id="32" name="PlaceHolder 1"/>
-          <p:cNvSpPr>
-            <a:spLocks noGrp="1"/>
-          </p:cNvSpPr>
-          <p:nvPr>
-            <p:ph type="title"/>
-          </p:nvPr>
-        </p:nvSpPr>
-        <p:spPr>
-          <a:xfrm>
-            <a:off x="838080" y="365040"/>
-            <a:ext cx="10510920" cy="1320840"/>
-          </a:xfrm>
-          <a:prstGeom prst="rect">
-            <a:avLst/>
-          </a:prstGeom>
-          <a:noFill/>
-          <a:ln w="0">
-            <a:noFill/>
-          </a:ln>
-        </p:spPr>
-        <p:txBody>
-          <a:bodyPr lIns="91440" rIns="91440" tIns="45720" bIns="45720" anchor="ctr">
-            <a:noAutofit/>
-          </a:bodyPr>
-          <a:p>
-            <a:pPr indent="0" defTabSz="914400">
-              <a:lnSpc>
-                <a:spcPct val="90000"/>
-              </a:lnSpc>
-              <a:buNone/>
-              <a:tabLst>
-                <a:tab algn="l" pos="0"/>
-              </a:tabLst>
-            </a:pPr>
-            <a:r>
-              <a:rPr b="0" lang="en-US" sz="4400" strike="noStrike" u="none">
-                <a:solidFill>
-                  <a:schemeClr val="dk1"/>
-                </a:solidFill>
-                <a:effectLst/>
-                <a:uFillTx/>
-                <a:latin typeface="Calibri Light"/>
-              </a:rPr>
-              <a:t>Click to edit Master title style</a:t>
-            </a:r>
-            <a:endParaRPr b="0" lang="en-US" sz="4400" strike="noStrike" u="none">
-              <a:solidFill>
-                <a:srgbClr val="000000"/>
-              </a:solidFill>
-              <a:effectLst/>
-              <a:uFillTx/>
-              <a:latin typeface="Arial"/>
-            </a:endParaRPr>
-          </a:p>
-        </p:txBody>
-      </p:sp>
-      <p:sp>
-        <p:nvSpPr>
-          <p:cNvPr id="33" name="PlaceHolder 2"/>
-          <p:cNvSpPr>
-            <a:spLocks noGrp="1"/>
-          </p:cNvSpPr>
-          <p:nvPr>
-            <p:ph type="body"/>
-          </p:nvPr>
-        </p:nvSpPr>
-        <p:spPr>
-          <a:xfrm>
-            <a:off x="838080" y="1825560"/>
-            <a:ext cx="10510920" cy="4346640"/>
-          </a:xfrm>
-          <a:prstGeom prst="rect">
-            <a:avLst/>
-          </a:prstGeom>
-          <a:noFill/>
-          <a:ln w="0">
-            <a:noFill/>
-          </a:ln>
-        </p:spPr>
-        <p:txBody>
-          <a:bodyPr lIns="91440" rIns="91440" tIns="45720" bIns="45720" anchor="t">
-            <a:noAutofit/>
-          </a:bodyPr>
-          <a:p>
-            <a:pPr marL="228600" indent="-228600" defTabSz="914400">
-              <a:lnSpc>
-                <a:spcPct val="90000"/>
-              </a:lnSpc>
-              <a:spcBef>
-                <a:spcPts val="1001"/>
-              </a:spcBef>
-              <a:buClr>
-                <a:srgbClr val="000000"/>
-              </a:buClr>
-              <a:buFont typeface="Arial"/>
-              <a:buChar char="•"/>
-            </a:pPr>
-            <a:r>
-              <a:rPr b="0" lang="en-US" sz="2800" strike="noStrike" u="none">
-                <a:solidFill>
-                  <a:schemeClr val="dk1"/>
-                </a:solidFill>
-                <a:effectLst/>
-                <a:uFillTx/>
-                <a:latin typeface="Calibri"/>
-              </a:rPr>
-              <a:t>Click to edit Master text styles</a:t>
-            </a:r>
-            <a:endParaRPr b="0" lang="en-US" sz="2800" strike="noStrike" u="none">
-              <a:solidFill>
-                <a:srgbClr val="000000"/>
-              </a:solidFill>
-              <a:effectLst/>
-              <a:uFillTx/>
-              <a:latin typeface="Arial"/>
-            </a:endParaRPr>
-          </a:p>
-          <a:p>
-            <a:pPr lvl="1" marL="685800" indent="-228600" defTabSz="914400">
-              <a:lnSpc>
-                <a:spcPct val="90000"/>
-              </a:lnSpc>
-              <a:spcBef>
-                <a:spcPts val="499"/>
-              </a:spcBef>
-              <a:buClr>
-                <a:srgbClr val="000000"/>
-              </a:buClr>
-              <a:buFont typeface="Arial"/>
-              <a:buChar char="•"/>
-            </a:pPr>
-            <a:r>
-              <a:rPr b="0" lang="en-US" sz="2400" strike="noStrike" u="none">
-                <a:solidFill>
-                  <a:schemeClr val="dk1"/>
-                </a:solidFill>
-                <a:effectLst/>
-                <a:uFillTx/>
-                <a:latin typeface="Calibri"/>
-              </a:rPr>
-              <a:t>Second level</a:t>
-            </a:r>
-            <a:endParaRPr b="0" lang="en-US" sz="2400" strike="noStrike" u="none">
-              <a:solidFill>
-                <a:srgbClr val="000000"/>
-              </a:solidFill>
-              <a:effectLst/>
-              <a:uFillTx/>
-              <a:latin typeface="Arial"/>
-            </a:endParaRPr>
-          </a:p>
-          <a:p>
-            <a:pPr lvl="2" marL="1143000" indent="-228600" defTabSz="914400">
-              <a:lnSpc>
-                <a:spcPct val="90000"/>
-              </a:lnSpc>
-              <a:spcBef>
-                <a:spcPts val="499"/>
-              </a:spcBef>
-              <a:buClr>
-                <a:srgbClr val="000000"/>
-              </a:buClr>
-              <a:buFont typeface="Arial"/>
-              <a:buChar char="•"/>
-            </a:pPr>
-            <a:r>
-              <a:rPr b="0" lang="en-US" sz="2000" strike="noStrike" u="none">
-                <a:solidFill>
-                  <a:schemeClr val="dk1"/>
-                </a:solidFill>
-                <a:effectLst/>
-                <a:uFillTx/>
-                <a:latin typeface="Calibri"/>
-              </a:rPr>
-              <a:t>Third level</a:t>
-            </a:r>
-            <a:endParaRPr b="0" lang="en-US" sz="2000" strike="noStrike" u="none">
-              <a:solidFill>
-                <a:srgbClr val="000000"/>
-              </a:solidFill>
-              <a:effectLst/>
-              <a:uFillTx/>
-              <a:latin typeface="Arial"/>
-            </a:endParaRPr>
-          </a:p>
-          <a:p>
-            <a:pPr lvl="3" marL="1600200" indent="-228600" defTabSz="914400">
-              <a:lnSpc>
-                <a:spcPct val="90000"/>
-              </a:lnSpc>
-              <a:spcBef>
-                <a:spcPts val="499"/>
-              </a:spcBef>
-              <a:buClr>
-                <a:srgbClr val="000000"/>
-              </a:buClr>
-              <a:buFont typeface="Arial"/>
-              <a:buChar char="•"/>
-            </a:pPr>
-            <a:r>
-              <a:rPr b="0" lang="en-US" sz="1800" strike="noStrike" u="none">
-                <a:solidFill>
-                  <a:schemeClr val="dk1"/>
-                </a:solidFill>
-                <a:effectLst/>
-                <a:uFillTx/>
-                <a:latin typeface="Calibri"/>
-              </a:rPr>
-              <a:t>Fourth level</a:t>
-            </a:r>
-            <a:endParaRPr b="0" lang="en-US" sz="1800" strike="noStrike" u="none">
-              <a:solidFill>
-                <a:srgbClr val="000000"/>
-              </a:solidFill>
-              <a:effectLst/>
-              <a:uFillTx/>
-              <a:latin typeface="Arial"/>
-            </a:endParaRPr>
-          </a:p>
-          <a:p>
-            <a:pPr lvl="4" marL="2057400" indent="-228600" defTabSz="914400">
-              <a:lnSpc>
-                <a:spcPct val="90000"/>
-              </a:lnSpc>
-              <a:spcBef>
-                <a:spcPts val="499"/>
-              </a:spcBef>
-              <a:buClr>
-                <a:srgbClr val="000000"/>
-              </a:buClr>
-              <a:buFont typeface="Arial"/>
-              <a:buChar char="•"/>
-            </a:pPr>
-            <a:r>
-              <a:rPr b="0" lang="en-US" sz="1800" strike="noStrike" u="none">
-                <a:solidFill>
-                  <a:schemeClr val="dk1"/>
-                </a:solidFill>
-                <a:effectLst/>
-                <a:uFillTx/>
-                <a:latin typeface="Calibri"/>
-              </a:rPr>
-              <a:t>Fifth level</a:t>
-            </a:r>
-            <a:endParaRPr b="0" lang="en-US" sz="1800" strike="noStrike" u="none">
-              <a:solidFill>
-                <a:srgbClr val="000000"/>
-              </a:solidFill>
-              <a:effectLst/>
-              <a:uFillTx/>
-              <a:latin typeface="Arial"/>
-            </a:endParaRPr>
-          </a:p>
-        </p:txBody>
-      </p:sp>
-      <p:sp>
-        <p:nvSpPr>
-          <p:cNvPr id="34" name="PlaceHolder 3"/>
-          <p:cNvSpPr>
-            <a:spLocks noGrp="1"/>
-          </p:cNvSpPr>
-          <p:nvPr>
-            <p:ph type="dt" idx="19"/>
-          </p:nvPr>
-        </p:nvSpPr>
-        <p:spPr>
-          <a:xfrm>
-            <a:off x="838080" y="6356520"/>
-            <a:ext cx="2738520" cy="360360"/>
-          </a:xfrm>
-          <a:prstGeom prst="rect">
-            <a:avLst/>
-          </a:prstGeom>
-          <a:noFill/>
-          <a:ln w="0">
-            <a:noFill/>
-          </a:ln>
-        </p:spPr>
-        <p:txBody>
-          <a:bodyPr lIns="91440" rIns="91440" tIns="45720" bIns="45720" anchor="ctr">
-            <a:noAutofit/>
-          </a:bodyPr>
-          <a:lstStyle>
-            <a:lvl1pPr indent="0" defTabSz="914400">
-              <a:lnSpc>
-                <a:spcPct val="100000"/>
-              </a:lnSpc>
-              <a:buNone/>
-              <a:tabLst>
-                <a:tab algn="l" pos="0"/>
-              </a:tabLst>
-              <a:defRPr b="0" lang="en-US" sz="1200" strike="noStrike" u="none">
-                <a:solidFill>
-                  <a:schemeClr val="dk1">
-                    <a:tint val="75000"/>
-                  </a:schemeClr>
-                </a:solidFill>
-                <a:effectLst/>
-                <a:uFillTx/>
-                <a:latin typeface="Calibri"/>
-              </a:defRPr>
-            </a:lvl1pPr>
-          </a:lstStyle>
-          <a:p>
-            <a:pPr indent="0" defTabSz="914400">
-              <a:lnSpc>
-                <a:spcPct val="100000"/>
-              </a:lnSpc>
-              <a:buNone/>
-              <a:tabLst>
-                <a:tab algn="l" pos="0"/>
-              </a:tabLst>
-            </a:pPr>
-            <a:r>
-              <a:rPr b="0" lang="en-US" sz="1200" strike="noStrike" u="none">
-                <a:solidFill>
-                  <a:schemeClr val="dk1">
-                    <a:tint val="75000"/>
-                  </a:schemeClr>
-                </a:solidFill>
-                <a:effectLst/>
-                <a:uFillTx/>
-                <a:latin typeface="Calibri"/>
-              </a:rPr>
-              <a:t>&lt;date/time&gt;</a:t>
-            </a:r>
-            <a:endParaRPr b="0" lang="en-US" sz="1200" strike="noStrike" u="none">
-              <a:solidFill>
-                <a:srgbClr val="000000"/>
-              </a:solidFill>
-              <a:effectLst/>
-              <a:uFillTx/>
-              <a:latin typeface="Times New Roman"/>
-            </a:endParaRPr>
-          </a:p>
-        </p:txBody>
-      </p:sp>
-      <p:sp>
-        <p:nvSpPr>
-          <p:cNvPr id="35" name="PlaceHolder 4"/>
-          <p:cNvSpPr>
-            <a:spLocks noGrp="1"/>
-          </p:cNvSpPr>
-          <p:nvPr>
-            <p:ph type="ftr" idx="20"/>
-          </p:nvPr>
-        </p:nvSpPr>
-        <p:spPr>
-          <a:xfrm>
-            <a:off x="4038480" y="6356520"/>
-            <a:ext cx="4110120" cy="360360"/>
-          </a:xfrm>
-          <a:prstGeom prst="rect">
-            <a:avLst/>
-          </a:prstGeom>
-          <a:noFill/>
-          <a:ln w="0">
-            <a:noFill/>
-          </a:ln>
-        </p:spPr>
-        <p:txBody>
-          <a:bodyPr lIns="91440" rIns="91440" tIns="45720" bIns="45720" anchor="ctr">
-            <a:noAutofit/>
-          </a:bodyPr>
-          <a:lstStyle>
-            <a:lvl1pPr indent="0" algn="ctr">
-              <a:lnSpc>
-                <a:spcPct val="100000"/>
-              </a:lnSpc>
-              <a:buNone/>
-              <a:tabLst>
-                <a:tab algn="l" pos="0"/>
-              </a:tabLst>
-              <a:defRPr b="0" lang="en-US" sz="1400" strike="noStrike" u="none">
-                <a:solidFill>
-                  <a:srgbClr val="000000"/>
-                </a:solidFill>
-                <a:effectLst/>
-                <a:uFillTx/>
-                <a:latin typeface="Times New Roman"/>
-              </a:defRPr>
-            </a:lvl1pPr>
-          </a:lstStyle>
-          <a:p>
-            <a:pPr indent="0" algn="ctr">
-              <a:lnSpc>
-                <a:spcPct val="100000"/>
-              </a:lnSpc>
-              <a:buNone/>
-              <a:tabLst>
-                <a:tab algn="l" pos="0"/>
-              </a:tabLst>
-            </a:pPr>
-            <a:r>
-              <a:rPr b="0" lang="en-US" sz="1400" strike="noStrike" u="none">
-                <a:solidFill>
-                  <a:srgbClr val="000000"/>
-                </a:solidFill>
-                <a:effectLst/>
-                <a:uFillTx/>
-                <a:latin typeface="Times New Roman"/>
-              </a:rPr>
-              <a:t>&lt;footer&gt;</a:t>
-            </a:r>
-            <a:endParaRPr b="0" lang="en-US" sz="1400" strike="noStrike" u="none">
-              <a:solidFill>
-                <a:srgbClr val="000000"/>
-              </a:solidFill>
-              <a:effectLst/>
-              <a:uFillTx/>
-              <a:latin typeface="Times New Roman"/>
-            </a:endParaRPr>
-          </a:p>
-        </p:txBody>
-      </p:sp>
-      <p:sp>
-        <p:nvSpPr>
-          <p:cNvPr id="36" name="PlaceHolder 5"/>
-          <p:cNvSpPr>
-            <a:spLocks noGrp="1"/>
-          </p:cNvSpPr>
-          <p:nvPr>
-            <p:ph type="sldNum" idx="21"/>
-          </p:nvPr>
-        </p:nvSpPr>
-        <p:spPr>
-          <a:xfrm>
-            <a:off x="8610480" y="6356520"/>
-            <a:ext cx="2738520" cy="360360"/>
-          </a:xfrm>
-          <a:prstGeom prst="rect">
-            <a:avLst/>
-          </a:prstGeom>
-          <a:noFill/>
-          <a:ln w="0">
-            <a:noFill/>
-          </a:ln>
-        </p:spPr>
-        <p:txBody>
-          <a:bodyPr lIns="91440" rIns="91440" tIns="45720" bIns="45720" anchor="ctr">
-            <a:noAutofit/>
-          </a:bodyPr>
-          <a:lstStyle>
-            <a:lvl1pPr indent="0" algn="r" defTabSz="914400">
-              <a:lnSpc>
-                <a:spcPct val="100000"/>
-              </a:lnSpc>
-              <a:buNone/>
-              <a:tabLst>
-                <a:tab algn="l" pos="0"/>
-              </a:tabLst>
-              <a:defRPr b="0" lang="en-US" sz="1200" strike="noStrike" u="none">
-                <a:solidFill>
-                  <a:schemeClr val="dk1">
-                    <a:tint val="75000"/>
-                  </a:schemeClr>
-                </a:solidFill>
-                <a:effectLst/>
-                <a:uFillTx/>
-                <a:latin typeface="Calibri"/>
-              </a:defRPr>
-            </a:lvl1pPr>
-          </a:lstStyle>
-          <a:p>
-            <a:pPr indent="0" algn="r" defTabSz="914400">
-              <a:lnSpc>
-                <a:spcPct val="100000"/>
-              </a:lnSpc>
-              <a:buNone/>
-              <a:tabLst>
-                <a:tab algn="l" pos="0"/>
-              </a:tabLst>
-            </a:pPr>
-            <a:fld id="{97EE1AA2-65F3-45E6-80C1-22AC51C7FFCE}" type="slidenum">
-              <a:rPr b="0" lang="en-US" sz="1200" strike="noStrike" u="none">
-                <a:solidFill>
-                  <a:schemeClr val="dk1">
-                    <a:tint val="75000"/>
-                  </a:schemeClr>
-                </a:solidFill>
-                <a:effectLst/>
-                <a:uFillTx/>
-                <a:latin typeface="Calibri"/>
-              </a:rPr>
-              <a:t>&lt;number&gt;</a:t>
-            </a:fld>
-            <a:endParaRPr b="0" lang="en-US" sz="1200" strike="noStrike" u="none">
-              <a:solidFill>
-                <a:srgbClr val="000000"/>
-              </a:solidFill>
-              <a:effectLst/>
-              <a:uFillTx/>
-              <a:latin typeface="Times New Roman"/>
-            </a:endParaRPr>
-          </a:p>
-        </p:txBody>
-      </p:sp>
-    </p:spTree>
-  </p:cSld>
-</p:sldLayout>
-</file>
-
-<file path=ppt/slideLayouts/slideLayout8.xml><?xml version="1.0" encoding="utf-8"?>
-<p:sldLayout xmlns:a="http://schemas.openxmlformats.org/drawingml/2006/main" xmlns:p="http://schemas.openxmlformats.org/presentationml/2006/main" xmlns:r="http://schemas.openxmlformats.org/officeDocument/2006/relationships" xmlns:p14="http://schemas.microsoft.com/office/powerpoint/2010/main" xmlns:p15="http://schemas.microsoft.com/office/powerpoint/2012/main" xmlns:mc="http://schemas.openxmlformats.org/markup-compatibility/2006" type="blank" preserve="1">
-  <p:cSld name="Section Header">
-    <p:bg>
-      <p:bgPr>
-        <a:solidFill>
-          <a:srgbClr val="ffffff"/>
-        </a:solidFill>
-      </p:bgPr>
-    </p:bg>
-    <p:spTree>
-      <p:nvGrpSpPr>
-        <p:cNvPr id="1" name=""/>
-        <p:cNvGrpSpPr/>
-        <p:nvPr/>
-      </p:nvGrpSpPr>
-      <p:grpSpPr>
-        <a:xfrm>
-          <a:off x="0" y="0"/>
-          <a:ext cx="0" cy="0"/>
-          <a:chOff x="0" y="0"/>
-          <a:chExt cx="0" cy="0"/>
-        </a:xfrm>
-      </p:grpSpPr>
-      <p:sp>
-        <p:nvSpPr>
-          <p:cNvPr id="37" name="PlaceHolder 1"/>
-          <p:cNvSpPr>
-            <a:spLocks noGrp="1"/>
-          </p:cNvSpPr>
-          <p:nvPr>
-            <p:ph type="title"/>
-          </p:nvPr>
-        </p:nvSpPr>
-        <p:spPr>
-          <a:xfrm>
-            <a:off x="831960" y="1709640"/>
-            <a:ext cx="10510920" cy="2847960"/>
-          </a:xfrm>
-          <a:prstGeom prst="rect">
-            <a:avLst/>
-          </a:prstGeom>
-          <a:noFill/>
-          <a:ln w="0">
-            <a:noFill/>
-          </a:ln>
-        </p:spPr>
-        <p:txBody>
-          <a:bodyPr lIns="91440" rIns="91440" tIns="45720" bIns="45720" anchor="b">
-            <a:noAutofit/>
-          </a:bodyPr>
-          <a:p>
-            <a:pPr indent="0" defTabSz="914400">
-              <a:lnSpc>
-                <a:spcPct val="90000"/>
-              </a:lnSpc>
-              <a:buNone/>
-              <a:tabLst>
-                <a:tab algn="l" pos="0"/>
-              </a:tabLst>
-            </a:pPr>
-            <a:r>
-              <a:rPr b="0" lang="en-US" sz="6000" strike="noStrike" u="none">
-                <a:solidFill>
-                  <a:schemeClr val="dk1"/>
-                </a:solidFill>
-                <a:effectLst/>
-                <a:uFillTx/>
-                <a:latin typeface="Calibri Light"/>
-              </a:rPr>
-              <a:t>Click to edit Master title style</a:t>
-            </a:r>
-            <a:endParaRPr b="0" lang="en-US" sz="6000" strike="noStrike" u="none">
-              <a:solidFill>
-                <a:srgbClr val="000000"/>
-              </a:solidFill>
-              <a:effectLst/>
-              <a:uFillTx/>
-              <a:latin typeface="Arial"/>
-            </a:endParaRPr>
-          </a:p>
-        </p:txBody>
-      </p:sp>
-      <p:sp>
-        <p:nvSpPr>
-          <p:cNvPr id="38" name="PlaceHolder 2"/>
-          <p:cNvSpPr>
-            <a:spLocks noGrp="1"/>
-          </p:cNvSpPr>
-          <p:nvPr>
-            <p:ph type="body"/>
-          </p:nvPr>
-        </p:nvSpPr>
-        <p:spPr>
-          <a:xfrm>
-            <a:off x="831960" y="4589640"/>
-            <a:ext cx="10510920" cy="1495440"/>
-          </a:xfrm>
-          <a:prstGeom prst="rect">
-            <a:avLst/>
-          </a:prstGeom>
-          <a:noFill/>
-          <a:ln w="0">
-            <a:noFill/>
-          </a:ln>
-        </p:spPr>
-        <p:txBody>
-          <a:bodyPr lIns="91440" rIns="91440" tIns="45720" bIns="45720" anchor="t">
-            <a:noAutofit/>
-          </a:bodyPr>
-          <a:p>
-            <a:pPr indent="0" defTabSz="914400">
-              <a:lnSpc>
-                <a:spcPct val="90000"/>
-              </a:lnSpc>
-              <a:spcBef>
-                <a:spcPts val="1001"/>
-              </a:spcBef>
-              <a:buNone/>
-              <a:tabLst>
-                <a:tab algn="l" pos="0"/>
-              </a:tabLst>
-            </a:pPr>
-            <a:r>
-              <a:rPr b="0" lang="en-US" sz="2400" strike="noStrike" u="none">
-                <a:solidFill>
-                  <a:schemeClr val="dk1">
-                    <a:tint val="75000"/>
-                  </a:schemeClr>
-                </a:solidFill>
-                <a:effectLst/>
-                <a:uFillTx/>
-                <a:latin typeface="Calibri"/>
-              </a:rPr>
-              <a:t>Click to edit Master text styles</a:t>
-            </a:r>
-            <a:endParaRPr b="0" lang="en-US" sz="2400" strike="noStrike" u="none">
-              <a:solidFill>
-                <a:srgbClr val="000000"/>
-              </a:solidFill>
-              <a:effectLst/>
-              <a:uFillTx/>
-              <a:latin typeface="Arial"/>
-            </a:endParaRPr>
-          </a:p>
-        </p:txBody>
-      </p:sp>
-      <p:sp>
-        <p:nvSpPr>
-          <p:cNvPr id="39" name="PlaceHolder 3"/>
-          <p:cNvSpPr>
-            <a:spLocks noGrp="1"/>
-          </p:cNvSpPr>
-          <p:nvPr>
-            <p:ph type="dt" idx="22"/>
-          </p:nvPr>
-        </p:nvSpPr>
-        <p:spPr>
-          <a:xfrm>
-            <a:off x="838080" y="6356520"/>
-            <a:ext cx="2738520" cy="360360"/>
-          </a:xfrm>
-          <a:prstGeom prst="rect">
-            <a:avLst/>
-          </a:prstGeom>
-          <a:noFill/>
-          <a:ln w="0">
-            <a:noFill/>
-          </a:ln>
-        </p:spPr>
-        <p:txBody>
-          <a:bodyPr lIns="91440" rIns="91440" tIns="45720" bIns="45720" anchor="ctr">
-            <a:noAutofit/>
-          </a:bodyPr>
-          <a:lstStyle>
-            <a:lvl1pPr indent="0" defTabSz="914400">
-              <a:lnSpc>
-                <a:spcPct val="100000"/>
-              </a:lnSpc>
-              <a:buNone/>
-              <a:tabLst>
-                <a:tab algn="l" pos="0"/>
-              </a:tabLst>
-              <a:defRPr b="0" lang="en-US" sz="1200" strike="noStrike" u="none">
-                <a:solidFill>
-                  <a:schemeClr val="dk1">
-                    <a:tint val="75000"/>
-                  </a:schemeClr>
-                </a:solidFill>
-                <a:effectLst/>
-                <a:uFillTx/>
-                <a:latin typeface="Calibri"/>
-              </a:defRPr>
-            </a:lvl1pPr>
-          </a:lstStyle>
-          <a:p>
-            <a:pPr indent="0" defTabSz="914400">
-              <a:lnSpc>
-                <a:spcPct val="100000"/>
-              </a:lnSpc>
-              <a:buNone/>
-              <a:tabLst>
-                <a:tab algn="l" pos="0"/>
-              </a:tabLst>
-            </a:pPr>
-            <a:r>
-              <a:rPr b="0" lang="en-US" sz="1200" strike="noStrike" u="none">
-                <a:solidFill>
-                  <a:schemeClr val="dk1">
-                    <a:tint val="75000"/>
-                  </a:schemeClr>
-                </a:solidFill>
-                <a:effectLst/>
-                <a:uFillTx/>
-                <a:latin typeface="Calibri"/>
-              </a:rPr>
-              <a:t>&lt;date/time&gt;</a:t>
-            </a:r>
-            <a:endParaRPr b="0" lang="en-US" sz="1200" strike="noStrike" u="none">
-              <a:solidFill>
-                <a:srgbClr val="000000"/>
-              </a:solidFill>
-              <a:effectLst/>
-              <a:uFillTx/>
-              <a:latin typeface="Times New Roman"/>
-            </a:endParaRPr>
-          </a:p>
-        </p:txBody>
-      </p:sp>
-      <p:sp>
-        <p:nvSpPr>
-          <p:cNvPr id="40" name="PlaceHolder 4"/>
-          <p:cNvSpPr>
-            <a:spLocks noGrp="1"/>
-          </p:cNvSpPr>
-          <p:nvPr>
-            <p:ph type="ftr" idx="23"/>
-          </p:nvPr>
-        </p:nvSpPr>
-        <p:spPr>
-          <a:xfrm>
-            <a:off x="4038480" y="6356520"/>
-            <a:ext cx="4110120" cy="360360"/>
-          </a:xfrm>
-          <a:prstGeom prst="rect">
-            <a:avLst/>
-          </a:prstGeom>
-          <a:noFill/>
-          <a:ln w="0">
-            <a:noFill/>
-          </a:ln>
-        </p:spPr>
-        <p:txBody>
-          <a:bodyPr lIns="91440" rIns="91440" tIns="45720" bIns="45720" anchor="ctr">
-            <a:noAutofit/>
-          </a:bodyPr>
-          <a:lstStyle>
-            <a:lvl1pPr indent="0" algn="ctr">
-              <a:lnSpc>
-                <a:spcPct val="100000"/>
-              </a:lnSpc>
-              <a:buNone/>
-              <a:tabLst>
-                <a:tab algn="l" pos="0"/>
-              </a:tabLst>
-              <a:defRPr b="0" lang="en-US" sz="1400" strike="noStrike" u="none">
-                <a:solidFill>
-                  <a:srgbClr val="000000"/>
-                </a:solidFill>
-                <a:effectLst/>
-                <a:uFillTx/>
-                <a:latin typeface="Times New Roman"/>
-              </a:defRPr>
-            </a:lvl1pPr>
-          </a:lstStyle>
-          <a:p>
-            <a:pPr indent="0" algn="ctr">
-              <a:lnSpc>
-                <a:spcPct val="100000"/>
-              </a:lnSpc>
-              <a:buNone/>
-              <a:tabLst>
-                <a:tab algn="l" pos="0"/>
-              </a:tabLst>
-            </a:pPr>
-            <a:r>
-              <a:rPr b="0" lang="en-US" sz="1400" strike="noStrike" u="none">
-                <a:solidFill>
-                  <a:srgbClr val="000000"/>
-                </a:solidFill>
-                <a:effectLst/>
-                <a:uFillTx/>
-                <a:latin typeface="Times New Roman"/>
-              </a:rPr>
-              <a:t>&lt;footer&gt;</a:t>
-            </a:r>
-            <a:endParaRPr b="0" lang="en-US" sz="1400" strike="noStrike" u="none">
-              <a:solidFill>
-                <a:srgbClr val="000000"/>
-              </a:solidFill>
-              <a:effectLst/>
-              <a:uFillTx/>
-              <a:latin typeface="Times New Roman"/>
-            </a:endParaRPr>
-          </a:p>
-        </p:txBody>
-      </p:sp>
-      <p:sp>
-        <p:nvSpPr>
-          <p:cNvPr id="41" name="PlaceHolder 5"/>
-          <p:cNvSpPr>
-            <a:spLocks noGrp="1"/>
-          </p:cNvSpPr>
-          <p:nvPr>
-            <p:ph type="sldNum" idx="24"/>
-          </p:nvPr>
-        </p:nvSpPr>
-        <p:spPr>
-          <a:xfrm>
-            <a:off x="8610480" y="6356520"/>
-            <a:ext cx="2738520" cy="360360"/>
-          </a:xfrm>
-          <a:prstGeom prst="rect">
-            <a:avLst/>
-          </a:prstGeom>
-          <a:noFill/>
-          <a:ln w="0">
-            <a:noFill/>
-          </a:ln>
-        </p:spPr>
-        <p:txBody>
-          <a:bodyPr lIns="91440" rIns="91440" tIns="45720" bIns="45720" anchor="ctr">
-            <a:noAutofit/>
-          </a:bodyPr>
-          <a:lstStyle>
-            <a:lvl1pPr indent="0" algn="r" defTabSz="914400">
-              <a:lnSpc>
-                <a:spcPct val="100000"/>
-              </a:lnSpc>
-              <a:buNone/>
-              <a:tabLst>
-                <a:tab algn="l" pos="0"/>
-              </a:tabLst>
-              <a:defRPr b="0" lang="en-US" sz="1200" strike="noStrike" u="none">
-                <a:solidFill>
-                  <a:schemeClr val="dk1">
-                    <a:tint val="75000"/>
-                  </a:schemeClr>
-                </a:solidFill>
-                <a:effectLst/>
-                <a:uFillTx/>
-                <a:latin typeface="Calibri"/>
-              </a:defRPr>
-            </a:lvl1pPr>
-          </a:lstStyle>
-          <a:p>
-            <a:pPr indent="0" algn="r" defTabSz="914400">
-              <a:lnSpc>
-                <a:spcPct val="100000"/>
-              </a:lnSpc>
-              <a:buNone/>
-              <a:tabLst>
-                <a:tab algn="l" pos="0"/>
-              </a:tabLst>
-            </a:pPr>
-            <a:fld id="{CB4A5EC9-3235-4A22-9D0F-488DDF453DB8}" type="slidenum">
-              <a:rPr b="0" lang="en-US" sz="1200" strike="noStrike" u="none">
-                <a:solidFill>
-                  <a:schemeClr val="dk1">
-                    <a:tint val="75000"/>
-                  </a:schemeClr>
-                </a:solidFill>
-                <a:effectLst/>
-                <a:uFillTx/>
-                <a:latin typeface="Calibri"/>
-              </a:rPr>
-              <a:t>&lt;number&gt;</a:t>
-            </a:fld>
-            <a:endParaRPr b="0" lang="en-US" sz="1200" strike="noStrike" u="none">
-              <a:solidFill>
-                <a:srgbClr val="000000"/>
-              </a:solidFill>
-              <a:effectLst/>
-              <a:uFillTx/>
-              <a:latin typeface="Times New Roman"/>
-            </a:endParaRPr>
-          </a:p>
-        </p:txBody>
-      </p:sp>
-    </p:spTree>
-  </p:cSld>
-</p:sldLayout>
-</file>
-
-<file path=ppt/slideLayouts/slideLayout9.xml><?xml version="1.0" encoding="utf-8"?>
-<p:sldLayout xmlns:a="http://schemas.openxmlformats.org/drawingml/2006/main" xmlns:p="http://schemas.openxmlformats.org/presentationml/2006/main" xmlns:r="http://schemas.openxmlformats.org/officeDocument/2006/relationships" xmlns:p14="http://schemas.microsoft.com/office/powerpoint/2010/main" xmlns:p15="http://schemas.microsoft.com/office/powerpoint/2012/main" xmlns:mc="http://schemas.openxmlformats.org/markup-compatibility/2006" type="twoObj" preserve="1">
-  <p:cSld name="Two Content">
-    <p:bg>
-      <p:bgPr>
-        <a:solidFill>
-          <a:srgbClr val="ffffff"/>
-        </a:solidFill>
-      </p:bgPr>
-    </p:bg>
-    <p:spTree>
-      <p:nvGrpSpPr>
-        <p:cNvPr id="1" name=""/>
-        <p:cNvGrpSpPr/>
-        <p:nvPr/>
-      </p:nvGrpSpPr>
-      <p:grpSpPr>
-        <a:xfrm>
-          <a:off x="0" y="0"/>
-          <a:ext cx="0" cy="0"/>
-          <a:chOff x="0" y="0"/>
-          <a:chExt cx="0" cy="0"/>
-        </a:xfrm>
-      </p:grpSpPr>
-      <p:sp>
-        <p:nvSpPr>
-          <p:cNvPr id="42" name="PlaceHolder 1"/>
-          <p:cNvSpPr>
-            <a:spLocks noGrp="1"/>
-          </p:cNvSpPr>
-          <p:nvPr>
-            <p:ph type="title"/>
-          </p:nvPr>
-        </p:nvSpPr>
-        <p:spPr>
-          <a:xfrm>
-            <a:off x="838080" y="365040"/>
-            <a:ext cx="10510920" cy="1320840"/>
-          </a:xfrm>
-          <a:prstGeom prst="rect">
-            <a:avLst/>
-          </a:prstGeom>
-          <a:noFill/>
-          <a:ln w="0">
-            <a:noFill/>
-          </a:ln>
-        </p:spPr>
-        <p:txBody>
-          <a:bodyPr lIns="91440" rIns="91440" tIns="45720" bIns="45720" anchor="ctr">
-            <a:noAutofit/>
-          </a:bodyPr>
-          <a:p>
-            <a:pPr indent="0" defTabSz="914400">
-              <a:lnSpc>
-                <a:spcPct val="90000"/>
-              </a:lnSpc>
-              <a:buNone/>
-              <a:tabLst>
-                <a:tab algn="l" pos="0"/>
-              </a:tabLst>
-            </a:pPr>
-            <a:r>
-              <a:rPr b="0" lang="en-US" sz="4400" strike="noStrike" u="none">
-                <a:solidFill>
-                  <a:schemeClr val="dk1"/>
-                </a:solidFill>
-                <a:effectLst/>
-                <a:uFillTx/>
-                <a:latin typeface="Calibri Light"/>
-              </a:rPr>
-              <a:t>Click to edit Master title style</a:t>
-            </a:r>
-            <a:endParaRPr b="0" lang="en-US" sz="4400" strike="noStrike" u="none">
-              <a:solidFill>
-                <a:srgbClr val="000000"/>
-              </a:solidFill>
-              <a:effectLst/>
-              <a:uFillTx/>
-              <a:latin typeface="Arial"/>
-            </a:endParaRPr>
-          </a:p>
-        </p:txBody>
-      </p:sp>
-      <p:sp>
-        <p:nvSpPr>
-          <p:cNvPr id="43" name="PlaceHolder 2"/>
-          <p:cNvSpPr>
-            <a:spLocks noGrp="1"/>
-          </p:cNvSpPr>
-          <p:nvPr>
-            <p:ph type="body"/>
-          </p:nvPr>
-        </p:nvSpPr>
-        <p:spPr>
-          <a:xfrm>
-            <a:off x="838080" y="1825560"/>
-            <a:ext cx="5176800" cy="4346640"/>
-          </a:xfrm>
-          <a:prstGeom prst="rect">
-            <a:avLst/>
-          </a:prstGeom>
-          <a:noFill/>
-          <a:ln w="0">
-            <a:noFill/>
-          </a:ln>
-        </p:spPr>
-        <p:txBody>
-          <a:bodyPr lIns="91440" rIns="91440" tIns="45720" bIns="45720" anchor="t">
-            <a:noAutofit/>
-          </a:bodyPr>
-          <a:p>
-            <a:pPr marL="228600" indent="-228600" defTabSz="914400">
-              <a:lnSpc>
-                <a:spcPct val="90000"/>
-              </a:lnSpc>
-              <a:spcBef>
-                <a:spcPts val="1001"/>
-              </a:spcBef>
-              <a:buClr>
-                <a:srgbClr val="000000"/>
-              </a:buClr>
-              <a:buFont typeface="Arial"/>
-              <a:buChar char="•"/>
-            </a:pPr>
-            <a:r>
-              <a:rPr b="0" lang="en-US" sz="2800" strike="noStrike" u="none">
-                <a:solidFill>
-                  <a:schemeClr val="dk1"/>
-                </a:solidFill>
-                <a:effectLst/>
-                <a:uFillTx/>
-                <a:latin typeface="Calibri"/>
-              </a:rPr>
-              <a:t>Click to edit Master text styles</a:t>
-            </a:r>
-            <a:endParaRPr b="0" lang="en-US" sz="2800" strike="noStrike" u="none">
-              <a:solidFill>
-                <a:srgbClr val="000000"/>
-              </a:solidFill>
-              <a:effectLst/>
-              <a:uFillTx/>
-              <a:latin typeface="Arial"/>
-            </a:endParaRPr>
-          </a:p>
-          <a:p>
-            <a:pPr lvl="1" marL="685800" indent="-228600" defTabSz="914400">
-              <a:lnSpc>
-                <a:spcPct val="90000"/>
-              </a:lnSpc>
-              <a:spcBef>
-                <a:spcPts val="499"/>
-              </a:spcBef>
-              <a:buClr>
-                <a:srgbClr val="000000"/>
-              </a:buClr>
-              <a:buFont typeface="Arial"/>
-              <a:buChar char="•"/>
-            </a:pPr>
-            <a:r>
-              <a:rPr b="0" lang="en-US" sz="2400" strike="noStrike" u="none">
-                <a:solidFill>
-                  <a:schemeClr val="dk1"/>
-                </a:solidFill>
-                <a:effectLst/>
-                <a:uFillTx/>
-                <a:latin typeface="Calibri"/>
-              </a:rPr>
-              <a:t>Second level</a:t>
-            </a:r>
-            <a:endParaRPr b="0" lang="en-US" sz="2400" strike="noStrike" u="none">
-              <a:solidFill>
-                <a:srgbClr val="000000"/>
-              </a:solidFill>
-              <a:effectLst/>
-              <a:uFillTx/>
-              <a:latin typeface="Arial"/>
-            </a:endParaRPr>
-          </a:p>
-          <a:p>
-            <a:pPr lvl="2" marL="1143000" indent="-228600" defTabSz="914400">
-              <a:lnSpc>
-                <a:spcPct val="90000"/>
-              </a:lnSpc>
-              <a:spcBef>
-                <a:spcPts val="499"/>
-              </a:spcBef>
-              <a:buClr>
-                <a:srgbClr val="000000"/>
-              </a:buClr>
-              <a:buFont typeface="Arial"/>
-              <a:buChar char="•"/>
-            </a:pPr>
-            <a:r>
-              <a:rPr b="0" lang="en-US" sz="2000" strike="noStrike" u="none">
-                <a:solidFill>
-                  <a:schemeClr val="dk1"/>
-                </a:solidFill>
-                <a:effectLst/>
-                <a:uFillTx/>
-                <a:latin typeface="Calibri"/>
-              </a:rPr>
-              <a:t>Third level</a:t>
-            </a:r>
-            <a:endParaRPr b="0" lang="en-US" sz="2000" strike="noStrike" u="none">
-              <a:solidFill>
-                <a:srgbClr val="000000"/>
-              </a:solidFill>
-              <a:effectLst/>
-              <a:uFillTx/>
-              <a:latin typeface="Arial"/>
-            </a:endParaRPr>
-          </a:p>
-          <a:p>
-            <a:pPr lvl="3" marL="1600200" indent="-228600" defTabSz="914400">
-              <a:lnSpc>
-                <a:spcPct val="90000"/>
-              </a:lnSpc>
-              <a:spcBef>
-                <a:spcPts val="499"/>
-              </a:spcBef>
-              <a:buClr>
-                <a:srgbClr val="000000"/>
-              </a:buClr>
-              <a:buFont typeface="Arial"/>
-              <a:buChar char="•"/>
-            </a:pPr>
-            <a:r>
-              <a:rPr b="0" lang="en-US" sz="1800" strike="noStrike" u="none">
-                <a:solidFill>
-                  <a:schemeClr val="dk1"/>
-                </a:solidFill>
-                <a:effectLst/>
-                <a:uFillTx/>
-                <a:latin typeface="Calibri"/>
-              </a:rPr>
-              <a:t>Fourth level</a:t>
-            </a:r>
-            <a:endParaRPr b="0" lang="en-US" sz="1800" strike="noStrike" u="none">
-              <a:solidFill>
-                <a:srgbClr val="000000"/>
-              </a:solidFill>
-              <a:effectLst/>
-              <a:uFillTx/>
-              <a:latin typeface="Arial"/>
-            </a:endParaRPr>
-          </a:p>
-          <a:p>
-            <a:pPr lvl="4" marL="2057400" indent="-228600" defTabSz="914400">
-              <a:lnSpc>
-                <a:spcPct val="90000"/>
-              </a:lnSpc>
-              <a:spcBef>
-                <a:spcPts val="499"/>
-              </a:spcBef>
-              <a:buClr>
-                <a:srgbClr val="000000"/>
-              </a:buClr>
-              <a:buFont typeface="Arial"/>
-              <a:buChar char="•"/>
-            </a:pPr>
-            <a:r>
-              <a:rPr b="0" lang="en-US" sz="1800" strike="noStrike" u="none">
-                <a:solidFill>
-                  <a:schemeClr val="dk1"/>
-                </a:solidFill>
-                <a:effectLst/>
-                <a:uFillTx/>
-                <a:latin typeface="Calibri"/>
-              </a:rPr>
-              <a:t>Fifth level</a:t>
-            </a:r>
-            <a:endParaRPr b="0" lang="en-US" sz="1800" strike="noStrike" u="none">
-              <a:solidFill>
-                <a:srgbClr val="000000"/>
-              </a:solidFill>
-              <a:effectLst/>
-              <a:uFillTx/>
-              <a:latin typeface="Arial"/>
-            </a:endParaRPr>
-          </a:p>
-        </p:txBody>
-      </p:sp>
-      <p:sp>
-        <p:nvSpPr>
-          <p:cNvPr id="44" name="PlaceHolder 3"/>
-          <p:cNvSpPr>
-            <a:spLocks noGrp="1"/>
-          </p:cNvSpPr>
-          <p:nvPr>
-            <p:ph type="body"/>
-          </p:nvPr>
-        </p:nvSpPr>
-        <p:spPr>
-          <a:xfrm>
-            <a:off x="6172200" y="1825560"/>
-            <a:ext cx="5176800" cy="4346640"/>
-          </a:xfrm>
-          <a:prstGeom prst="rect">
-            <a:avLst/>
-          </a:prstGeom>
-          <a:noFill/>
-          <a:ln w="0">
-            <a:noFill/>
-          </a:ln>
-        </p:spPr>
-        <p:txBody>
-          <a:bodyPr lIns="91440" rIns="91440" tIns="45720" bIns="45720" anchor="t">
-            <a:noAutofit/>
-          </a:bodyPr>
-          <a:p>
-            <a:pPr marL="228600" indent="-228600" defTabSz="914400">
-              <a:lnSpc>
-                <a:spcPct val="90000"/>
-              </a:lnSpc>
-              <a:spcBef>
-                <a:spcPts val="1001"/>
-              </a:spcBef>
-              <a:buClr>
-                <a:srgbClr val="000000"/>
-              </a:buClr>
-              <a:buFont typeface="Arial"/>
-              <a:buChar char="•"/>
-            </a:pPr>
-            <a:r>
-              <a:rPr b="0" lang="en-US" sz="2800" strike="noStrike" u="none">
-                <a:solidFill>
-                  <a:schemeClr val="dk1"/>
-                </a:solidFill>
-                <a:effectLst/>
-                <a:uFillTx/>
-                <a:latin typeface="Calibri"/>
-              </a:rPr>
-              <a:t>Click to edit Master text styles</a:t>
-            </a:r>
-            <a:endParaRPr b="0" lang="en-US" sz="2800" strike="noStrike" u="none">
-              <a:solidFill>
-                <a:srgbClr val="000000"/>
-              </a:solidFill>
-              <a:effectLst/>
-              <a:uFillTx/>
-              <a:latin typeface="Arial"/>
-            </a:endParaRPr>
-          </a:p>
-          <a:p>
-            <a:pPr lvl="1" marL="685800" indent="-228600" defTabSz="914400">
-              <a:lnSpc>
-                <a:spcPct val="90000"/>
-              </a:lnSpc>
-              <a:spcBef>
-                <a:spcPts val="499"/>
-              </a:spcBef>
-              <a:buClr>
-                <a:srgbClr val="000000"/>
-              </a:buClr>
-              <a:buFont typeface="Arial"/>
-              <a:buChar char="•"/>
-            </a:pPr>
-            <a:r>
-              <a:rPr b="0" lang="en-US" sz="2400" strike="noStrike" u="none">
-                <a:solidFill>
-                  <a:schemeClr val="dk1"/>
-                </a:solidFill>
-                <a:effectLst/>
-                <a:uFillTx/>
-                <a:latin typeface="Calibri"/>
-              </a:rPr>
-              <a:t>Second level</a:t>
-            </a:r>
-            <a:endParaRPr b="0" lang="en-US" sz="2400" strike="noStrike" u="none">
-              <a:solidFill>
-                <a:srgbClr val="000000"/>
-              </a:solidFill>
-              <a:effectLst/>
-              <a:uFillTx/>
-              <a:latin typeface="Arial"/>
-            </a:endParaRPr>
-          </a:p>
-          <a:p>
-            <a:pPr lvl="2" marL="1143000" indent="-228600" defTabSz="914400">
-              <a:lnSpc>
-                <a:spcPct val="90000"/>
-              </a:lnSpc>
-              <a:spcBef>
-                <a:spcPts val="499"/>
-              </a:spcBef>
-              <a:buClr>
-                <a:srgbClr val="000000"/>
-              </a:buClr>
-              <a:buFont typeface="Arial"/>
-              <a:buChar char="•"/>
-            </a:pPr>
-            <a:r>
-              <a:rPr b="0" lang="en-US" sz="2000" strike="noStrike" u="none">
-                <a:solidFill>
-                  <a:schemeClr val="dk1"/>
-                </a:solidFill>
-                <a:effectLst/>
-                <a:uFillTx/>
-                <a:latin typeface="Calibri"/>
-              </a:rPr>
-              <a:t>Third level</a:t>
-            </a:r>
-            <a:endParaRPr b="0" lang="en-US" sz="2000" strike="noStrike" u="none">
-              <a:solidFill>
-                <a:srgbClr val="000000"/>
-              </a:solidFill>
-              <a:effectLst/>
-              <a:uFillTx/>
-              <a:latin typeface="Arial"/>
-            </a:endParaRPr>
-          </a:p>
-          <a:p>
-            <a:pPr lvl="3" marL="1600200" indent="-228600" defTabSz="914400">
-              <a:lnSpc>
-                <a:spcPct val="90000"/>
-              </a:lnSpc>
-              <a:spcBef>
-                <a:spcPts val="499"/>
-              </a:spcBef>
-              <a:buClr>
-                <a:srgbClr val="000000"/>
-              </a:buClr>
-              <a:buFont typeface="Arial"/>
-              <a:buChar char="•"/>
-            </a:pPr>
-            <a:r>
-              <a:rPr b="0" lang="en-US" sz="1800" strike="noStrike" u="none">
-                <a:solidFill>
-                  <a:schemeClr val="dk1"/>
-                </a:solidFill>
-                <a:effectLst/>
-                <a:uFillTx/>
-                <a:latin typeface="Calibri"/>
-              </a:rPr>
-              <a:t>Fourth level</a:t>
-            </a:r>
-            <a:endParaRPr b="0" lang="en-US" sz="1800" strike="noStrike" u="none">
-              <a:solidFill>
-                <a:srgbClr val="000000"/>
-              </a:solidFill>
-              <a:effectLst/>
-              <a:uFillTx/>
-              <a:latin typeface="Arial"/>
-            </a:endParaRPr>
-          </a:p>
-          <a:p>
-            <a:pPr lvl="4" marL="2057400" indent="-228600" defTabSz="914400">
-              <a:lnSpc>
-                <a:spcPct val="90000"/>
-              </a:lnSpc>
-              <a:spcBef>
-                <a:spcPts val="499"/>
-              </a:spcBef>
-              <a:buClr>
-                <a:srgbClr val="000000"/>
-              </a:buClr>
-              <a:buFont typeface="Arial"/>
-              <a:buChar char="•"/>
-            </a:pPr>
-            <a:r>
-              <a:rPr b="0" lang="en-US" sz="1800" strike="noStrike" u="none">
-                <a:solidFill>
-                  <a:schemeClr val="dk1"/>
-                </a:solidFill>
-                <a:effectLst/>
-                <a:uFillTx/>
-                <a:latin typeface="Calibri"/>
-              </a:rPr>
-              <a:t>Fifth level</a:t>
-            </a:r>
-            <a:endParaRPr b="0" lang="en-US" sz="1800" strike="noStrike" u="none">
-              <a:solidFill>
-                <a:srgbClr val="000000"/>
-              </a:solidFill>
-              <a:effectLst/>
-              <a:uFillTx/>
-              <a:latin typeface="Arial"/>
-            </a:endParaRPr>
-          </a:p>
-        </p:txBody>
-      </p:sp>
-      <p:sp>
-        <p:nvSpPr>
-          <p:cNvPr id="45" name="PlaceHolder 4"/>
-          <p:cNvSpPr>
-            <a:spLocks noGrp="1"/>
-          </p:cNvSpPr>
-          <p:nvPr>
-            <p:ph type="dt" idx="25"/>
-          </p:nvPr>
-        </p:nvSpPr>
-        <p:spPr>
-          <a:xfrm>
-            <a:off x="838080" y="6356520"/>
-            <a:ext cx="2738520" cy="360360"/>
-          </a:xfrm>
-          <a:prstGeom prst="rect">
-            <a:avLst/>
-          </a:prstGeom>
-          <a:noFill/>
-          <a:ln w="0">
-            <a:noFill/>
-          </a:ln>
-        </p:spPr>
-        <p:txBody>
-          <a:bodyPr lIns="91440" rIns="91440" tIns="45720" bIns="45720" anchor="ctr">
-            <a:noAutofit/>
-          </a:bodyPr>
-          <a:lstStyle>
-            <a:lvl1pPr indent="0" defTabSz="914400">
-              <a:lnSpc>
-                <a:spcPct val="100000"/>
-              </a:lnSpc>
-              <a:buNone/>
-              <a:tabLst>
-                <a:tab algn="l" pos="0"/>
-              </a:tabLst>
-              <a:defRPr b="0" lang="en-US" sz="1200" strike="noStrike" u="none">
-                <a:solidFill>
-                  <a:schemeClr val="dk1">
-                    <a:tint val="75000"/>
-                  </a:schemeClr>
-                </a:solidFill>
-                <a:effectLst/>
-                <a:uFillTx/>
-                <a:latin typeface="Calibri"/>
-              </a:defRPr>
-            </a:lvl1pPr>
-          </a:lstStyle>
-          <a:p>
-            <a:pPr indent="0" defTabSz="914400">
-              <a:lnSpc>
-                <a:spcPct val="100000"/>
-              </a:lnSpc>
-              <a:buNone/>
-              <a:tabLst>
-                <a:tab algn="l" pos="0"/>
-              </a:tabLst>
-            </a:pPr>
-            <a:r>
-              <a:rPr b="0" lang="en-US" sz="1200" strike="noStrike" u="none">
-                <a:solidFill>
-                  <a:schemeClr val="dk1">
-                    <a:tint val="75000"/>
-                  </a:schemeClr>
-                </a:solidFill>
-                <a:effectLst/>
-                <a:uFillTx/>
-                <a:latin typeface="Calibri"/>
-              </a:rPr>
-              <a:t>&lt;date/time&gt;</a:t>
-            </a:r>
-            <a:endParaRPr b="0" lang="en-US" sz="1200" strike="noStrike" u="none">
-              <a:solidFill>
-                <a:srgbClr val="000000"/>
-              </a:solidFill>
-              <a:effectLst/>
-              <a:uFillTx/>
-              <a:latin typeface="Times New Roman"/>
-            </a:endParaRPr>
-          </a:p>
-        </p:txBody>
-      </p:sp>
-      <p:sp>
-        <p:nvSpPr>
-          <p:cNvPr id="46" name="PlaceHolder 5"/>
-          <p:cNvSpPr>
-            <a:spLocks noGrp="1"/>
-          </p:cNvSpPr>
-          <p:nvPr>
-            <p:ph type="ftr" idx="26"/>
-          </p:nvPr>
-        </p:nvSpPr>
-        <p:spPr>
-          <a:xfrm>
-            <a:off x="4038480" y="6356520"/>
-            <a:ext cx="4110120" cy="360360"/>
-          </a:xfrm>
-          <a:prstGeom prst="rect">
-            <a:avLst/>
-          </a:prstGeom>
-          <a:noFill/>
-          <a:ln w="0">
-            <a:noFill/>
-          </a:ln>
-        </p:spPr>
-        <p:txBody>
-          <a:bodyPr lIns="91440" rIns="91440" tIns="45720" bIns="45720" anchor="ctr">
-            <a:noAutofit/>
-          </a:bodyPr>
-          <a:lstStyle>
-            <a:lvl1pPr indent="0" algn="ctr">
-              <a:lnSpc>
-                <a:spcPct val="100000"/>
-              </a:lnSpc>
-              <a:buNone/>
-              <a:tabLst>
-                <a:tab algn="l" pos="0"/>
-              </a:tabLst>
-              <a:defRPr b="0" lang="en-US" sz="1400" strike="noStrike" u="none">
-                <a:solidFill>
-                  <a:srgbClr val="000000"/>
-                </a:solidFill>
-                <a:effectLst/>
-                <a:uFillTx/>
-                <a:latin typeface="Times New Roman"/>
-              </a:defRPr>
-            </a:lvl1pPr>
-          </a:lstStyle>
-          <a:p>
-            <a:pPr indent="0" algn="ctr">
-              <a:lnSpc>
-                <a:spcPct val="100000"/>
-              </a:lnSpc>
-              <a:buNone/>
-              <a:tabLst>
-                <a:tab algn="l" pos="0"/>
-              </a:tabLst>
-            </a:pPr>
-            <a:r>
-              <a:rPr b="0" lang="en-US" sz="1400" strike="noStrike" u="none">
-                <a:solidFill>
-                  <a:srgbClr val="000000"/>
-                </a:solidFill>
-                <a:effectLst/>
-                <a:uFillTx/>
-                <a:latin typeface="Times New Roman"/>
-              </a:rPr>
-              <a:t>&lt;footer&gt;</a:t>
-            </a:r>
-            <a:endParaRPr b="0" lang="en-US" sz="1400" strike="noStrike" u="none">
-              <a:solidFill>
-                <a:srgbClr val="000000"/>
-              </a:solidFill>
-              <a:effectLst/>
-              <a:uFillTx/>
-              <a:latin typeface="Times New Roman"/>
-            </a:endParaRPr>
-          </a:p>
-        </p:txBody>
-      </p:sp>
-      <p:sp>
-        <p:nvSpPr>
-          <p:cNvPr id="47" name="PlaceHolder 6"/>
-          <p:cNvSpPr>
-            <a:spLocks noGrp="1"/>
-          </p:cNvSpPr>
-          <p:nvPr>
-            <p:ph type="sldNum" idx="27"/>
-          </p:nvPr>
-        </p:nvSpPr>
-        <p:spPr>
-          <a:xfrm>
-            <a:off x="8610480" y="6356520"/>
-            <a:ext cx="2738520" cy="360360"/>
-          </a:xfrm>
-          <a:prstGeom prst="rect">
-            <a:avLst/>
-          </a:prstGeom>
-          <a:noFill/>
-          <a:ln w="0">
-            <a:noFill/>
-          </a:ln>
-        </p:spPr>
-        <p:txBody>
-          <a:bodyPr lIns="91440" rIns="91440" tIns="45720" bIns="45720" anchor="ctr">
-            <a:noAutofit/>
-          </a:bodyPr>
-          <a:lstStyle>
-            <a:lvl1pPr indent="0" algn="r" defTabSz="914400">
-              <a:lnSpc>
-                <a:spcPct val="100000"/>
-              </a:lnSpc>
-              <a:buNone/>
-              <a:tabLst>
-                <a:tab algn="l" pos="0"/>
-              </a:tabLst>
-              <a:defRPr b="0" lang="en-US" sz="1200" strike="noStrike" u="none">
-                <a:solidFill>
-                  <a:schemeClr val="dk1">
-                    <a:tint val="75000"/>
-                  </a:schemeClr>
-                </a:solidFill>
-                <a:effectLst/>
-                <a:uFillTx/>
-                <a:latin typeface="Calibri"/>
-              </a:defRPr>
-            </a:lvl1pPr>
-          </a:lstStyle>
-          <a:p>
-            <a:pPr indent="0" algn="r" defTabSz="914400">
-              <a:lnSpc>
-                <a:spcPct val="100000"/>
-              </a:lnSpc>
-              <a:buNone/>
-              <a:tabLst>
-                <a:tab algn="l" pos="0"/>
-              </a:tabLst>
-            </a:pPr>
-            <a:fld id="{4A7C8D9E-7083-4029-AC5B-238B45CDC876}" type="slidenum">
+            <a:fld id="{734DCA7C-042A-4ABB-BC83-7A4356A6CCDB}" type="slidenum">
               <a:rPr b="0" lang="en-US" sz="1200" strike="noStrike" u="none">
                 <a:solidFill>
                   <a:schemeClr val="dk1">
@@ -5898,7 +5898,7 @@
         <p:spPr>
           <a:xfrm>
             <a:off x="1523880" y="1143000"/>
-            <a:ext cx="9139320" cy="2285280"/>
+            <a:ext cx="9138960" cy="2284920"/>
           </a:xfrm>
           <a:prstGeom prst="rect">
             <a:avLst/>
@@ -5958,7 +5958,7 @@
         <p:spPr>
           <a:xfrm>
             <a:off x="1523880" y="4221360"/>
-            <a:ext cx="9139320" cy="1492920"/>
+            <a:ext cx="9138960" cy="1492560"/>
           </a:xfrm>
           <a:prstGeom prst="rect">
             <a:avLst/>
@@ -6089,7 +6089,7 @@
         <p:spPr>
           <a:xfrm>
             <a:off x="10199160" y="282240"/>
-            <a:ext cx="1795680" cy="595440"/>
+            <a:ext cx="1795320" cy="595080"/>
           </a:xfrm>
           <a:prstGeom prst="rect">
             <a:avLst/>
@@ -6152,7 +6152,7 @@
         <p:spPr>
           <a:xfrm>
             <a:off x="0" y="4680"/>
-            <a:ext cx="12184200" cy="6853320"/>
+            <a:ext cx="12183840" cy="6852960"/>
           </a:xfrm>
           <a:prstGeom prst="rect">
             <a:avLst/>
@@ -6209,7 +6209,7 @@
         <p:spPr>
           <a:xfrm>
             <a:off x="572400" y="238680"/>
-            <a:ext cx="11013840" cy="1128600"/>
+            <a:ext cx="11013480" cy="1128240"/>
           </a:xfrm>
           <a:prstGeom prst="rect">
             <a:avLst/>
@@ -6270,15 +6270,15 @@
         <p:spPr>
           <a:xfrm>
             <a:off x="572400" y="1681560"/>
-            <a:ext cx="10968120" cy="13680"/>
+            <a:ext cx="10967760" cy="13320"/>
           </a:xfrm>
           <a:custGeom>
             <a:avLst/>
             <a:gdLst>
-              <a:gd name="textAreaLeft" fmla="*/ 0 w 10968120"/>
-              <a:gd name="textAreaRight" fmla="*/ 10972800 w 10968120"/>
-              <a:gd name="textAreaTop" fmla="*/ 0 h 13680"/>
-              <a:gd name="textAreaBottom" fmla="*/ 18360 h 13680"/>
+              <a:gd name="textAreaLeft" fmla="*/ 0 w 10967760"/>
+              <a:gd name="textAreaRight" fmla="*/ 10972800 w 10967760"/>
+              <a:gd name="textAreaTop" fmla="*/ 0 h 13320"/>
+              <a:gd name="textAreaBottom" fmla="*/ 18360 h 13320"/>
               <a:gd name="GluePoint1X" fmla="*/ 0 w 10972800"/>
               <a:gd name="GluePoint1Y" fmla="*/ 0 h 18288"/>
               <a:gd name="GluePoint2X" fmla="*/ 356616 w 10972800"/>
@@ -6921,7 +6921,7 @@
         <p:spPr>
           <a:xfrm>
             <a:off x="10199520" y="282600"/>
-            <a:ext cx="1795680" cy="595440"/>
+            <a:ext cx="1795320" cy="595080"/>
           </a:xfrm>
           <a:prstGeom prst="rect">
             <a:avLst/>
@@ -6941,7 +6941,7 @@
         <p:spPr>
           <a:xfrm>
             <a:off x="6401520" y="1828800"/>
-            <a:ext cx="5257080" cy="4343400"/>
+            <a:ext cx="5256720" cy="4343040"/>
           </a:xfrm>
           <a:prstGeom prst="rect">
             <a:avLst/>
@@ -7116,7 +7116,7 @@
         <p:spPr>
           <a:xfrm>
             <a:off x="549360" y="2017440"/>
-            <a:ext cx="5622480" cy="4154400"/>
+            <a:ext cx="5622120" cy="4154040"/>
           </a:xfrm>
           <a:prstGeom prst="rect">
             <a:avLst/>
@@ -7179,7 +7179,7 @@
         <p:spPr>
           <a:xfrm>
             <a:off x="0" y="4680"/>
-            <a:ext cx="12184200" cy="6853320"/>
+            <a:ext cx="12183840" cy="6852960"/>
           </a:xfrm>
           <a:prstGeom prst="rect">
             <a:avLst/>
@@ -7207,6 +7207,11 @@
             <a:noAutofit/>
           </a:bodyPr>
           <a:p>
+            <a:pPr>
+              <a:lnSpc>
+                <a:spcPct val="100000"/>
+              </a:lnSpc>
+            </a:pPr>
             <a:endParaRPr b="0" lang="en-US" sz="1800" strike="noStrike" u="none">
               <a:solidFill>
                 <a:schemeClr val="lt1"/>
@@ -7231,7 +7236,7 @@
         <p:spPr>
           <a:xfrm>
             <a:off x="572400" y="238680"/>
-            <a:ext cx="11013840" cy="1128600"/>
+            <a:ext cx="11013480" cy="1128240"/>
           </a:xfrm>
           <a:prstGeom prst="rect">
             <a:avLst/>
@@ -7292,15 +7297,15 @@
         <p:spPr>
           <a:xfrm>
             <a:off x="572400" y="1681560"/>
-            <a:ext cx="10968120" cy="13680"/>
+            <a:ext cx="10967760" cy="13320"/>
           </a:xfrm>
           <a:custGeom>
             <a:avLst/>
             <a:gdLst>
-              <a:gd name="textAreaLeft" fmla="*/ 0 w 10968120"/>
-              <a:gd name="textAreaRight" fmla="*/ 10972800 w 10968120"/>
-              <a:gd name="textAreaTop" fmla="*/ 0 h 13680"/>
-              <a:gd name="textAreaBottom" fmla="*/ 18360 h 13680"/>
+              <a:gd name="textAreaLeft" fmla="*/ 0 w 10967760"/>
+              <a:gd name="textAreaRight" fmla="*/ 10972800 w 10967760"/>
+              <a:gd name="textAreaTop" fmla="*/ 0 h 13320"/>
+              <a:gd name="textAreaBottom" fmla="*/ 18360 h 13320"/>
               <a:gd name="GluePoint1X" fmla="*/ 0 w 10972800"/>
               <a:gd name="GluePoint1Y" fmla="*/ 0 h 18288"/>
               <a:gd name="GluePoint2X" fmla="*/ 356616 w 10972800"/>
@@ -7914,6 +7919,11 @@
             <a:noAutofit/>
           </a:bodyPr>
           <a:p>
+            <a:pPr>
+              <a:lnSpc>
+                <a:spcPct val="100000"/>
+              </a:lnSpc>
+            </a:pPr>
             <a:endParaRPr b="0" lang="en-US" sz="1800" strike="noStrike" u="none">
               <a:solidFill>
                 <a:schemeClr val="lt1"/>
@@ -7938,7 +7948,7 @@
         <p:spPr>
           <a:xfrm>
             <a:off x="10199520" y="282600"/>
-            <a:ext cx="1795680" cy="595440"/>
+            <a:ext cx="1795320" cy="595080"/>
           </a:xfrm>
           <a:prstGeom prst="rect">
             <a:avLst/>
@@ -7958,7 +7968,7 @@
         <p:spPr>
           <a:xfrm>
             <a:off x="457920" y="1970640"/>
-            <a:ext cx="5485680" cy="4343400"/>
+            <a:ext cx="5485320" cy="4343040"/>
           </a:xfrm>
           <a:prstGeom prst="rect">
             <a:avLst/>
@@ -8031,7 +8041,7 @@
                 <a:uFillTx/>
                 <a:latin typeface="Arial"/>
               </a:rPr>
-              <a:t>It is a residual encoder/decoder CNN designed specifically for 2D/3D medical segmenation</a:t>
+              <a:t>It is a residual encoder/decoder CNN designed specifically for 2D/3D medical segmentation</a:t>
             </a:r>
             <a:endParaRPr b="0" lang="en-US" sz="2400" strike="noStrike" u="none">
               <a:solidFill>
@@ -8162,7 +8172,7 @@
         <p:spPr>
           <a:xfrm>
             <a:off x="6400800" y="2971800"/>
-            <a:ext cx="5257800" cy="1949400"/>
+            <a:ext cx="5257440" cy="1949040"/>
           </a:xfrm>
           <a:prstGeom prst="rect">
             <a:avLst/>
@@ -8225,7 +8235,7 @@
         <p:spPr>
           <a:xfrm>
             <a:off x="0" y="4680"/>
-            <a:ext cx="12184200" cy="6853320"/>
+            <a:ext cx="12183840" cy="6852960"/>
           </a:xfrm>
           <a:prstGeom prst="rect">
             <a:avLst/>
@@ -8253,6 +8263,11 @@
             <a:noAutofit/>
           </a:bodyPr>
           <a:p>
+            <a:pPr>
+              <a:lnSpc>
+                <a:spcPct val="100000"/>
+              </a:lnSpc>
+            </a:pPr>
             <a:endParaRPr b="0" lang="en-US" sz="1800" strike="noStrike" u="none">
               <a:solidFill>
                 <a:schemeClr val="lt1"/>
@@ -8277,7 +8292,7 @@
         <p:spPr>
           <a:xfrm>
             <a:off x="572400" y="238680"/>
-            <a:ext cx="11013840" cy="1128600"/>
+            <a:ext cx="11013480" cy="1128240"/>
           </a:xfrm>
           <a:prstGeom prst="rect">
             <a:avLst/>
@@ -8338,15 +8353,15 @@
         <p:spPr>
           <a:xfrm>
             <a:off x="572400" y="1681560"/>
-            <a:ext cx="10968120" cy="13680"/>
+            <a:ext cx="10967760" cy="13320"/>
           </a:xfrm>
           <a:custGeom>
             <a:avLst/>
             <a:gdLst>
-              <a:gd name="textAreaLeft" fmla="*/ 0 w 10968120"/>
-              <a:gd name="textAreaRight" fmla="*/ 10972800 w 10968120"/>
-              <a:gd name="textAreaTop" fmla="*/ 0 h 13680"/>
-              <a:gd name="textAreaBottom" fmla="*/ 18360 h 13680"/>
+              <a:gd name="textAreaLeft" fmla="*/ 0 w 10967760"/>
+              <a:gd name="textAreaRight" fmla="*/ 10972800 w 10967760"/>
+              <a:gd name="textAreaTop" fmla="*/ 0 h 13320"/>
+              <a:gd name="textAreaBottom" fmla="*/ 18360 h 13320"/>
               <a:gd name="GluePoint1X" fmla="*/ 0 w 10972800"/>
               <a:gd name="GluePoint1Y" fmla="*/ 0 h 18288"/>
               <a:gd name="GluePoint2X" fmla="*/ 356616 w 10972800"/>
@@ -8960,6 +8975,11 @@
             <a:noAutofit/>
           </a:bodyPr>
           <a:p>
+            <a:pPr>
+              <a:lnSpc>
+                <a:spcPct val="100000"/>
+              </a:lnSpc>
+            </a:pPr>
             <a:endParaRPr b="0" lang="en-US" sz="1800" strike="noStrike" u="none">
               <a:solidFill>
                 <a:schemeClr val="lt1"/>
@@ -8984,7 +9004,7 @@
         <p:spPr>
           <a:xfrm>
             <a:off x="10199520" y="282600"/>
-            <a:ext cx="1795680" cy="595440"/>
+            <a:ext cx="1795320" cy="595080"/>
           </a:xfrm>
           <a:prstGeom prst="rect">
             <a:avLst/>
@@ -9003,7 +9023,7 @@
         </p:nvGraphicFramePr>
         <p:xfrm>
           <a:off x="658800" y="2328480"/>
-          <a:ext cx="11107080" cy="1384920"/>
+          <a:ext cx="11106720" cy="2758320"/>
         </p:xfrm>
         <a:graphic>
           <a:graphicData uri="http://schemas.openxmlformats.org/drawingml/2006/table">
@@ -9020,6 +9040,11 @@
                       <a:noAutofit/>
                     </a:bodyPr>
                     <a:p>
+                      <a:pPr>
+                        <a:lnSpc>
+                          <a:spcPct val="100000"/>
+                        </a:lnSpc>
+                      </a:pPr>
                       <a:r>
                         <a:rPr b="1" lang="en-US" sz="1800" strike="noStrike" u="none">
                           <a:solidFill>
@@ -9031,7 +9056,7 @@
                         </a:rPr>
                         <a:t>Challenges</a:t>
                       </a:r>
-                      <a:endParaRPr b="1" lang="en-US" sz="1800" strike="noStrike" u="none">
+                      <a:endParaRPr b="0" lang="en-US" sz="1800" strike="noStrike" u="none">
                         <a:solidFill>
                           <a:srgbClr val="000000"/>
                         </a:solidFill>
@@ -9042,17 +9067,21 @@
                     </a:p>
                   </a:txBody>
                   <a:tcPr anchor="t" marL="36000" marR="36000" marT="36000" marB="36000">
-                    <a:lnL>
+                    <a:lnL w="12240">
                       <a:noFill/>
+                      <a:prstDash val="solid"/>
                     </a:lnL>
-                    <a:lnR>
+                    <a:lnR w="12240">
                       <a:noFill/>
+                      <a:prstDash val="solid"/>
                     </a:lnR>
-                    <a:lnT>
+                    <a:lnT w="12240">
                       <a:noFill/>
+                      <a:prstDash val="solid"/>
                     </a:lnT>
-                    <a:lnB>
+                    <a:lnB w="12240">
                       <a:noFill/>
+                      <a:prstDash val="solid"/>
                     </a:lnB>
                     <a:noFill/>
                   </a:tcPr>
@@ -9063,6 +9092,11 @@
                       <a:noAutofit/>
                     </a:bodyPr>
                     <a:p>
+                      <a:pPr>
+                        <a:lnSpc>
+                          <a:spcPct val="100000"/>
+                        </a:lnSpc>
+                      </a:pPr>
                       <a:r>
                         <a:rPr b="1" lang="en-US" sz="1800" strike="noStrike" u="none">
                           <a:solidFill>
@@ -9074,7 +9108,7 @@
                         </a:rPr>
                         <a:t>Solutions</a:t>
                       </a:r>
-                      <a:endParaRPr b="1" lang="en-US" sz="1800" strike="noStrike" u="none">
+                      <a:endParaRPr b="0" lang="en-US" sz="1800" strike="noStrike" u="none">
                         <a:solidFill>
                           <a:srgbClr val="000000"/>
                         </a:solidFill>
@@ -9085,17 +9119,21 @@
                     </a:p>
                   </a:txBody>
                   <a:tcPr anchor="t" marL="36000" marR="36000" marT="36000" marB="36000">
-                    <a:lnL>
+                    <a:lnL w="12240">
                       <a:noFill/>
+                      <a:prstDash val="solid"/>
                     </a:lnL>
-                    <a:lnR>
+                    <a:lnR w="12240">
                       <a:noFill/>
+                      <a:prstDash val="solid"/>
                     </a:lnR>
-                    <a:lnT>
+                    <a:lnT w="12240">
                       <a:noFill/>
+                      <a:prstDash val="solid"/>
                     </a:lnT>
-                    <a:lnB>
+                    <a:lnB w="12240">
                       <a:noFill/>
+                      <a:prstDash val="solid"/>
                     </a:lnB>
                     <a:noFill/>
                   </a:tcPr>
@@ -9109,6 +9147,9 @@
                     </a:bodyPr>
                     <a:p>
                       <a:pPr marL="216000" indent="-216000">
+                        <a:lnSpc>
+                          <a:spcPct val="100000"/>
+                        </a:lnSpc>
                         <a:buClr>
                           <a:srgbClr val="000000"/>
                         </a:buClr>
@@ -9138,17 +9179,21 @@
                     </a:p>
                   </a:txBody>
                   <a:tcPr anchor="t" marL="36000" marR="36000" marT="36000" marB="36000">
-                    <a:lnL>
+                    <a:lnL w="12240">
                       <a:noFill/>
+                      <a:prstDash val="solid"/>
                     </a:lnL>
-                    <a:lnR>
+                    <a:lnR w="12240">
                       <a:noFill/>
+                      <a:prstDash val="solid"/>
                     </a:lnR>
-                    <a:lnT>
+                    <a:lnT w="12240">
                       <a:noFill/>
+                      <a:prstDash val="solid"/>
                     </a:lnT>
-                    <a:lnB>
+                    <a:lnB w="12240">
                       <a:noFill/>
+                      <a:prstDash val="solid"/>
                     </a:lnB>
                     <a:noFill/>
                   </a:tcPr>
@@ -9160,6 +9205,9 @@
                     </a:bodyPr>
                     <a:p>
                       <a:pPr marL="216000" indent="-216000">
+                        <a:lnSpc>
+                          <a:spcPct val="100000"/>
+                        </a:lnSpc>
                         <a:buClr>
                           <a:srgbClr val="000000"/>
                         </a:buClr>
@@ -9189,17 +9237,21 @@
                     </a:p>
                   </a:txBody>
                   <a:tcPr anchor="t" marL="36000" marR="36000" marT="36000" marB="36000">
-                    <a:lnL>
+                    <a:lnL w="12240">
                       <a:noFill/>
+                      <a:prstDash val="solid"/>
                     </a:lnL>
-                    <a:lnR>
+                    <a:lnR w="12240">
                       <a:noFill/>
+                      <a:prstDash val="solid"/>
                     </a:lnR>
-                    <a:lnT>
+                    <a:lnT w="12240">
                       <a:noFill/>
+                      <a:prstDash val="solid"/>
                     </a:lnT>
-                    <a:lnB>
+                    <a:lnB w="12240">
                       <a:noFill/>
+                      <a:prstDash val="solid"/>
                     </a:lnB>
                     <a:noFill/>
                   </a:tcPr>
@@ -9213,6 +9265,9 @@
                     </a:bodyPr>
                     <a:p>
                       <a:pPr marL="216000" indent="-216000">
+                        <a:lnSpc>
+                          <a:spcPct val="100000"/>
+                        </a:lnSpc>
                         <a:buClr>
                           <a:srgbClr val="000000"/>
                         </a:buClr>
@@ -9264,17 +9319,21 @@
                     </a:p>
                   </a:txBody>
                   <a:tcPr anchor="t" marL="36000" marR="36000" marT="36000" marB="36000">
-                    <a:lnL>
+                    <a:lnL w="12240">
                       <a:noFill/>
+                      <a:prstDash val="solid"/>
                     </a:lnL>
-                    <a:lnR>
+                    <a:lnR w="12240">
                       <a:noFill/>
+                      <a:prstDash val="solid"/>
                     </a:lnR>
-                    <a:lnT>
+                    <a:lnT w="12240">
                       <a:noFill/>
+                      <a:prstDash val="solid"/>
                     </a:lnT>
-                    <a:lnB>
+                    <a:lnB w="12240">
                       <a:noFill/>
+                      <a:prstDash val="solid"/>
                     </a:lnB>
                     <a:noFill/>
                   </a:tcPr>
@@ -9286,6 +9345,9 @@
                     </a:bodyPr>
                     <a:p>
                       <a:pPr marL="216000" indent="-216000">
+                        <a:lnSpc>
+                          <a:spcPct val="100000"/>
+                        </a:lnSpc>
                         <a:buClr>
                           <a:srgbClr val="000000"/>
                         </a:buClr>
@@ -9315,17 +9377,21 @@
                     </a:p>
                   </a:txBody>
                   <a:tcPr anchor="t" marL="36000" marR="36000" marT="36000" marB="36000">
-                    <a:lnL>
+                    <a:lnL w="12240">
                       <a:noFill/>
+                      <a:prstDash val="solid"/>
                     </a:lnL>
-                    <a:lnR>
+                    <a:lnR w="12240">
                       <a:noFill/>
+                      <a:prstDash val="solid"/>
                     </a:lnR>
-                    <a:lnT>
+                    <a:lnT w="12240">
                       <a:noFill/>
+                      <a:prstDash val="solid"/>
                     </a:lnT>
-                    <a:lnB>
+                    <a:lnB w="12240">
                       <a:noFill/>
+                      <a:prstDash val="solid"/>
                     </a:lnB>
                     <a:noFill/>
                   </a:tcPr>
@@ -9339,6 +9405,9 @@
                     </a:bodyPr>
                     <a:p>
                       <a:pPr marL="216000" indent="-216000">
+                        <a:lnSpc>
+                          <a:spcPct val="100000"/>
+                        </a:lnSpc>
                         <a:buClr>
                           <a:srgbClr val="000000"/>
                         </a:buClr>
@@ -9368,17 +9437,21 @@
                     </a:p>
                   </a:txBody>
                   <a:tcPr anchor="t" marL="36000" marR="36000" marT="36000" marB="36000">
-                    <a:lnL>
+                    <a:lnL w="12240">
                       <a:noFill/>
+                      <a:prstDash val="solid"/>
                     </a:lnL>
-                    <a:lnR>
+                    <a:lnR w="12240">
                       <a:noFill/>
+                      <a:prstDash val="solid"/>
                     </a:lnR>
-                    <a:lnT>
+                    <a:lnT w="12240">
                       <a:noFill/>
+                      <a:prstDash val="solid"/>
                     </a:lnT>
-                    <a:lnB>
+                    <a:lnB w="12240">
                       <a:noFill/>
+                      <a:prstDash val="solid"/>
                     </a:lnB>
                     <a:noFill/>
                   </a:tcPr>
@@ -9390,6 +9463,9 @@
                     </a:bodyPr>
                     <a:p>
                       <a:pPr marL="216000" indent="-216000">
+                        <a:lnSpc>
+                          <a:spcPct val="100000"/>
+                        </a:lnSpc>
                         <a:buClr>
                           <a:srgbClr val="000000"/>
                         </a:buClr>
@@ -9419,17 +9495,21 @@
                     </a:p>
                   </a:txBody>
                   <a:tcPr anchor="t" marL="36000" marR="36000" marT="36000" marB="36000">
-                    <a:lnL>
+                    <a:lnL w="12240">
                       <a:noFill/>
+                      <a:prstDash val="solid"/>
                     </a:lnL>
-                    <a:lnR>
+                    <a:lnR w="12240">
                       <a:noFill/>
+                      <a:prstDash val="solid"/>
                     </a:lnR>
-                    <a:lnT>
+                    <a:lnT w="12240">
                       <a:noFill/>
+                      <a:prstDash val="solid"/>
                     </a:lnT>
-                    <a:lnB>
+                    <a:lnB w="12240">
                       <a:noFill/>
+                      <a:prstDash val="solid"/>
                     </a:lnB>
                     <a:noFill/>
                   </a:tcPr>
@@ -9491,7 +9571,7 @@
         <p:spPr>
           <a:xfrm>
             <a:off x="0" y="4680"/>
-            <a:ext cx="12184200" cy="6853320"/>
+            <a:ext cx="12183840" cy="6852960"/>
           </a:xfrm>
           <a:prstGeom prst="rect">
             <a:avLst/>
@@ -9519,6 +9599,11 @@
             <a:noAutofit/>
           </a:bodyPr>
           <a:p>
+            <a:pPr>
+              <a:lnSpc>
+                <a:spcPct val="100000"/>
+              </a:lnSpc>
+            </a:pPr>
             <a:endParaRPr b="0" lang="en-US" sz="1800" strike="noStrike" u="none">
               <a:solidFill>
                 <a:schemeClr val="lt1"/>
@@ -9543,7 +9628,7 @@
         <p:spPr>
           <a:xfrm>
             <a:off x="572400" y="238680"/>
-            <a:ext cx="11013840" cy="1128600"/>
+            <a:ext cx="11013480" cy="1128240"/>
           </a:xfrm>
           <a:prstGeom prst="rect">
             <a:avLst/>
@@ -9559,7 +9644,13 @@
           </a:bodyPr>
           <a:p>
             <a:pPr indent="0" algn="ctr">
+              <a:lnSpc>
+                <a:spcPct val="100000"/>
+              </a:lnSpc>
               <a:buNone/>
+              <a:tabLst>
+                <a:tab algn="l" pos="0"/>
+              </a:tabLst>
             </a:pPr>
             <a:r>
               <a:rPr b="0" lang="en-US" sz="4400" strike="noStrike" u="none">
@@ -9598,15 +9689,15 @@
         <p:spPr>
           <a:xfrm>
             <a:off x="572400" y="1681560"/>
-            <a:ext cx="10968120" cy="13680"/>
+            <a:ext cx="10967760" cy="13320"/>
           </a:xfrm>
           <a:custGeom>
             <a:avLst/>
             <a:gdLst>
-              <a:gd name="textAreaLeft" fmla="*/ 0 w 10968120"/>
-              <a:gd name="textAreaRight" fmla="*/ 10972800 w 10968120"/>
-              <a:gd name="textAreaTop" fmla="*/ 0 h 13680"/>
-              <a:gd name="textAreaBottom" fmla="*/ 18360 h 13680"/>
+              <a:gd name="textAreaLeft" fmla="*/ 0 w 10967760"/>
+              <a:gd name="textAreaRight" fmla="*/ 10972800 w 10967760"/>
+              <a:gd name="textAreaTop" fmla="*/ 0 h 13320"/>
+              <a:gd name="textAreaBottom" fmla="*/ 18360 h 13320"/>
               <a:gd name="GluePoint1X" fmla="*/ 0 w 10972800"/>
               <a:gd name="GluePoint1Y" fmla="*/ 0 h 18288"/>
               <a:gd name="GluePoint2X" fmla="*/ 356616 w 10972800"/>
@@ -10220,6 +10311,11 @@
             <a:noAutofit/>
           </a:bodyPr>
           <a:p>
+            <a:pPr>
+              <a:lnSpc>
+                <a:spcPct val="100000"/>
+              </a:lnSpc>
+            </a:pPr>
             <a:endParaRPr b="0" lang="en-US" sz="1800" strike="noStrike" u="none">
               <a:solidFill>
                 <a:schemeClr val="lt1"/>
@@ -10244,7 +10340,7 @@
         <p:spPr>
           <a:xfrm>
             <a:off x="10199520" y="282600"/>
-            <a:ext cx="1795680" cy="595440"/>
+            <a:ext cx="1795320" cy="595080"/>
           </a:xfrm>
           <a:prstGeom prst="rect">
             <a:avLst/>
@@ -10258,13 +10354,13 @@
       <p:sp>
         <p:nvSpPr>
           <p:cNvPr id="127" name=""/>
-          <p:cNvSpPr txBox="1"/>
+          <p:cNvSpPr/>
           <p:nvPr/>
         </p:nvSpPr>
         <p:spPr>
           <a:xfrm>
             <a:off x="1600200" y="2743200"/>
-            <a:ext cx="8686800" cy="2057400"/>
+            <a:ext cx="8686440" cy="2057040"/>
           </a:xfrm>
           <a:prstGeom prst="rect">
             <a:avLst/>
@@ -10274,12 +10370,21 @@
             <a:noFill/>
           </a:ln>
         </p:spPr>
+        <p:style>
+          <a:lnRef idx="0"/>
+          <a:fillRef idx="0"/>
+          <a:effectRef idx="0"/>
+          <a:fontRef idx="minor"/>
+        </p:style>
         <p:txBody>
           <a:bodyPr lIns="90000" rIns="90000" tIns="45000" bIns="45000" anchor="t">
             <a:spAutoFit/>
           </a:bodyPr>
           <a:p>
             <a:pPr marL="216000" indent="-216000">
+              <a:lnSpc>
+                <a:spcPct val="100000"/>
+              </a:lnSpc>
               <a:buClr>
                 <a:srgbClr val="000000"/>
               </a:buClr>
@@ -10309,6 +10414,9 @@
           </a:p>
           <a:p>
             <a:pPr marL="216000" indent="-216000">
+              <a:lnSpc>
+                <a:spcPct val="100000"/>
+              </a:lnSpc>
               <a:buClr>
                 <a:srgbClr val="000000"/>
               </a:buClr>
@@ -10338,6 +10446,9 @@
           </a:p>
           <a:p>
             <a:pPr marL="216000" indent="-216000">
+              <a:lnSpc>
+                <a:spcPct val="100000"/>
+              </a:lnSpc>
               <a:buClr>
                 <a:srgbClr val="000000"/>
               </a:buClr>
@@ -10417,7 +10528,7 @@
         <p:spPr>
           <a:xfrm>
             <a:off x="572400" y="238680"/>
-            <a:ext cx="11013840" cy="903600"/>
+            <a:ext cx="11013480" cy="903240"/>
           </a:xfrm>
           <a:prstGeom prst="rect">
             <a:avLst/>
@@ -10479,15 +10590,15 @@
         <p:spPr>
           <a:xfrm>
             <a:off x="572400" y="1681560"/>
-            <a:ext cx="10968120" cy="13680"/>
+            <a:ext cx="10967760" cy="13320"/>
           </a:xfrm>
           <a:custGeom>
             <a:avLst/>
             <a:gdLst>
-              <a:gd name="textAreaLeft" fmla="*/ 0 w 10968120"/>
-              <a:gd name="textAreaRight" fmla="*/ 10972800 w 10968120"/>
-              <a:gd name="textAreaTop" fmla="*/ 0 h 13680"/>
-              <a:gd name="textAreaBottom" fmla="*/ 18360 h 13680"/>
+              <a:gd name="textAreaLeft" fmla="*/ 0 w 10967760"/>
+              <a:gd name="textAreaRight" fmla="*/ 10972800 w 10967760"/>
+              <a:gd name="textAreaTop" fmla="*/ 0 h 13320"/>
+              <a:gd name="textAreaBottom" fmla="*/ 18360 h 13320"/>
               <a:gd name="GluePoint1X" fmla="*/ 0 w 10972800"/>
               <a:gd name="GluePoint1Y" fmla="*/ 0 h 18288"/>
               <a:gd name="GluePoint2X" fmla="*/ 356616 w 10972800"/>
@@ -11126,7 +11237,7 @@
         <p:spPr>
           <a:xfrm>
             <a:off x="914400" y="2057400"/>
-            <a:ext cx="10284480" cy="4113000"/>
+            <a:ext cx="10284120" cy="4113000"/>
           </a:xfrm>
           <a:prstGeom prst="rect">
             <a:avLst/>
@@ -11257,7 +11368,7 @@
         <p:spPr>
           <a:xfrm>
             <a:off x="10199520" y="282600"/>
-            <a:ext cx="1795680" cy="595440"/>
+            <a:ext cx="1795320" cy="595080"/>
           </a:xfrm>
           <a:prstGeom prst="rect">
             <a:avLst/>
@@ -11320,7 +11431,7 @@
         <p:spPr>
           <a:xfrm>
             <a:off x="156960" y="0"/>
-            <a:ext cx="12184200" cy="6853320"/>
+            <a:ext cx="12183840" cy="6852960"/>
           </a:xfrm>
           <a:prstGeom prst="rect">
             <a:avLst/>
@@ -11377,7 +11488,7 @@
         <p:spPr>
           <a:xfrm>
             <a:off x="572400" y="238680"/>
-            <a:ext cx="11013840" cy="1199520"/>
+            <a:ext cx="11013480" cy="1199160"/>
           </a:xfrm>
           <a:prstGeom prst="rect">
             <a:avLst/>
@@ -11439,15 +11550,15 @@
         <p:spPr>
           <a:xfrm>
             <a:off x="572400" y="1681560"/>
-            <a:ext cx="10968120" cy="13680"/>
+            <a:ext cx="10967760" cy="13320"/>
           </a:xfrm>
           <a:custGeom>
             <a:avLst/>
             <a:gdLst>
-              <a:gd name="textAreaLeft" fmla="*/ 0 w 10968120"/>
-              <a:gd name="textAreaRight" fmla="*/ 10972800 w 10968120"/>
-              <a:gd name="textAreaTop" fmla="*/ 0 h 13680"/>
-              <a:gd name="textAreaBottom" fmla="*/ 18360 h 13680"/>
+              <a:gd name="textAreaLeft" fmla="*/ 0 w 10967760"/>
+              <a:gd name="textAreaRight" fmla="*/ 10972800 w 10967760"/>
+              <a:gd name="textAreaTop" fmla="*/ 0 h 13320"/>
+              <a:gd name="textAreaBottom" fmla="*/ 18360 h 13320"/>
               <a:gd name="GluePoint1X" fmla="*/ 0 w 10972800"/>
               <a:gd name="GluePoint1Y" fmla="*/ 0 h 18288"/>
               <a:gd name="GluePoint2X" fmla="*/ 356616 w 10972800"/>
@@ -12090,7 +12201,7 @@
         <p:spPr>
           <a:xfrm>
             <a:off x="685800" y="1829520"/>
-            <a:ext cx="10855080" cy="2970720"/>
+            <a:ext cx="10854720" cy="2970360"/>
           </a:xfrm>
           <a:prstGeom prst="rect">
             <a:avLst/>
@@ -12305,7 +12416,7 @@
         <p:spPr>
           <a:xfrm>
             <a:off x="10199520" y="282600"/>
-            <a:ext cx="1795680" cy="595440"/>
+            <a:ext cx="1795320" cy="595080"/>
           </a:xfrm>
           <a:prstGeom prst="rect">
             <a:avLst/>
@@ -12368,7 +12479,7 @@
         <p:spPr>
           <a:xfrm>
             <a:off x="156960" y="0"/>
-            <a:ext cx="12184200" cy="6853320"/>
+            <a:ext cx="12183840" cy="6852960"/>
           </a:xfrm>
           <a:prstGeom prst="rect">
             <a:avLst/>
@@ -12425,7 +12536,7 @@
         <p:spPr>
           <a:xfrm>
             <a:off x="572400" y="238680"/>
-            <a:ext cx="11013840" cy="1199520"/>
+            <a:ext cx="11013480" cy="1199160"/>
           </a:xfrm>
           <a:prstGeom prst="rect">
             <a:avLst/>
@@ -12487,15 +12598,15 @@
         <p:spPr>
           <a:xfrm>
             <a:off x="572400" y="1681560"/>
-            <a:ext cx="10968120" cy="13680"/>
+            <a:ext cx="10967760" cy="13320"/>
           </a:xfrm>
           <a:custGeom>
             <a:avLst/>
             <a:gdLst>
-              <a:gd name="textAreaLeft" fmla="*/ 0 w 10968120"/>
-              <a:gd name="textAreaRight" fmla="*/ 10972800 w 10968120"/>
-              <a:gd name="textAreaTop" fmla="*/ 0 h 13680"/>
-              <a:gd name="textAreaBottom" fmla="*/ 18360 h 13680"/>
+              <a:gd name="textAreaLeft" fmla="*/ 0 w 10967760"/>
+              <a:gd name="textAreaRight" fmla="*/ 10972800 w 10967760"/>
+              <a:gd name="textAreaTop" fmla="*/ 0 h 13320"/>
+              <a:gd name="textAreaBottom" fmla="*/ 18360 h 13320"/>
               <a:gd name="GluePoint1X" fmla="*/ 0 w 10972800"/>
               <a:gd name="GluePoint1Y" fmla="*/ 0 h 18288"/>
               <a:gd name="GluePoint2X" fmla="*/ 356616 w 10972800"/>
@@ -13138,7 +13249,7 @@
         <p:spPr>
           <a:xfrm>
             <a:off x="685800" y="1829520"/>
-            <a:ext cx="10855080" cy="4113360"/>
+            <a:ext cx="10854720" cy="4113000"/>
           </a:xfrm>
           <a:prstGeom prst="rect">
             <a:avLst/>
@@ -13417,7 +13528,7 @@
         <p:spPr>
           <a:xfrm>
             <a:off x="10199520" y="282600"/>
-            <a:ext cx="1795680" cy="595440"/>
+            <a:ext cx="1795320" cy="595080"/>
           </a:xfrm>
           <a:prstGeom prst="rect">
             <a:avLst/>
@@ -13480,7 +13591,7 @@
         <p:spPr>
           <a:xfrm>
             <a:off x="156960" y="0"/>
-            <a:ext cx="12184200" cy="6853320"/>
+            <a:ext cx="12183840" cy="6852960"/>
           </a:xfrm>
           <a:prstGeom prst="rect">
             <a:avLst/>
@@ -13537,7 +13648,7 @@
         <p:spPr>
           <a:xfrm>
             <a:off x="572400" y="238680"/>
-            <a:ext cx="11013840" cy="1199520"/>
+            <a:ext cx="11013480" cy="1199160"/>
           </a:xfrm>
           <a:prstGeom prst="rect">
             <a:avLst/>
@@ -13599,15 +13710,15 @@
         <p:spPr>
           <a:xfrm>
             <a:off x="572400" y="1681560"/>
-            <a:ext cx="10968120" cy="13680"/>
+            <a:ext cx="10967760" cy="13320"/>
           </a:xfrm>
           <a:custGeom>
             <a:avLst/>
             <a:gdLst>
-              <a:gd name="textAreaLeft" fmla="*/ 0 w 10968120"/>
-              <a:gd name="textAreaRight" fmla="*/ 10972800 w 10968120"/>
-              <a:gd name="textAreaTop" fmla="*/ 0 h 13680"/>
-              <a:gd name="textAreaBottom" fmla="*/ 18360 h 13680"/>
+              <a:gd name="textAreaLeft" fmla="*/ 0 w 10967760"/>
+              <a:gd name="textAreaRight" fmla="*/ 10972800 w 10967760"/>
+              <a:gd name="textAreaTop" fmla="*/ 0 h 13320"/>
+              <a:gd name="textAreaBottom" fmla="*/ 18360 h 13320"/>
               <a:gd name="GluePoint1X" fmla="*/ 0 w 10972800"/>
               <a:gd name="GluePoint1Y" fmla="*/ 0 h 18288"/>
               <a:gd name="GluePoint2X" fmla="*/ 356616 w 10972800"/>
@@ -14250,7 +14361,7 @@
         <p:spPr>
           <a:xfrm>
             <a:off x="685800" y="1829520"/>
-            <a:ext cx="10855080" cy="4113360"/>
+            <a:ext cx="10854720" cy="4113000"/>
           </a:xfrm>
           <a:prstGeom prst="rect">
             <a:avLst/>
@@ -14563,7 +14674,7 @@
         <p:spPr>
           <a:xfrm>
             <a:off x="10199520" y="282600"/>
-            <a:ext cx="1795680" cy="595440"/>
+            <a:ext cx="1795320" cy="595080"/>
           </a:xfrm>
           <a:prstGeom prst="rect">
             <a:avLst/>
@@ -14626,7 +14737,7 @@
         <p:spPr>
           <a:xfrm>
             <a:off x="3600" y="0"/>
-            <a:ext cx="12184200" cy="6853320"/>
+            <a:ext cx="12183840" cy="6852960"/>
           </a:xfrm>
           <a:prstGeom prst="rect">
             <a:avLst/>
@@ -14683,7 +14794,7 @@
         <p:spPr>
           <a:xfrm>
             <a:off x="572400" y="238680"/>
-            <a:ext cx="11013840" cy="1361160"/>
+            <a:ext cx="11013480" cy="1360800"/>
           </a:xfrm>
           <a:prstGeom prst="rect">
             <a:avLst/>
@@ -14744,15 +14855,15 @@
         <p:spPr>
           <a:xfrm>
             <a:off x="572400" y="1681560"/>
-            <a:ext cx="10968120" cy="13680"/>
+            <a:ext cx="10967760" cy="13320"/>
           </a:xfrm>
           <a:custGeom>
             <a:avLst/>
             <a:gdLst>
-              <a:gd name="textAreaLeft" fmla="*/ 0 w 10968120"/>
-              <a:gd name="textAreaRight" fmla="*/ 10972800 w 10968120"/>
-              <a:gd name="textAreaTop" fmla="*/ 0 h 13680"/>
-              <a:gd name="textAreaBottom" fmla="*/ 18360 h 13680"/>
+              <a:gd name="textAreaLeft" fmla="*/ 0 w 10967760"/>
+              <a:gd name="textAreaRight" fmla="*/ 10972800 w 10967760"/>
+              <a:gd name="textAreaTop" fmla="*/ 0 h 13320"/>
+              <a:gd name="textAreaBottom" fmla="*/ 18360 h 13320"/>
               <a:gd name="GluePoint1X" fmla="*/ 0 w 10972800"/>
               <a:gd name="GluePoint1Y" fmla="*/ 0 h 18288"/>
               <a:gd name="GluePoint2X" fmla="*/ 356616 w 10972800"/>
@@ -15395,7 +15506,7 @@
         <p:spPr>
           <a:xfrm>
             <a:off x="685800" y="2057400"/>
-            <a:ext cx="5257080" cy="3884400"/>
+            <a:ext cx="5256720" cy="3884040"/>
           </a:xfrm>
           <a:prstGeom prst="rect">
             <a:avLst/>
@@ -15599,7 +15710,7 @@
         <p:spPr>
           <a:xfrm>
             <a:off x="6172200" y="2039400"/>
-            <a:ext cx="4836960" cy="3903480"/>
+            <a:ext cx="4836600" cy="3903120"/>
           </a:xfrm>
           <a:prstGeom prst="rect">
             <a:avLst/>
@@ -15623,7 +15734,7 @@
         <p:spPr>
           <a:xfrm>
             <a:off x="10199520" y="282600"/>
-            <a:ext cx="1795680" cy="595440"/>
+            <a:ext cx="1795320" cy="595080"/>
           </a:xfrm>
           <a:prstGeom prst="rect">
             <a:avLst/>
@@ -15686,7 +15797,7 @@
         <p:spPr>
           <a:xfrm>
             <a:off x="3600" y="0"/>
-            <a:ext cx="12184200" cy="6853320"/>
+            <a:ext cx="12183840" cy="6852960"/>
           </a:xfrm>
           <a:prstGeom prst="rect">
             <a:avLst/>
@@ -15743,7 +15854,7 @@
         <p:spPr>
           <a:xfrm>
             <a:off x="572400" y="238680"/>
-            <a:ext cx="11013840" cy="1361160"/>
+            <a:ext cx="11013480" cy="1360800"/>
           </a:xfrm>
           <a:prstGeom prst="rect">
             <a:avLst/>
@@ -15804,15 +15915,15 @@
         <p:spPr>
           <a:xfrm>
             <a:off x="572400" y="1681560"/>
-            <a:ext cx="10968120" cy="13680"/>
+            <a:ext cx="10967760" cy="13320"/>
           </a:xfrm>
           <a:custGeom>
             <a:avLst/>
             <a:gdLst>
-              <a:gd name="textAreaLeft" fmla="*/ 0 w 10968120"/>
-              <a:gd name="textAreaRight" fmla="*/ 10972800 w 10968120"/>
-              <a:gd name="textAreaTop" fmla="*/ 0 h 13680"/>
-              <a:gd name="textAreaBottom" fmla="*/ 18360 h 13680"/>
+              <a:gd name="textAreaLeft" fmla="*/ 0 w 10967760"/>
+              <a:gd name="textAreaRight" fmla="*/ 10972800 w 10967760"/>
+              <a:gd name="textAreaTop" fmla="*/ 0 h 13320"/>
+              <a:gd name="textAreaBottom" fmla="*/ 18360 h 13320"/>
               <a:gd name="GluePoint1X" fmla="*/ 0 w 10972800"/>
               <a:gd name="GluePoint1Y" fmla="*/ 0 h 18288"/>
               <a:gd name="GluePoint2X" fmla="*/ 356616 w 10972800"/>
@@ -16451,7 +16562,7 @@
         <p:spPr>
           <a:xfrm>
             <a:off x="685800" y="2057400"/>
-            <a:ext cx="10971000" cy="1918440"/>
+            <a:ext cx="10970640" cy="1918440"/>
           </a:xfrm>
           <a:prstGeom prst="rect">
             <a:avLst/>
@@ -16582,7 +16693,7 @@
         <p:spPr>
           <a:xfrm>
             <a:off x="1418760" y="4343400"/>
-            <a:ext cx="8836920" cy="1808280"/>
+            <a:ext cx="8836560" cy="1807920"/>
           </a:xfrm>
           <a:prstGeom prst="rect">
             <a:avLst/>
@@ -16606,7 +16717,7 @@
         <p:spPr>
           <a:xfrm>
             <a:off x="10199520" y="282600"/>
-            <a:ext cx="1795680" cy="595440"/>
+            <a:ext cx="1795320" cy="595080"/>
           </a:xfrm>
           <a:prstGeom prst="rect">
             <a:avLst/>
@@ -16669,7 +16780,7 @@
         <p:spPr>
           <a:xfrm>
             <a:off x="0" y="0"/>
-            <a:ext cx="12184200" cy="6853320"/>
+            <a:ext cx="12183840" cy="6852960"/>
           </a:xfrm>
           <a:prstGeom prst="rect">
             <a:avLst/>
@@ -16726,7 +16837,7 @@
         <p:spPr>
           <a:xfrm>
             <a:off x="572400" y="238680"/>
-            <a:ext cx="11013840" cy="1128600"/>
+            <a:ext cx="11013480" cy="1128240"/>
           </a:xfrm>
           <a:prstGeom prst="rect">
             <a:avLst/>
@@ -16787,15 +16898,15 @@
         <p:spPr>
           <a:xfrm>
             <a:off x="572400" y="1681560"/>
-            <a:ext cx="10968120" cy="13680"/>
+            <a:ext cx="10967760" cy="13320"/>
           </a:xfrm>
           <a:custGeom>
             <a:avLst/>
             <a:gdLst>
-              <a:gd name="textAreaLeft" fmla="*/ 0 w 10968120"/>
-              <a:gd name="textAreaRight" fmla="*/ 10972800 w 10968120"/>
-              <a:gd name="textAreaTop" fmla="*/ 0 h 13680"/>
-              <a:gd name="textAreaBottom" fmla="*/ 18360 h 13680"/>
+              <a:gd name="textAreaLeft" fmla="*/ 0 w 10967760"/>
+              <a:gd name="textAreaRight" fmla="*/ 10972800 w 10967760"/>
+              <a:gd name="textAreaTop" fmla="*/ 0 h 13320"/>
+              <a:gd name="textAreaBottom" fmla="*/ 18360 h 13320"/>
               <a:gd name="GluePoint1X" fmla="*/ 0 w 10972800"/>
               <a:gd name="GluePoint1Y" fmla="*/ 0 h 18288"/>
               <a:gd name="GluePoint2X" fmla="*/ 356616 w 10972800"/>
@@ -17434,7 +17545,7 @@
         <p:spPr>
           <a:xfrm>
             <a:off x="685800" y="2057400"/>
-            <a:ext cx="10971000" cy="821160"/>
+            <a:ext cx="10970640" cy="821160"/>
           </a:xfrm>
           <a:prstGeom prst="rect">
             <a:avLst/>
@@ -17490,7 +17601,7 @@
         </p:nvGraphicFramePr>
         <p:xfrm>
           <a:off x="768600" y="3227040"/>
-          <a:ext cx="5075280" cy="1733400"/>
+          <a:ext cx="10265040" cy="2282040"/>
         </p:xfrm>
         <a:graphic>
           <a:graphicData uri="http://schemas.openxmlformats.org/drawingml/2006/table">
@@ -18127,7 +18238,7 @@
         <p:spPr>
           <a:xfrm>
             <a:off x="10199520" y="282600"/>
-            <a:ext cx="1795680" cy="595440"/>
+            <a:ext cx="1795320" cy="595080"/>
           </a:xfrm>
           <a:prstGeom prst="rect">
             <a:avLst/>
@@ -18190,7 +18301,7 @@
         <p:spPr>
           <a:xfrm>
             <a:off x="0" y="4320"/>
-            <a:ext cx="12184200" cy="6853320"/>
+            <a:ext cx="12183840" cy="6852960"/>
           </a:xfrm>
           <a:prstGeom prst="rect">
             <a:avLst/>
@@ -18247,7 +18358,7 @@
         <p:spPr>
           <a:xfrm>
             <a:off x="572400" y="238680"/>
-            <a:ext cx="11013840" cy="1361160"/>
+            <a:ext cx="11013480" cy="1360800"/>
           </a:xfrm>
           <a:prstGeom prst="rect">
             <a:avLst/>
@@ -18308,15 +18419,15 @@
         <p:spPr>
           <a:xfrm>
             <a:off x="572400" y="1681560"/>
-            <a:ext cx="10968120" cy="13680"/>
+            <a:ext cx="10967760" cy="13320"/>
           </a:xfrm>
           <a:custGeom>
             <a:avLst/>
             <a:gdLst>
-              <a:gd name="textAreaLeft" fmla="*/ 0 w 10968120"/>
-              <a:gd name="textAreaRight" fmla="*/ 10972800 w 10968120"/>
-              <a:gd name="textAreaTop" fmla="*/ 0 h 13680"/>
-              <a:gd name="textAreaBottom" fmla="*/ 18360 h 13680"/>
+              <a:gd name="textAreaLeft" fmla="*/ 0 w 10967760"/>
+              <a:gd name="textAreaRight" fmla="*/ 10972800 w 10967760"/>
+              <a:gd name="textAreaTop" fmla="*/ 0 h 13320"/>
+              <a:gd name="textAreaBottom" fmla="*/ 18360 h 13320"/>
               <a:gd name="GluePoint1X" fmla="*/ 0 w 10972800"/>
               <a:gd name="GluePoint1Y" fmla="*/ 0 h 18288"/>
               <a:gd name="GluePoint2X" fmla="*/ 356616 w 10972800"/>
@@ -18955,7 +19066,7 @@
         <p:spPr>
           <a:xfrm>
             <a:off x="685800" y="2057400"/>
-            <a:ext cx="10971000" cy="821160"/>
+            <a:ext cx="10970640" cy="821160"/>
           </a:xfrm>
           <a:prstGeom prst="rect">
             <a:avLst/>
@@ -19038,7 +19149,7 @@
         <p:spPr>
           <a:xfrm>
             <a:off x="371520" y="3200400"/>
-            <a:ext cx="11286720" cy="2285640"/>
+            <a:ext cx="11286360" cy="2285280"/>
           </a:xfrm>
           <a:prstGeom prst="rect">
             <a:avLst/>
@@ -19062,7 +19173,7 @@
         <p:spPr>
           <a:xfrm>
             <a:off x="10199520" y="282600"/>
-            <a:ext cx="1795680" cy="595440"/>
+            <a:ext cx="1795320" cy="595080"/>
           </a:xfrm>
           <a:prstGeom prst="rect">
             <a:avLst/>
